--- a/Euler/Euler.pptx
+++ b/Euler/Euler.pptx
@@ -7,6 +7,8 @@
   <p:sldIdLst>
     <p:sldId id="256" r:id="rId2"/>
     <p:sldId id="257" r:id="rId3"/>
+    <p:sldId id="258" r:id="rId4"/>
+    <p:sldId id="259" r:id="rId5"/>
   </p:sldIdLst>
   <p:sldSz cx="12192000" cy="6858000"/>
   <p:notesSz cx="6858000" cy="9144000"/>
@@ -105,6 +107,11 @@
       </a:defRPr>
     </a:lvl9pPr>
   </p:defaultTextStyle>
+  <p:extLst>
+    <p:ext uri="{EFAFB233-063F-42B5-8137-9DF3F51BA10A}">
+      <p15:sldGuideLst xmlns:p15="http://schemas.microsoft.com/office/powerpoint/2012/main"/>
+    </p:ext>
+  </p:extLst>
 </p:presentation>
 </file>
 
@@ -255,7 +262,7 @@
           <a:p>
             <a:fld id="{AA707B2D-9D38-4DD2-AA55-35A51E62F204}" type="datetimeFigureOut">
               <a:rPr lang="en-US" smtClean="0"/>
-              <a:t>5/14/2026</a:t>
+              <a:t>5/20/2026</a:t>
             </a:fld>
             <a:endParaRPr lang="en-US"/>
           </a:p>
@@ -453,7 +460,7 @@
           <a:p>
             <a:fld id="{AA707B2D-9D38-4DD2-AA55-35A51E62F204}" type="datetimeFigureOut">
               <a:rPr lang="en-US" smtClean="0"/>
-              <a:t>5/14/2026</a:t>
+              <a:t>5/20/2026</a:t>
             </a:fld>
             <a:endParaRPr lang="en-US"/>
           </a:p>
@@ -661,7 +668,7 @@
           <a:p>
             <a:fld id="{AA707B2D-9D38-4DD2-AA55-35A51E62F204}" type="datetimeFigureOut">
               <a:rPr lang="en-US" smtClean="0"/>
-              <a:t>5/14/2026</a:t>
+              <a:t>5/20/2026</a:t>
             </a:fld>
             <a:endParaRPr lang="en-US"/>
           </a:p>
@@ -859,7 +866,7 @@
           <a:p>
             <a:fld id="{AA707B2D-9D38-4DD2-AA55-35A51E62F204}" type="datetimeFigureOut">
               <a:rPr lang="en-US" smtClean="0"/>
-              <a:t>5/14/2026</a:t>
+              <a:t>5/20/2026</a:t>
             </a:fld>
             <a:endParaRPr lang="en-US"/>
           </a:p>
@@ -1134,7 +1141,7 @@
           <a:p>
             <a:fld id="{AA707B2D-9D38-4DD2-AA55-35A51E62F204}" type="datetimeFigureOut">
               <a:rPr lang="en-US" smtClean="0"/>
-              <a:t>5/14/2026</a:t>
+              <a:t>5/20/2026</a:t>
             </a:fld>
             <a:endParaRPr lang="en-US"/>
           </a:p>
@@ -1399,7 +1406,7 @@
           <a:p>
             <a:fld id="{AA707B2D-9D38-4DD2-AA55-35A51E62F204}" type="datetimeFigureOut">
               <a:rPr lang="en-US" smtClean="0"/>
-              <a:t>5/14/2026</a:t>
+              <a:t>5/20/2026</a:t>
             </a:fld>
             <a:endParaRPr lang="en-US"/>
           </a:p>
@@ -1811,7 +1818,7 @@
           <a:p>
             <a:fld id="{AA707B2D-9D38-4DD2-AA55-35A51E62F204}" type="datetimeFigureOut">
               <a:rPr lang="en-US" smtClean="0"/>
-              <a:t>5/14/2026</a:t>
+              <a:t>5/20/2026</a:t>
             </a:fld>
             <a:endParaRPr lang="en-US"/>
           </a:p>
@@ -1952,7 +1959,7 @@
           <a:p>
             <a:fld id="{AA707B2D-9D38-4DD2-AA55-35A51E62F204}" type="datetimeFigureOut">
               <a:rPr lang="en-US" smtClean="0"/>
-              <a:t>5/14/2026</a:t>
+              <a:t>5/20/2026</a:t>
             </a:fld>
             <a:endParaRPr lang="en-US"/>
           </a:p>
@@ -2065,7 +2072,7 @@
           <a:p>
             <a:fld id="{AA707B2D-9D38-4DD2-AA55-35A51E62F204}" type="datetimeFigureOut">
               <a:rPr lang="en-US" smtClean="0"/>
-              <a:t>5/14/2026</a:t>
+              <a:t>5/20/2026</a:t>
             </a:fld>
             <a:endParaRPr lang="en-US"/>
           </a:p>
@@ -2376,7 +2383,7 @@
           <a:p>
             <a:fld id="{AA707B2D-9D38-4DD2-AA55-35A51E62F204}" type="datetimeFigureOut">
               <a:rPr lang="en-US" smtClean="0"/>
-              <a:t>5/14/2026</a:t>
+              <a:t>5/20/2026</a:t>
             </a:fld>
             <a:endParaRPr lang="en-US"/>
           </a:p>
@@ -2664,7 +2671,7 @@
           <a:p>
             <a:fld id="{AA707B2D-9D38-4DD2-AA55-35A51E62F204}" type="datetimeFigureOut">
               <a:rPr lang="en-US" smtClean="0"/>
-              <a:t>5/14/2026</a:t>
+              <a:t>5/20/2026</a:t>
             </a:fld>
             <a:endParaRPr lang="en-US"/>
           </a:p>
@@ -2905,7 +2912,7 @@
           <a:p>
             <a:fld id="{AA707B2D-9D38-4DD2-AA55-35A51E62F204}" type="datetimeFigureOut">
               <a:rPr lang="en-US" smtClean="0"/>
-              <a:t>5/14/2026</a:t>
+              <a:t>5/20/2026</a:t>
             </a:fld>
             <a:endParaRPr lang="en-US"/>
           </a:p>
@@ -3820,8 +3827,8 @@
           </a:fontRef>
         </p:style>
       </p:cxnSp>
-      <mc:AlternateContent xmlns:mc="http://schemas.openxmlformats.org/markup-compatibility/2006">
-        <mc:Choice xmlns:a14="http://schemas.microsoft.com/office/drawing/2010/main" Requires="a14">
+      <mc:AlternateContent xmlns:mc="http://schemas.openxmlformats.org/markup-compatibility/2006" xmlns:a14="http://schemas.microsoft.com/office/drawing/2010/main">
+        <mc:Choice Requires="a14">
           <p:sp>
             <p:nvSpPr>
               <p:cNvPr id="17" name="TextBox 16">
@@ -3874,7 +3881,7 @@
             </p:txBody>
           </p:sp>
         </mc:Choice>
-        <mc:Fallback>
+        <mc:Fallback xmlns="">
           <p:sp>
             <p:nvSpPr>
               <p:cNvPr id="17" name="TextBox 16">
@@ -3919,8 +3926,8 @@
           </p:sp>
         </mc:Fallback>
       </mc:AlternateContent>
-      <mc:AlternateContent xmlns:mc="http://schemas.openxmlformats.org/markup-compatibility/2006">
-        <mc:Choice xmlns:a14="http://schemas.microsoft.com/office/drawing/2010/main" Requires="a14">
+      <mc:AlternateContent xmlns:mc="http://schemas.openxmlformats.org/markup-compatibility/2006" xmlns:a14="http://schemas.microsoft.com/office/drawing/2010/main">
+        <mc:Choice Requires="a14">
           <p:sp>
             <p:nvSpPr>
               <p:cNvPr id="18" name="TextBox 17">
@@ -3998,7 +4005,7 @@
             </p:txBody>
           </p:sp>
         </mc:Choice>
-        <mc:Fallback>
+        <mc:Fallback xmlns="">
           <p:sp>
             <p:nvSpPr>
               <p:cNvPr id="18" name="TextBox 17">
@@ -4043,8 +4050,8 @@
           </p:sp>
         </mc:Fallback>
       </mc:AlternateContent>
-      <mc:AlternateContent xmlns:mc="http://schemas.openxmlformats.org/markup-compatibility/2006">
-        <mc:Choice xmlns:a14="http://schemas.microsoft.com/office/drawing/2010/main" Requires="a14">
+      <mc:AlternateContent xmlns:mc="http://schemas.openxmlformats.org/markup-compatibility/2006" xmlns:a14="http://schemas.microsoft.com/office/drawing/2010/main">
+        <mc:Choice Requires="a14">
           <p:sp>
             <p:nvSpPr>
               <p:cNvPr id="19" name="TextBox 18">
@@ -4122,7 +4129,7 @@
             </p:txBody>
           </p:sp>
         </mc:Choice>
-        <mc:Fallback>
+        <mc:Fallback xmlns="">
           <p:sp>
             <p:nvSpPr>
               <p:cNvPr id="19" name="TextBox 18">
@@ -4167,8 +4174,8 @@
           </p:sp>
         </mc:Fallback>
       </mc:AlternateContent>
-      <mc:AlternateContent xmlns:mc="http://schemas.openxmlformats.org/markup-compatibility/2006">
-        <mc:Choice xmlns:a14="http://schemas.microsoft.com/office/drawing/2010/main" Requires="a14">
+      <mc:AlternateContent xmlns:mc="http://schemas.openxmlformats.org/markup-compatibility/2006" xmlns:a14="http://schemas.microsoft.com/office/drawing/2010/main">
+        <mc:Choice Requires="a14">
           <p:sp>
             <p:nvSpPr>
               <p:cNvPr id="20" name="TextBox 19">
@@ -4250,7 +4257,7 @@
             </p:txBody>
           </p:sp>
         </mc:Choice>
-        <mc:Fallback>
+        <mc:Fallback xmlns="">
           <p:sp>
             <p:nvSpPr>
               <p:cNvPr id="20" name="TextBox 19">
@@ -4295,8 +4302,8 @@
           </p:sp>
         </mc:Fallback>
       </mc:AlternateContent>
-      <mc:AlternateContent xmlns:mc="http://schemas.openxmlformats.org/markup-compatibility/2006">
-        <mc:Choice xmlns:a14="http://schemas.microsoft.com/office/drawing/2010/main" Requires="a14">
+      <mc:AlternateContent xmlns:mc="http://schemas.openxmlformats.org/markup-compatibility/2006" xmlns:a14="http://schemas.microsoft.com/office/drawing/2010/main">
+        <mc:Choice Requires="a14">
           <p:sp>
             <p:nvSpPr>
               <p:cNvPr id="21" name="TextBox 20">
@@ -4350,7 +4357,7 @@
             </p:txBody>
           </p:sp>
         </mc:Choice>
-        <mc:Fallback>
+        <mc:Fallback xmlns="">
           <p:sp>
             <p:nvSpPr>
               <p:cNvPr id="21" name="TextBox 20">
@@ -4395,8 +4402,8 @@
           </p:sp>
         </mc:Fallback>
       </mc:AlternateContent>
-      <mc:AlternateContent xmlns:mc="http://schemas.openxmlformats.org/markup-compatibility/2006">
-        <mc:Choice xmlns:a14="http://schemas.microsoft.com/office/drawing/2010/main" Requires="a14">
+      <mc:AlternateContent xmlns:mc="http://schemas.openxmlformats.org/markup-compatibility/2006" xmlns:a14="http://schemas.microsoft.com/office/drawing/2010/main">
+        <mc:Choice Requires="a14">
           <p:sp>
             <p:nvSpPr>
               <p:cNvPr id="22" name="TextBox 21">
@@ -4458,7 +4465,7 @@
             </p:txBody>
           </p:sp>
         </mc:Choice>
-        <mc:Fallback>
+        <mc:Fallback xmlns="">
           <p:sp>
             <p:nvSpPr>
               <p:cNvPr id="22" name="TextBox 21">
@@ -4503,8 +4510,8 @@
           </p:sp>
         </mc:Fallback>
       </mc:AlternateContent>
-      <mc:AlternateContent xmlns:mc="http://schemas.openxmlformats.org/markup-compatibility/2006">
-        <mc:Choice xmlns:a14="http://schemas.microsoft.com/office/drawing/2010/main" Requires="a14">
+      <mc:AlternateContent xmlns:mc="http://schemas.openxmlformats.org/markup-compatibility/2006" xmlns:a14="http://schemas.microsoft.com/office/drawing/2010/main">
+        <mc:Choice Requires="a14">
           <p:sp>
             <p:nvSpPr>
               <p:cNvPr id="23" name="TextBox 22">
@@ -4561,7 +4568,7 @@
             </p:txBody>
           </p:sp>
         </mc:Choice>
-        <mc:Fallback>
+        <mc:Fallback xmlns="">
           <p:sp>
             <p:nvSpPr>
               <p:cNvPr id="23" name="TextBox 22">
@@ -4606,8 +4613,8 @@
           </p:sp>
         </mc:Fallback>
       </mc:AlternateContent>
-      <mc:AlternateContent xmlns:mc="http://schemas.openxmlformats.org/markup-compatibility/2006">
-        <mc:Choice xmlns:a14="http://schemas.microsoft.com/office/drawing/2010/main" Requires="a14">
+      <mc:AlternateContent xmlns:mc="http://schemas.openxmlformats.org/markup-compatibility/2006" xmlns:a14="http://schemas.microsoft.com/office/drawing/2010/main">
+        <mc:Choice Requires="a14">
           <p:sp>
             <p:nvSpPr>
               <p:cNvPr id="24" name="TextBox 23">
@@ -4685,7 +4692,7 @@
             </p:txBody>
           </p:sp>
         </mc:Choice>
-        <mc:Fallback>
+        <mc:Fallback xmlns="">
           <p:sp>
             <p:nvSpPr>
               <p:cNvPr id="24" name="TextBox 23">
@@ -4730,8 +4737,8 @@
           </p:sp>
         </mc:Fallback>
       </mc:AlternateContent>
-      <mc:AlternateContent xmlns:mc="http://schemas.openxmlformats.org/markup-compatibility/2006">
-        <mc:Choice xmlns:a14="http://schemas.microsoft.com/office/drawing/2010/main" Requires="a14">
+      <mc:AlternateContent xmlns:mc="http://schemas.openxmlformats.org/markup-compatibility/2006" xmlns:a14="http://schemas.microsoft.com/office/drawing/2010/main">
+        <mc:Choice Requires="a14">
           <p:sp>
             <p:nvSpPr>
               <p:cNvPr id="25" name="TextBox 24">
@@ -4760,6 +4767,7 @@
               </a:bodyPr>
               <a:lstStyle/>
               <a:p>
+                <a:pPr/>
                 <a14:m>
                   <m:oMathPara xmlns:m="http://schemas.openxmlformats.org/officeDocument/2006/math">
                     <m:oMathParaPr>
@@ -4780,7 +4788,7 @@
             </p:txBody>
           </p:sp>
         </mc:Choice>
-        <mc:Fallback>
+        <mc:Fallback xmlns="">
           <p:sp>
             <p:nvSpPr>
               <p:cNvPr id="25" name="TextBox 24">
@@ -4825,8 +4833,8 @@
           </p:sp>
         </mc:Fallback>
       </mc:AlternateContent>
-      <mc:AlternateContent xmlns:mc="http://schemas.openxmlformats.org/markup-compatibility/2006">
-        <mc:Choice xmlns:a14="http://schemas.microsoft.com/office/drawing/2010/main" Requires="a14">
+      <mc:AlternateContent xmlns:mc="http://schemas.openxmlformats.org/markup-compatibility/2006" xmlns:a14="http://schemas.microsoft.com/office/drawing/2010/main">
+        <mc:Choice Requires="a14">
           <p:sp>
             <p:nvSpPr>
               <p:cNvPr id="26" name="TextBox 25">
@@ -4855,6 +4863,7 @@
               </a:bodyPr>
               <a:lstStyle/>
               <a:p>
+                <a:pPr/>
                 <a14:m>
                   <m:oMathPara xmlns:m="http://schemas.openxmlformats.org/officeDocument/2006/math">
                     <m:oMathParaPr>
@@ -4875,7 +4884,7 @@
             </p:txBody>
           </p:sp>
         </mc:Choice>
-        <mc:Fallback>
+        <mc:Fallback xmlns="">
           <p:sp>
             <p:nvSpPr>
               <p:cNvPr id="26" name="TextBox 25">
@@ -5357,8 +5366,8 @@
           </a:fontRef>
         </p:style>
       </p:cxnSp>
-      <mc:AlternateContent xmlns:mc="http://schemas.openxmlformats.org/markup-compatibility/2006">
-        <mc:Choice xmlns:a14="http://schemas.microsoft.com/office/drawing/2010/main" Requires="a14">
+      <mc:AlternateContent xmlns:mc="http://schemas.openxmlformats.org/markup-compatibility/2006" xmlns:a14="http://schemas.microsoft.com/office/drawing/2010/main">
+        <mc:Choice Requires="a14">
           <p:sp>
             <p:nvSpPr>
               <p:cNvPr id="17" name="TextBox 16">
@@ -5415,7 +5424,7 @@
             </p:txBody>
           </p:sp>
         </mc:Choice>
-        <mc:Fallback>
+        <mc:Fallback xmlns="">
           <p:sp>
             <p:nvSpPr>
               <p:cNvPr id="17" name="TextBox 16">
@@ -5460,8 +5469,8 @@
           </p:sp>
         </mc:Fallback>
       </mc:AlternateContent>
-      <mc:AlternateContent xmlns:mc="http://schemas.openxmlformats.org/markup-compatibility/2006">
-        <mc:Choice xmlns:a14="http://schemas.microsoft.com/office/drawing/2010/main" Requires="a14">
+      <mc:AlternateContent xmlns:mc="http://schemas.openxmlformats.org/markup-compatibility/2006" xmlns:a14="http://schemas.microsoft.com/office/drawing/2010/main">
+        <mc:Choice Requires="a14">
           <p:sp>
             <p:nvSpPr>
               <p:cNvPr id="18" name="TextBox 17">
@@ -5543,7 +5552,7 @@
             </p:txBody>
           </p:sp>
         </mc:Choice>
-        <mc:Fallback>
+        <mc:Fallback xmlns="">
           <p:sp>
             <p:nvSpPr>
               <p:cNvPr id="18" name="TextBox 17">
@@ -5588,8 +5597,8 @@
           </p:sp>
         </mc:Fallback>
       </mc:AlternateContent>
-      <mc:AlternateContent xmlns:mc="http://schemas.openxmlformats.org/markup-compatibility/2006">
-        <mc:Choice xmlns:a14="http://schemas.microsoft.com/office/drawing/2010/main" Requires="a14">
+      <mc:AlternateContent xmlns:mc="http://schemas.openxmlformats.org/markup-compatibility/2006" xmlns:a14="http://schemas.microsoft.com/office/drawing/2010/main">
+        <mc:Choice Requires="a14">
           <p:sp>
             <p:nvSpPr>
               <p:cNvPr id="19" name="TextBox 18">
@@ -5671,7 +5680,7 @@
             </p:txBody>
           </p:sp>
         </mc:Choice>
-        <mc:Fallback>
+        <mc:Fallback xmlns="">
           <p:sp>
             <p:nvSpPr>
               <p:cNvPr id="19" name="TextBox 18">
@@ -5716,8 +5725,8 @@
           </p:sp>
         </mc:Fallback>
       </mc:AlternateContent>
-      <mc:AlternateContent xmlns:mc="http://schemas.openxmlformats.org/markup-compatibility/2006">
-        <mc:Choice xmlns:a14="http://schemas.microsoft.com/office/drawing/2010/main" Requires="a14">
+      <mc:AlternateContent xmlns:mc="http://schemas.openxmlformats.org/markup-compatibility/2006" xmlns:a14="http://schemas.microsoft.com/office/drawing/2010/main">
+        <mc:Choice Requires="a14">
           <p:sp>
             <p:nvSpPr>
               <p:cNvPr id="20" name="TextBox 19">
@@ -5799,7 +5808,7 @@
             </p:txBody>
           </p:sp>
         </mc:Choice>
-        <mc:Fallback>
+        <mc:Fallback xmlns="">
           <p:sp>
             <p:nvSpPr>
               <p:cNvPr id="20" name="TextBox 19">
@@ -5844,8 +5853,8 @@
           </p:sp>
         </mc:Fallback>
       </mc:AlternateContent>
-      <mc:AlternateContent xmlns:mc="http://schemas.openxmlformats.org/markup-compatibility/2006">
-        <mc:Choice xmlns:a14="http://schemas.microsoft.com/office/drawing/2010/main" Requires="a14">
+      <mc:AlternateContent xmlns:mc="http://schemas.openxmlformats.org/markup-compatibility/2006" xmlns:a14="http://schemas.microsoft.com/office/drawing/2010/main">
+        <mc:Choice Requires="a14">
           <p:sp>
             <p:nvSpPr>
               <p:cNvPr id="21" name="TextBox 20">
@@ -5903,7 +5912,7 @@
             </p:txBody>
           </p:sp>
         </mc:Choice>
-        <mc:Fallback>
+        <mc:Fallback xmlns="">
           <p:sp>
             <p:nvSpPr>
               <p:cNvPr id="21" name="TextBox 20">
@@ -5948,8 +5957,8 @@
           </p:sp>
         </mc:Fallback>
       </mc:AlternateContent>
-      <mc:AlternateContent xmlns:mc="http://schemas.openxmlformats.org/markup-compatibility/2006">
-        <mc:Choice xmlns:a14="http://schemas.microsoft.com/office/drawing/2010/main" Requires="a14">
+      <mc:AlternateContent xmlns:mc="http://schemas.openxmlformats.org/markup-compatibility/2006" xmlns:a14="http://schemas.microsoft.com/office/drawing/2010/main">
+        <mc:Choice Requires="a14">
           <p:sp>
             <p:nvSpPr>
               <p:cNvPr id="22" name="TextBox 21">
@@ -6011,7 +6020,7 @@
             </p:txBody>
           </p:sp>
         </mc:Choice>
-        <mc:Fallback>
+        <mc:Fallback xmlns="">
           <p:sp>
             <p:nvSpPr>
               <p:cNvPr id="22" name="TextBox 21">
@@ -6056,8 +6065,8 @@
           </p:sp>
         </mc:Fallback>
       </mc:AlternateContent>
-      <mc:AlternateContent xmlns:mc="http://schemas.openxmlformats.org/markup-compatibility/2006">
-        <mc:Choice xmlns:a14="http://schemas.microsoft.com/office/drawing/2010/main" Requires="a14">
+      <mc:AlternateContent xmlns:mc="http://schemas.openxmlformats.org/markup-compatibility/2006" xmlns:a14="http://schemas.microsoft.com/office/drawing/2010/main">
+        <mc:Choice Requires="a14">
           <p:sp>
             <p:nvSpPr>
               <p:cNvPr id="23" name="TextBox 22">
@@ -6114,7 +6123,7 @@
             </p:txBody>
           </p:sp>
         </mc:Choice>
-        <mc:Fallback>
+        <mc:Fallback xmlns="">
           <p:sp>
             <p:nvSpPr>
               <p:cNvPr id="23" name="TextBox 22">
@@ -6159,8 +6168,8 @@
           </p:sp>
         </mc:Fallback>
       </mc:AlternateContent>
-      <mc:AlternateContent xmlns:mc="http://schemas.openxmlformats.org/markup-compatibility/2006">
-        <mc:Choice xmlns:a14="http://schemas.microsoft.com/office/drawing/2010/main" Requires="a14">
+      <mc:AlternateContent xmlns:mc="http://schemas.openxmlformats.org/markup-compatibility/2006" xmlns:a14="http://schemas.microsoft.com/office/drawing/2010/main">
+        <mc:Choice Requires="a14">
           <p:sp>
             <p:nvSpPr>
               <p:cNvPr id="24" name="TextBox 23">
@@ -6242,7 +6251,7 @@
             </p:txBody>
           </p:sp>
         </mc:Choice>
-        <mc:Fallback>
+        <mc:Fallback xmlns="">
           <p:sp>
             <p:nvSpPr>
               <p:cNvPr id="24" name="TextBox 23">
@@ -6420,8 +6429,8 @@
           </a:fontRef>
         </p:style>
       </p:cxnSp>
-      <mc:AlternateContent xmlns:mc="http://schemas.openxmlformats.org/markup-compatibility/2006">
-        <mc:Choice xmlns:a14="http://schemas.microsoft.com/office/drawing/2010/main" Requires="a14">
+      <mc:AlternateContent xmlns:mc="http://schemas.openxmlformats.org/markup-compatibility/2006" xmlns:a14="http://schemas.microsoft.com/office/drawing/2010/main">
+        <mc:Choice Requires="a14">
           <p:sp>
             <p:nvSpPr>
               <p:cNvPr id="7" name="TextBox 6">
@@ -6450,6 +6459,7 @@
               </a:bodyPr>
               <a:lstStyle/>
               <a:p>
+                <a:pPr/>
                 <a14:m>
                   <m:oMathPara xmlns:m="http://schemas.openxmlformats.org/officeDocument/2006/math">
                     <m:oMathParaPr>
@@ -6470,7 +6480,7 @@
             </p:txBody>
           </p:sp>
         </mc:Choice>
-        <mc:Fallback>
+        <mc:Fallback xmlns="">
           <p:sp>
             <p:nvSpPr>
               <p:cNvPr id="7" name="TextBox 6">
@@ -6515,8 +6525,8 @@
           </p:sp>
         </mc:Fallback>
       </mc:AlternateContent>
-      <mc:AlternateContent xmlns:mc="http://schemas.openxmlformats.org/markup-compatibility/2006">
-        <mc:Choice xmlns:a14="http://schemas.microsoft.com/office/drawing/2010/main" Requires="a14">
+      <mc:AlternateContent xmlns:mc="http://schemas.openxmlformats.org/markup-compatibility/2006" xmlns:a14="http://schemas.microsoft.com/office/drawing/2010/main">
+        <mc:Choice Requires="a14">
           <p:sp>
             <p:nvSpPr>
               <p:cNvPr id="25" name="TextBox 24">
@@ -6545,6 +6555,7 @@
               </a:bodyPr>
               <a:lstStyle/>
               <a:p>
+                <a:pPr/>
                 <a14:m>
                   <m:oMathPara xmlns:m="http://schemas.openxmlformats.org/officeDocument/2006/math">
                     <m:oMathParaPr>
@@ -6565,7 +6576,7 @@
             </p:txBody>
           </p:sp>
         </mc:Choice>
-        <mc:Fallback>
+        <mc:Fallback xmlns="">
           <p:sp>
             <p:nvSpPr>
               <p:cNvPr id="25" name="TextBox 24">
@@ -6656,6 +6667,4184 @@
   <p:clrMapOvr>
     <a:masterClrMapping/>
   </p:clrMapOvr>
+</p:sld>
+</file>
+
+<file path=ppt/slides/slide3.xml><?xml version="1.0" encoding="utf-8"?>
+<p:sld xmlns:a="http://schemas.openxmlformats.org/drawingml/2006/main" xmlns:r="http://schemas.openxmlformats.org/officeDocument/2006/relationships" xmlns:p="http://schemas.openxmlformats.org/presentationml/2006/main">
+  <p:cSld>
+    <p:spTree>
+      <p:nvGrpSpPr>
+        <p:cNvPr id="1" name=""/>
+        <p:cNvGrpSpPr/>
+        <p:nvPr/>
+      </p:nvGrpSpPr>
+      <p:grpSpPr>
+        <a:xfrm>
+          <a:off x="0" y="0"/>
+          <a:ext cx="0" cy="0"/>
+          <a:chOff x="0" y="0"/>
+          <a:chExt cx="0" cy="0"/>
+        </a:xfrm>
+      </p:grpSpPr>
+      <mc:AlternateContent xmlns:mc="http://schemas.openxmlformats.org/markup-compatibility/2006">
+        <mc:Choice xmlns:a14="http://schemas.microsoft.com/office/drawing/2010/main" Requires="a14">
+          <p:sp>
+            <p:nvSpPr>
+              <p:cNvPr id="3" name="Content Placeholder 2">
+                <a:extLst>
+                  <a:ext uri="{FF2B5EF4-FFF2-40B4-BE49-F238E27FC236}">
+                    <a16:creationId xmlns:a16="http://schemas.microsoft.com/office/drawing/2014/main" id="{A708DF32-6843-271E-385E-8FD16F2FEF16}"/>
+                  </a:ext>
+                </a:extLst>
+              </p:cNvPr>
+              <p:cNvSpPr>
+                <a:spLocks noGrp="1"/>
+              </p:cNvSpPr>
+              <p:nvPr>
+                <p:ph idx="1"/>
+              </p:nvPr>
+            </p:nvSpPr>
+            <p:spPr>
+              <a:xfrm>
+                <a:off x="441036" y="1262207"/>
+                <a:ext cx="6001882" cy="4351338"/>
+              </a:xfrm>
+            </p:spPr>
+            <p:txBody>
+              <a:bodyPr/>
+              <a:lstStyle/>
+              <a:p>
+                <a:pPr marL="0" indent="0">
+                  <a:buNone/>
+                </a:pPr>
+                <a14:m>
+                  <m:oMathPara xmlns:m="http://schemas.openxmlformats.org/officeDocument/2006/math">
+                    <m:oMathParaPr>
+                      <m:jc m:val="centerGroup"/>
+                    </m:oMathParaPr>
+                    <m:oMath xmlns:m="http://schemas.openxmlformats.org/officeDocument/2006/math">
+                      <m:acc>
+                        <m:accPr>
+                          <m:chr m:val="̇"/>
+                          <m:ctrlPr>
+                            <a:rPr lang="en-US" i="1" smtClean="0">
+                              <a:latin typeface="Cambria Math" panose="02040503050406030204" pitchFamily="18" charset="0"/>
+                            </a:rPr>
+                          </m:ctrlPr>
+                        </m:accPr>
+                        <m:e>
+                          <m:r>
+                            <a:rPr lang="en-US" i="1" smtClean="0">
+                              <a:latin typeface="Cambria Math" panose="02040503050406030204" pitchFamily="18" charset="0"/>
+                              <a:ea typeface="Cambria Math" panose="02040503050406030204" pitchFamily="18" charset="0"/>
+                            </a:rPr>
+                            <m:t>𝜃</m:t>
+                          </m:r>
+                        </m:e>
+                      </m:acc>
+                      <m:r>
+                        <a:rPr lang="en-US" b="0" i="1" smtClean="0">
+                          <a:latin typeface="Cambria Math" panose="02040503050406030204" pitchFamily="18" charset="0"/>
+                        </a:rPr>
+                        <m:t>=</m:t>
+                      </m:r>
+                      <m:r>
+                        <a:rPr lang="en-US" b="0" i="1" smtClean="0">
+                          <a:latin typeface="Cambria Math" panose="02040503050406030204" pitchFamily="18" charset="0"/>
+                        </a:rPr>
+                        <m:t>𝑞</m:t>
+                      </m:r>
+                      <m:func>
+                        <m:funcPr>
+                          <m:ctrlPr>
+                            <a:rPr lang="en-US" b="0" i="1" smtClean="0">
+                              <a:latin typeface="Cambria Math" panose="02040503050406030204" pitchFamily="18" charset="0"/>
+                            </a:rPr>
+                          </m:ctrlPr>
+                        </m:funcPr>
+                        <m:fName>
+                          <m:r>
+                            <m:rPr>
+                              <m:sty m:val="p"/>
+                            </m:rPr>
+                            <a:rPr lang="en-US" b="0" i="0" smtClean="0">
+                              <a:latin typeface="Cambria Math" panose="02040503050406030204" pitchFamily="18" charset="0"/>
+                            </a:rPr>
+                            <m:t>cos</m:t>
+                          </m:r>
+                        </m:fName>
+                        <m:e>
+                          <m:r>
+                            <a:rPr lang="en-US" b="0" i="1" smtClean="0">
+                              <a:latin typeface="Cambria Math" panose="02040503050406030204" pitchFamily="18" charset="0"/>
+                              <a:ea typeface="Cambria Math" panose="02040503050406030204" pitchFamily="18" charset="0"/>
+                            </a:rPr>
+                            <m:t>𝜙</m:t>
+                          </m:r>
+                        </m:e>
+                      </m:func>
+                      <m:r>
+                        <a:rPr lang="en-US" b="0" i="1" smtClean="0">
+                          <a:latin typeface="Cambria Math" panose="02040503050406030204" pitchFamily="18" charset="0"/>
+                        </a:rPr>
+                        <m:t>−</m:t>
+                      </m:r>
+                      <m:r>
+                        <a:rPr lang="en-US" b="0" i="1" smtClean="0">
+                          <a:latin typeface="Cambria Math" panose="02040503050406030204" pitchFamily="18" charset="0"/>
+                        </a:rPr>
+                        <m:t>𝑟</m:t>
+                      </m:r>
+                      <m:func>
+                        <m:funcPr>
+                          <m:ctrlPr>
+                            <a:rPr lang="en-US" b="0" i="1" smtClean="0">
+                              <a:latin typeface="Cambria Math" panose="02040503050406030204" pitchFamily="18" charset="0"/>
+                            </a:rPr>
+                          </m:ctrlPr>
+                        </m:funcPr>
+                        <m:fName>
+                          <m:r>
+                            <m:rPr>
+                              <m:sty m:val="p"/>
+                            </m:rPr>
+                            <a:rPr lang="en-US" b="0" i="0" smtClean="0">
+                              <a:latin typeface="Cambria Math" panose="02040503050406030204" pitchFamily="18" charset="0"/>
+                            </a:rPr>
+                            <m:t>sin</m:t>
+                          </m:r>
+                        </m:fName>
+                        <m:e>
+                          <m:r>
+                            <a:rPr lang="en-US" b="0" i="1" smtClean="0">
+                              <a:latin typeface="Cambria Math" panose="02040503050406030204" pitchFamily="18" charset="0"/>
+                              <a:ea typeface="Cambria Math" panose="02040503050406030204" pitchFamily="18" charset="0"/>
+                            </a:rPr>
+                            <m:t>𝜙</m:t>
+                          </m:r>
+                        </m:e>
+                      </m:func>
+                    </m:oMath>
+                  </m:oMathPara>
+                </a14:m>
+                <a:endParaRPr lang="en-US" b="0" dirty="0"/>
+              </a:p>
+              <a:p>
+                <a:pPr marL="0" indent="0">
+                  <a:buNone/>
+                </a:pPr>
+                <a:endParaRPr lang="en-US" sz="1200" b="0" dirty="0"/>
+              </a:p>
+              <a:p>
+                <a:pPr marL="0" indent="0">
+                  <a:buNone/>
+                </a:pPr>
+                <a14:m>
+                  <m:oMathPara xmlns:m="http://schemas.openxmlformats.org/officeDocument/2006/math">
+                    <m:oMathParaPr>
+                      <m:jc m:val="centerGroup"/>
+                    </m:oMathParaPr>
+                    <m:oMath xmlns:m="http://schemas.openxmlformats.org/officeDocument/2006/math">
+                      <m:acc>
+                        <m:accPr>
+                          <m:chr m:val="̇"/>
+                          <m:ctrlPr>
+                            <a:rPr lang="en-US" i="1" smtClean="0">
+                              <a:latin typeface="Cambria Math" panose="02040503050406030204" pitchFamily="18" charset="0"/>
+                            </a:rPr>
+                          </m:ctrlPr>
+                        </m:accPr>
+                        <m:e>
+                          <m:r>
+                            <a:rPr lang="en-US" i="1" smtClean="0">
+                              <a:latin typeface="Cambria Math" panose="02040503050406030204" pitchFamily="18" charset="0"/>
+                              <a:ea typeface="Cambria Math" panose="02040503050406030204" pitchFamily="18" charset="0"/>
+                            </a:rPr>
+                            <m:t>𝜓</m:t>
+                          </m:r>
+                        </m:e>
+                      </m:acc>
+                      <m:r>
+                        <a:rPr lang="en-US" b="0" i="1" smtClean="0">
+                          <a:latin typeface="Cambria Math" panose="02040503050406030204" pitchFamily="18" charset="0"/>
+                        </a:rPr>
+                        <m:t>=</m:t>
+                      </m:r>
+                      <m:r>
+                        <a:rPr lang="en-US" b="0" i="1" smtClean="0">
+                          <a:latin typeface="Cambria Math" panose="02040503050406030204" pitchFamily="18" charset="0"/>
+                        </a:rPr>
+                        <m:t>𝑞</m:t>
+                      </m:r>
+                      <m:f>
+                        <m:fPr>
+                          <m:ctrlPr>
+                            <a:rPr lang="en-US" b="0" i="1" smtClean="0">
+                              <a:latin typeface="Cambria Math" panose="02040503050406030204" pitchFamily="18" charset="0"/>
+                            </a:rPr>
+                          </m:ctrlPr>
+                        </m:fPr>
+                        <m:num>
+                          <m:func>
+                            <m:funcPr>
+                              <m:ctrlPr>
+                                <a:rPr lang="en-US" b="0" i="1" smtClean="0">
+                                  <a:latin typeface="Cambria Math" panose="02040503050406030204" pitchFamily="18" charset="0"/>
+                                </a:rPr>
+                              </m:ctrlPr>
+                            </m:funcPr>
+                            <m:fName>
+                              <m:r>
+                                <m:rPr>
+                                  <m:sty m:val="p"/>
+                                </m:rPr>
+                                <a:rPr lang="en-US" b="0" i="0" smtClean="0">
+                                  <a:latin typeface="Cambria Math" panose="02040503050406030204" pitchFamily="18" charset="0"/>
+                                </a:rPr>
+                                <m:t>sin</m:t>
+                              </m:r>
+                            </m:fName>
+                            <m:e>
+                              <m:r>
+                                <a:rPr lang="en-US" b="0" i="1" smtClean="0">
+                                  <a:latin typeface="Cambria Math" panose="02040503050406030204" pitchFamily="18" charset="0"/>
+                                  <a:ea typeface="Cambria Math" panose="02040503050406030204" pitchFamily="18" charset="0"/>
+                                </a:rPr>
+                                <m:t>𝜙</m:t>
+                              </m:r>
+                            </m:e>
+                          </m:func>
+                        </m:num>
+                        <m:den>
+                          <m:func>
+                            <m:funcPr>
+                              <m:ctrlPr>
+                                <a:rPr lang="en-US" b="0" i="1" smtClean="0">
+                                  <a:latin typeface="Cambria Math" panose="02040503050406030204" pitchFamily="18" charset="0"/>
+                                </a:rPr>
+                              </m:ctrlPr>
+                            </m:funcPr>
+                            <m:fName>
+                              <m:r>
+                                <m:rPr>
+                                  <m:sty m:val="p"/>
+                                </m:rPr>
+                                <a:rPr lang="en-US" b="0" i="0" smtClean="0">
+                                  <a:latin typeface="Cambria Math" panose="02040503050406030204" pitchFamily="18" charset="0"/>
+                                </a:rPr>
+                                <m:t>cos</m:t>
+                              </m:r>
+                            </m:fName>
+                            <m:e>
+                              <m:r>
+                                <a:rPr lang="en-US" b="0" i="1" smtClean="0">
+                                  <a:latin typeface="Cambria Math" panose="02040503050406030204" pitchFamily="18" charset="0"/>
+                                  <a:ea typeface="Cambria Math" panose="02040503050406030204" pitchFamily="18" charset="0"/>
+                                </a:rPr>
+                                <m:t>𝜃</m:t>
+                              </m:r>
+                            </m:e>
+                          </m:func>
+                        </m:den>
+                      </m:f>
+                      <m:r>
+                        <a:rPr lang="en-US" b="0" i="1" smtClean="0">
+                          <a:latin typeface="Cambria Math" panose="02040503050406030204" pitchFamily="18" charset="0"/>
+                        </a:rPr>
+                        <m:t>+</m:t>
+                      </m:r>
+                      <m:r>
+                        <a:rPr lang="en-US" b="0" i="1" smtClean="0">
+                          <a:latin typeface="Cambria Math" panose="02040503050406030204" pitchFamily="18" charset="0"/>
+                        </a:rPr>
+                        <m:t>𝑟</m:t>
+                      </m:r>
+                      <m:f>
+                        <m:fPr>
+                          <m:ctrlPr>
+                            <a:rPr lang="en-US" b="0" i="1" smtClean="0">
+                              <a:latin typeface="Cambria Math" panose="02040503050406030204" pitchFamily="18" charset="0"/>
+                            </a:rPr>
+                          </m:ctrlPr>
+                        </m:fPr>
+                        <m:num>
+                          <m:func>
+                            <m:funcPr>
+                              <m:ctrlPr>
+                                <a:rPr lang="en-US" b="0" i="1" smtClean="0">
+                                  <a:latin typeface="Cambria Math" panose="02040503050406030204" pitchFamily="18" charset="0"/>
+                                </a:rPr>
+                              </m:ctrlPr>
+                            </m:funcPr>
+                            <m:fName>
+                              <m:r>
+                                <m:rPr>
+                                  <m:sty m:val="p"/>
+                                </m:rPr>
+                                <a:rPr lang="en-US" b="0" i="0" smtClean="0">
+                                  <a:latin typeface="Cambria Math" panose="02040503050406030204" pitchFamily="18" charset="0"/>
+                                </a:rPr>
+                                <m:t>cos</m:t>
+                              </m:r>
+                            </m:fName>
+                            <m:e>
+                              <m:r>
+                                <a:rPr lang="en-US" b="0" i="1" smtClean="0">
+                                  <a:latin typeface="Cambria Math" panose="02040503050406030204" pitchFamily="18" charset="0"/>
+                                  <a:ea typeface="Cambria Math" panose="02040503050406030204" pitchFamily="18" charset="0"/>
+                                </a:rPr>
+                                <m:t>𝜙</m:t>
+                              </m:r>
+                            </m:e>
+                          </m:func>
+                        </m:num>
+                        <m:den>
+                          <m:func>
+                            <m:funcPr>
+                              <m:ctrlPr>
+                                <a:rPr lang="en-US" b="0" i="1" smtClean="0">
+                                  <a:latin typeface="Cambria Math" panose="02040503050406030204" pitchFamily="18" charset="0"/>
+                                </a:rPr>
+                              </m:ctrlPr>
+                            </m:funcPr>
+                            <m:fName>
+                              <m:r>
+                                <m:rPr>
+                                  <m:sty m:val="p"/>
+                                </m:rPr>
+                                <a:rPr lang="en-US" b="0" i="0" smtClean="0">
+                                  <a:latin typeface="Cambria Math" panose="02040503050406030204" pitchFamily="18" charset="0"/>
+                                </a:rPr>
+                                <m:t>cos</m:t>
+                              </m:r>
+                            </m:fName>
+                            <m:e>
+                              <m:r>
+                                <a:rPr lang="en-US" b="0" i="1" smtClean="0">
+                                  <a:latin typeface="Cambria Math" panose="02040503050406030204" pitchFamily="18" charset="0"/>
+                                  <a:ea typeface="Cambria Math" panose="02040503050406030204" pitchFamily="18" charset="0"/>
+                                </a:rPr>
+                                <m:t>𝜃</m:t>
+                              </m:r>
+                            </m:e>
+                          </m:func>
+                        </m:den>
+                      </m:f>
+                    </m:oMath>
+                  </m:oMathPara>
+                </a14:m>
+                <a:endParaRPr lang="en-US" dirty="0"/>
+              </a:p>
+              <a:p>
+                <a:pPr marL="0" indent="0">
+                  <a:buNone/>
+                </a:pPr>
+                <a:endParaRPr lang="en-US" sz="1200" dirty="0"/>
+              </a:p>
+              <a:p>
+                <a:pPr marL="0" indent="0">
+                  <a:buNone/>
+                </a:pPr>
+                <a14:m>
+                  <m:oMathPara xmlns:m="http://schemas.openxmlformats.org/officeDocument/2006/math">
+                    <m:oMathParaPr>
+                      <m:jc m:val="centerGroup"/>
+                    </m:oMathParaPr>
+                    <m:oMath xmlns:m="http://schemas.openxmlformats.org/officeDocument/2006/math">
+                      <m:acc>
+                        <m:accPr>
+                          <m:chr m:val="̇"/>
+                          <m:ctrlPr>
+                            <a:rPr lang="en-US" i="1" smtClean="0">
+                              <a:latin typeface="Cambria Math" panose="02040503050406030204" pitchFamily="18" charset="0"/>
+                            </a:rPr>
+                          </m:ctrlPr>
+                        </m:accPr>
+                        <m:e>
+                          <m:r>
+                            <a:rPr lang="en-US" i="1" smtClean="0">
+                              <a:latin typeface="Cambria Math" panose="02040503050406030204" pitchFamily="18" charset="0"/>
+                              <a:ea typeface="Cambria Math" panose="02040503050406030204" pitchFamily="18" charset="0"/>
+                            </a:rPr>
+                            <m:t>𝜙</m:t>
+                          </m:r>
+                        </m:e>
+                      </m:acc>
+                      <m:r>
+                        <a:rPr lang="en-US" b="0" i="1" smtClean="0">
+                          <a:latin typeface="Cambria Math" panose="02040503050406030204" pitchFamily="18" charset="0"/>
+                        </a:rPr>
+                        <m:t>=</m:t>
+                      </m:r>
+                      <m:r>
+                        <a:rPr lang="en-US" b="0" i="1" smtClean="0">
+                          <a:latin typeface="Cambria Math" panose="02040503050406030204" pitchFamily="18" charset="0"/>
+                        </a:rPr>
+                        <m:t>𝑝</m:t>
+                      </m:r>
+                      <m:r>
+                        <a:rPr lang="en-US" b="0" i="1" smtClean="0">
+                          <a:latin typeface="Cambria Math" panose="02040503050406030204" pitchFamily="18" charset="0"/>
+                        </a:rPr>
+                        <m:t>+</m:t>
+                      </m:r>
+                      <m:r>
+                        <a:rPr lang="en-US" b="0" i="1" smtClean="0">
+                          <a:latin typeface="Cambria Math" panose="02040503050406030204" pitchFamily="18" charset="0"/>
+                        </a:rPr>
+                        <m:t>𝑞</m:t>
+                      </m:r>
+                      <m:func>
+                        <m:funcPr>
+                          <m:ctrlPr>
+                            <a:rPr lang="en-US" b="0" i="1" smtClean="0">
+                              <a:latin typeface="Cambria Math" panose="02040503050406030204" pitchFamily="18" charset="0"/>
+                            </a:rPr>
+                          </m:ctrlPr>
+                        </m:funcPr>
+                        <m:fName>
+                          <m:r>
+                            <m:rPr>
+                              <m:sty m:val="p"/>
+                            </m:rPr>
+                            <a:rPr lang="en-US" b="0" i="0" smtClean="0">
+                              <a:latin typeface="Cambria Math" panose="02040503050406030204" pitchFamily="18" charset="0"/>
+                            </a:rPr>
+                            <m:t>sin</m:t>
+                          </m:r>
+                        </m:fName>
+                        <m:e>
+                          <m:r>
+                            <a:rPr lang="en-US" b="0" i="1" smtClean="0">
+                              <a:latin typeface="Cambria Math" panose="02040503050406030204" pitchFamily="18" charset="0"/>
+                              <a:ea typeface="Cambria Math" panose="02040503050406030204" pitchFamily="18" charset="0"/>
+                            </a:rPr>
+                            <m:t>𝜙</m:t>
+                          </m:r>
+                        </m:e>
+                      </m:func>
+                      <m:func>
+                        <m:funcPr>
+                          <m:ctrlPr>
+                            <a:rPr lang="en-US" b="0" i="1" smtClean="0">
+                              <a:latin typeface="Cambria Math" panose="02040503050406030204" pitchFamily="18" charset="0"/>
+                            </a:rPr>
+                          </m:ctrlPr>
+                        </m:funcPr>
+                        <m:fName>
+                          <m:r>
+                            <m:rPr>
+                              <m:sty m:val="p"/>
+                            </m:rPr>
+                            <a:rPr lang="en-US" b="0" i="0" smtClean="0">
+                              <a:latin typeface="Cambria Math" panose="02040503050406030204" pitchFamily="18" charset="0"/>
+                            </a:rPr>
+                            <m:t>tan</m:t>
+                          </m:r>
+                        </m:fName>
+                        <m:e>
+                          <m:r>
+                            <a:rPr lang="en-US" b="0" i="1" smtClean="0">
+                              <a:latin typeface="Cambria Math" panose="02040503050406030204" pitchFamily="18" charset="0"/>
+                              <a:ea typeface="Cambria Math" panose="02040503050406030204" pitchFamily="18" charset="0"/>
+                            </a:rPr>
+                            <m:t>𝜃</m:t>
+                          </m:r>
+                        </m:e>
+                      </m:func>
+                      <m:r>
+                        <a:rPr lang="en-US" b="0" i="1" smtClean="0">
+                          <a:latin typeface="Cambria Math" panose="02040503050406030204" pitchFamily="18" charset="0"/>
+                        </a:rPr>
+                        <m:t>+</m:t>
+                      </m:r>
+                      <m:r>
+                        <a:rPr lang="en-US" b="0" i="1" smtClean="0">
+                          <a:latin typeface="Cambria Math" panose="02040503050406030204" pitchFamily="18" charset="0"/>
+                        </a:rPr>
+                        <m:t>𝑟</m:t>
+                      </m:r>
+                      <m:func>
+                        <m:funcPr>
+                          <m:ctrlPr>
+                            <a:rPr lang="en-US" b="0" i="1" smtClean="0">
+                              <a:latin typeface="Cambria Math" panose="02040503050406030204" pitchFamily="18" charset="0"/>
+                            </a:rPr>
+                          </m:ctrlPr>
+                        </m:funcPr>
+                        <m:fName>
+                          <m:r>
+                            <m:rPr>
+                              <m:sty m:val="p"/>
+                            </m:rPr>
+                            <a:rPr lang="en-US" b="0" i="0" smtClean="0">
+                              <a:latin typeface="Cambria Math" panose="02040503050406030204" pitchFamily="18" charset="0"/>
+                            </a:rPr>
+                            <m:t>cos</m:t>
+                          </m:r>
+                        </m:fName>
+                        <m:e>
+                          <m:r>
+                            <a:rPr lang="en-US" b="0" i="1" smtClean="0">
+                              <a:latin typeface="Cambria Math" panose="02040503050406030204" pitchFamily="18" charset="0"/>
+                              <a:ea typeface="Cambria Math" panose="02040503050406030204" pitchFamily="18" charset="0"/>
+                            </a:rPr>
+                            <m:t>𝜙</m:t>
+                          </m:r>
+                        </m:e>
+                      </m:func>
+                      <m:func>
+                        <m:funcPr>
+                          <m:ctrlPr>
+                            <a:rPr lang="en-US" b="0" i="1" smtClean="0">
+                              <a:latin typeface="Cambria Math" panose="02040503050406030204" pitchFamily="18" charset="0"/>
+                            </a:rPr>
+                          </m:ctrlPr>
+                        </m:funcPr>
+                        <m:fName>
+                          <m:r>
+                            <m:rPr>
+                              <m:sty m:val="p"/>
+                            </m:rPr>
+                            <a:rPr lang="en-US" b="0" i="0" smtClean="0">
+                              <a:latin typeface="Cambria Math" panose="02040503050406030204" pitchFamily="18" charset="0"/>
+                            </a:rPr>
+                            <m:t>tan</m:t>
+                          </m:r>
+                        </m:fName>
+                        <m:e>
+                          <m:r>
+                            <a:rPr lang="en-US" b="0" i="1" smtClean="0">
+                              <a:latin typeface="Cambria Math" panose="02040503050406030204" pitchFamily="18" charset="0"/>
+                              <a:ea typeface="Cambria Math" panose="02040503050406030204" pitchFamily="18" charset="0"/>
+                            </a:rPr>
+                            <m:t>𝜃</m:t>
+                          </m:r>
+                        </m:e>
+                      </m:func>
+                    </m:oMath>
+                  </m:oMathPara>
+                </a14:m>
+                <a:endParaRPr lang="en-US" dirty="0"/>
+              </a:p>
+            </p:txBody>
+          </p:sp>
+        </mc:Choice>
+        <mc:Fallback>
+          <p:sp>
+            <p:nvSpPr>
+              <p:cNvPr id="3" name="Content Placeholder 2">
+                <a:extLst>
+                  <a:ext uri="{FF2B5EF4-FFF2-40B4-BE49-F238E27FC236}">
+                    <a16:creationId xmlns:a16="http://schemas.microsoft.com/office/drawing/2014/main" id="{A708DF32-6843-271E-385E-8FD16F2FEF16}"/>
+                  </a:ext>
+                </a:extLst>
+              </p:cNvPr>
+              <p:cNvSpPr>
+                <a:spLocks noGrp="1" noRot="1" noChangeAspect="1" noMove="1" noResize="1" noEditPoints="1" noAdjustHandles="1" noChangeArrowheads="1" noChangeShapeType="1" noTextEdit="1"/>
+              </p:cNvSpPr>
+              <p:nvPr>
+                <p:ph idx="1"/>
+              </p:nvPr>
+            </p:nvSpPr>
+            <p:spPr>
+              <a:xfrm>
+                <a:off x="441036" y="1262207"/>
+                <a:ext cx="6001882" cy="4351338"/>
+              </a:xfrm>
+              <a:blipFill>
+                <a:blip r:embed="rId2"/>
+                <a:stretch>
+                  <a:fillRect t="-1541"/>
+                </a:stretch>
+              </a:blipFill>
+            </p:spPr>
+            <p:txBody>
+              <a:bodyPr/>
+              <a:lstStyle/>
+              <a:p>
+                <a:r>
+                  <a:rPr lang="en-US">
+                    <a:noFill/>
+                  </a:rPr>
+                  <a:t> </a:t>
+                </a:r>
+              </a:p>
+            </p:txBody>
+          </p:sp>
+        </mc:Fallback>
+      </mc:AlternateContent>
+      <p:sp>
+        <p:nvSpPr>
+          <p:cNvPr id="4" name="Oval 3">
+            <a:extLst>
+              <a:ext uri="{FF2B5EF4-FFF2-40B4-BE49-F238E27FC236}">
+                <a16:creationId xmlns:a16="http://schemas.microsoft.com/office/drawing/2014/main" id="{0BA26F9F-969F-2B79-0BDC-315A5D18984C}"/>
+              </a:ext>
+            </a:extLst>
+          </p:cNvPr>
+          <p:cNvSpPr/>
+          <p:nvPr/>
+        </p:nvSpPr>
+        <p:spPr>
+          <a:xfrm>
+            <a:off x="2762226" y="2384210"/>
+            <a:ext cx="905256" cy="502920"/>
+          </a:xfrm>
+          <a:prstGeom prst="ellipse">
+            <a:avLst/>
+          </a:prstGeom>
+          <a:noFill/>
+          <a:ln w="25400">
+            <a:solidFill>
+              <a:srgbClr val="FF0000"/>
+            </a:solidFill>
+          </a:ln>
+        </p:spPr>
+        <p:style>
+          <a:lnRef idx="2">
+            <a:schemeClr val="accent1">
+              <a:shade val="15000"/>
+            </a:schemeClr>
+          </a:lnRef>
+          <a:fillRef idx="1">
+            <a:schemeClr val="accent1"/>
+          </a:fillRef>
+          <a:effectRef idx="0">
+            <a:schemeClr val="accent1"/>
+          </a:effectRef>
+          <a:fontRef idx="minor">
+            <a:schemeClr val="lt1"/>
+          </a:fontRef>
+        </p:style>
+        <p:txBody>
+          <a:bodyPr rtlCol="0" anchor="ctr"/>
+          <a:lstStyle/>
+          <a:p>
+            <a:pPr algn="ctr"/>
+            <a:endParaRPr lang="en-US"/>
+          </a:p>
+        </p:txBody>
+      </p:sp>
+      <p:sp>
+        <p:nvSpPr>
+          <p:cNvPr id="5" name="Oval 4">
+            <a:extLst>
+              <a:ext uri="{FF2B5EF4-FFF2-40B4-BE49-F238E27FC236}">
+                <a16:creationId xmlns:a16="http://schemas.microsoft.com/office/drawing/2014/main" id="{F2169BF2-DB05-CE05-702C-D00C1CCBD36F}"/>
+              </a:ext>
+            </a:extLst>
+          </p:cNvPr>
+          <p:cNvSpPr/>
+          <p:nvPr/>
+        </p:nvSpPr>
+        <p:spPr>
+          <a:xfrm>
+            <a:off x="4198481" y="2384210"/>
+            <a:ext cx="905256" cy="502920"/>
+          </a:xfrm>
+          <a:prstGeom prst="ellipse">
+            <a:avLst/>
+          </a:prstGeom>
+          <a:noFill/>
+          <a:ln w="25400">
+            <a:solidFill>
+              <a:srgbClr val="FF0000"/>
+            </a:solidFill>
+          </a:ln>
+        </p:spPr>
+        <p:style>
+          <a:lnRef idx="2">
+            <a:schemeClr val="accent1">
+              <a:shade val="15000"/>
+            </a:schemeClr>
+          </a:lnRef>
+          <a:fillRef idx="1">
+            <a:schemeClr val="accent1"/>
+          </a:fillRef>
+          <a:effectRef idx="0">
+            <a:schemeClr val="accent1"/>
+          </a:effectRef>
+          <a:fontRef idx="minor">
+            <a:schemeClr val="lt1"/>
+          </a:fontRef>
+        </p:style>
+        <p:txBody>
+          <a:bodyPr rtlCol="0" anchor="ctr"/>
+          <a:lstStyle/>
+          <a:p>
+            <a:pPr algn="ctr"/>
+            <a:endParaRPr lang="en-US"/>
+          </a:p>
+        </p:txBody>
+      </p:sp>
+      <p:sp>
+        <p:nvSpPr>
+          <p:cNvPr id="6" name="Oval 5">
+            <a:extLst>
+              <a:ext uri="{FF2B5EF4-FFF2-40B4-BE49-F238E27FC236}">
+                <a16:creationId xmlns:a16="http://schemas.microsoft.com/office/drawing/2014/main" id="{8B8D0496-FCB5-CE0E-65D8-A4F5A6B8512D}"/>
+              </a:ext>
+            </a:extLst>
+          </p:cNvPr>
+          <p:cNvSpPr/>
+          <p:nvPr/>
+        </p:nvSpPr>
+        <p:spPr>
+          <a:xfrm>
+            <a:off x="3053172" y="2948696"/>
+            <a:ext cx="905256" cy="502920"/>
+          </a:xfrm>
+          <a:prstGeom prst="ellipse">
+            <a:avLst/>
+          </a:prstGeom>
+          <a:noFill/>
+          <a:ln w="25400">
+            <a:solidFill>
+              <a:srgbClr val="FF0000"/>
+            </a:solidFill>
+          </a:ln>
+        </p:spPr>
+        <p:style>
+          <a:lnRef idx="2">
+            <a:schemeClr val="accent1">
+              <a:shade val="15000"/>
+            </a:schemeClr>
+          </a:lnRef>
+          <a:fillRef idx="1">
+            <a:schemeClr val="accent1"/>
+          </a:fillRef>
+          <a:effectRef idx="0">
+            <a:schemeClr val="accent1"/>
+          </a:effectRef>
+          <a:fontRef idx="minor">
+            <a:schemeClr val="lt1"/>
+          </a:fontRef>
+        </p:style>
+        <p:txBody>
+          <a:bodyPr rtlCol="0" anchor="ctr"/>
+          <a:lstStyle/>
+          <a:p>
+            <a:pPr algn="ctr"/>
+            <a:endParaRPr lang="en-US"/>
+          </a:p>
+        </p:txBody>
+      </p:sp>
+      <p:sp>
+        <p:nvSpPr>
+          <p:cNvPr id="7" name="Oval 6">
+            <a:extLst>
+              <a:ext uri="{FF2B5EF4-FFF2-40B4-BE49-F238E27FC236}">
+                <a16:creationId xmlns:a16="http://schemas.microsoft.com/office/drawing/2014/main" id="{CA75A0B5-B528-1764-8D7A-7E6EC89FF589}"/>
+              </a:ext>
+            </a:extLst>
+          </p:cNvPr>
+          <p:cNvSpPr/>
+          <p:nvPr/>
+        </p:nvSpPr>
+        <p:spPr>
+          <a:xfrm>
+            <a:off x="5357644" y="2948696"/>
+            <a:ext cx="905256" cy="502920"/>
+          </a:xfrm>
+          <a:prstGeom prst="ellipse">
+            <a:avLst/>
+          </a:prstGeom>
+          <a:noFill/>
+          <a:ln w="25400">
+            <a:solidFill>
+              <a:srgbClr val="FF0000"/>
+            </a:solidFill>
+          </a:ln>
+        </p:spPr>
+        <p:style>
+          <a:lnRef idx="2">
+            <a:schemeClr val="accent1">
+              <a:shade val="15000"/>
+            </a:schemeClr>
+          </a:lnRef>
+          <a:fillRef idx="1">
+            <a:schemeClr val="accent1"/>
+          </a:fillRef>
+          <a:effectRef idx="0">
+            <a:schemeClr val="accent1"/>
+          </a:effectRef>
+          <a:fontRef idx="minor">
+            <a:schemeClr val="lt1"/>
+          </a:fontRef>
+        </p:style>
+        <p:txBody>
+          <a:bodyPr rtlCol="0" anchor="ctr"/>
+          <a:lstStyle/>
+          <a:p>
+            <a:pPr algn="ctr"/>
+            <a:endParaRPr lang="en-US"/>
+          </a:p>
+        </p:txBody>
+      </p:sp>
+      <mc:AlternateContent xmlns:mc="http://schemas.openxmlformats.org/markup-compatibility/2006">
+        <mc:Choice xmlns:a14="http://schemas.microsoft.com/office/drawing/2010/main" Requires="a14">
+          <p:sp>
+            <p:nvSpPr>
+              <p:cNvPr id="8" name="TextBox 7">
+                <a:extLst>
+                  <a:ext uri="{FF2B5EF4-FFF2-40B4-BE49-F238E27FC236}">
+                    <a16:creationId xmlns:a16="http://schemas.microsoft.com/office/drawing/2014/main" id="{D883F520-EE07-64B8-A588-7A2FCF841BA1}"/>
+                  </a:ext>
+                </a:extLst>
+              </p:cNvPr>
+              <p:cNvSpPr txBox="1"/>
+              <p:nvPr/>
+            </p:nvSpPr>
+            <p:spPr>
+              <a:xfrm>
+                <a:off x="8238836" y="440171"/>
+                <a:ext cx="3389746" cy="2031325"/>
+              </a:xfrm>
+              <a:prstGeom prst="rect">
+                <a:avLst/>
+              </a:prstGeom>
+              <a:noFill/>
+            </p:spPr>
+            <p:txBody>
+              <a:bodyPr wrap="square" rtlCol="0">
+                <a:spAutoFit/>
+              </a:bodyPr>
+              <a:lstStyle/>
+              <a:p>
+                <a:pPr/>
+                <a14:m>
+                  <m:oMath xmlns:m="http://schemas.openxmlformats.org/officeDocument/2006/math">
+                    <m:r>
+                      <a:rPr lang="en-US" i="1">
+                        <a:latin typeface="Cambria Math" panose="02040503050406030204" pitchFamily="18" charset="0"/>
+                        <a:ea typeface="Cambria Math" panose="02040503050406030204" pitchFamily="18" charset="0"/>
+                      </a:rPr>
+                      <m:t>𝜙</m:t>
+                    </m:r>
+                  </m:oMath>
+                </a14:m>
+                <a:r>
+                  <a:rPr lang="en-US" dirty="0"/>
+                  <a:t>  roll</a:t>
+                </a:r>
+              </a:p>
+              <a:p>
+                <a:pPr/>
+                <a14:m>
+                  <m:oMath xmlns:m="http://schemas.openxmlformats.org/officeDocument/2006/math">
+                    <m:r>
+                      <a:rPr lang="en-US" i="1" smtClean="0">
+                        <a:latin typeface="Cambria Math" panose="02040503050406030204" pitchFamily="18" charset="0"/>
+                        <a:ea typeface="Cambria Math" panose="02040503050406030204" pitchFamily="18" charset="0"/>
+                      </a:rPr>
+                      <m:t>𝜃</m:t>
+                    </m:r>
+                  </m:oMath>
+                </a14:m>
+                <a:r>
+                  <a:rPr lang="en-US" dirty="0">
+                    <a:ea typeface="Cambria Math" panose="02040503050406030204" pitchFamily="18" charset="0"/>
+                  </a:rPr>
+                  <a:t>  pitch</a:t>
+                </a:r>
+              </a:p>
+              <a:p>
+                <a:pPr/>
+                <a14:m>
+                  <m:oMath xmlns:m="http://schemas.openxmlformats.org/officeDocument/2006/math">
+                    <m:r>
+                      <a:rPr lang="en-US" i="1">
+                        <a:latin typeface="Cambria Math" panose="02040503050406030204" pitchFamily="18" charset="0"/>
+                        <a:ea typeface="Cambria Math" panose="02040503050406030204" pitchFamily="18" charset="0"/>
+                      </a:rPr>
+                      <m:t>𝜓</m:t>
+                    </m:r>
+                  </m:oMath>
+                </a14:m>
+                <a:r>
+                  <a:rPr lang="en-US" dirty="0">
+                    <a:ea typeface="Cambria Math" panose="02040503050406030204" pitchFamily="18" charset="0"/>
+                  </a:rPr>
+                  <a:t>  yaw</a:t>
+                </a:r>
+              </a:p>
+              <a:p>
+                <a:pPr/>
+                <a:endParaRPr lang="en-US" dirty="0"/>
+              </a:p>
+              <a:p>
+                <a:pPr/>
+                <a14:m>
+                  <m:oMath xmlns:m="http://schemas.openxmlformats.org/officeDocument/2006/math">
+                    <m:r>
+                      <a:rPr lang="en-US" b="0" i="1" smtClean="0">
+                        <a:latin typeface="Cambria Math" panose="02040503050406030204" pitchFamily="18" charset="0"/>
+                      </a:rPr>
+                      <m:t>𝑝</m:t>
+                    </m:r>
+                  </m:oMath>
+                </a14:m>
+                <a:r>
+                  <a:rPr lang="en-US" b="0" dirty="0"/>
+                  <a:t>  body axis roll rate</a:t>
+                </a:r>
+              </a:p>
+              <a:p>
+                <a:pPr/>
+                <a14:m>
+                  <m:oMath xmlns:m="http://schemas.openxmlformats.org/officeDocument/2006/math">
+                    <m:r>
+                      <a:rPr lang="en-US" b="0" i="1" smtClean="0">
+                        <a:latin typeface="Cambria Math" panose="02040503050406030204" pitchFamily="18" charset="0"/>
+                      </a:rPr>
+                      <m:t>𝑞</m:t>
+                    </m:r>
+                  </m:oMath>
+                </a14:m>
+                <a:r>
+                  <a:rPr lang="en-US" b="0" dirty="0"/>
+                  <a:t>  body axis pitch rate</a:t>
+                </a:r>
+              </a:p>
+              <a:p>
+                <a:pPr/>
+                <a14:m>
+                  <m:oMath xmlns:m="http://schemas.openxmlformats.org/officeDocument/2006/math">
+                    <m:r>
+                      <a:rPr lang="en-US" b="0" i="1" smtClean="0">
+                        <a:latin typeface="Cambria Math" panose="02040503050406030204" pitchFamily="18" charset="0"/>
+                      </a:rPr>
+                      <m:t>𝑟</m:t>
+                    </m:r>
+                  </m:oMath>
+                </a14:m>
+                <a:r>
+                  <a:rPr lang="en-US" dirty="0"/>
+                  <a:t>  body axis yaw rate</a:t>
+                </a:r>
+              </a:p>
+            </p:txBody>
+          </p:sp>
+        </mc:Choice>
+        <mc:Fallback>
+          <p:sp>
+            <p:nvSpPr>
+              <p:cNvPr id="8" name="TextBox 7">
+                <a:extLst>
+                  <a:ext uri="{FF2B5EF4-FFF2-40B4-BE49-F238E27FC236}">
+                    <a16:creationId xmlns:a16="http://schemas.microsoft.com/office/drawing/2014/main" id="{D883F520-EE07-64B8-A588-7A2FCF841BA1}"/>
+                  </a:ext>
+                </a:extLst>
+              </p:cNvPr>
+              <p:cNvSpPr txBox="1">
+                <a:spLocks noRot="1" noChangeAspect="1" noMove="1" noResize="1" noEditPoints="1" noAdjustHandles="1" noChangeArrowheads="1" noChangeShapeType="1" noTextEdit="1"/>
+              </p:cNvSpPr>
+              <p:nvPr/>
+            </p:nvSpPr>
+            <p:spPr>
+              <a:xfrm>
+                <a:off x="8238836" y="440171"/>
+                <a:ext cx="3389746" cy="2031325"/>
+              </a:xfrm>
+              <a:prstGeom prst="rect">
+                <a:avLst/>
+              </a:prstGeom>
+              <a:blipFill>
+                <a:blip r:embed="rId3"/>
+                <a:stretch>
+                  <a:fillRect l="-540" t="-1201" b="-4204"/>
+                </a:stretch>
+              </a:blipFill>
+            </p:spPr>
+            <p:txBody>
+              <a:bodyPr/>
+              <a:lstStyle/>
+              <a:p>
+                <a:r>
+                  <a:rPr lang="en-US">
+                    <a:noFill/>
+                  </a:rPr>
+                  <a:t> </a:t>
+                </a:r>
+              </a:p>
+            </p:txBody>
+          </p:sp>
+        </mc:Fallback>
+      </mc:AlternateContent>
+      <mc:AlternateContent xmlns:mc="http://schemas.openxmlformats.org/markup-compatibility/2006">
+        <mc:Choice xmlns:a14="http://schemas.microsoft.com/office/drawing/2010/main" Requires="a14">
+          <p:sp>
+            <p:nvSpPr>
+              <p:cNvPr id="9" name="TextBox 8">
+                <a:extLst>
+                  <a:ext uri="{FF2B5EF4-FFF2-40B4-BE49-F238E27FC236}">
+                    <a16:creationId xmlns:a16="http://schemas.microsoft.com/office/drawing/2014/main" id="{5A2EC155-436A-19B8-D2C6-094A76AF7C67}"/>
+                  </a:ext>
+                </a:extLst>
+              </p:cNvPr>
+              <p:cNvSpPr txBox="1"/>
+              <p:nvPr/>
+            </p:nvSpPr>
+            <p:spPr>
+              <a:xfrm>
+                <a:off x="662985" y="4604558"/>
+                <a:ext cx="6677891" cy="663836"/>
+              </a:xfrm>
+              <a:prstGeom prst="rect">
+                <a:avLst/>
+              </a:prstGeom>
+              <a:noFill/>
+            </p:spPr>
+            <p:txBody>
+              <a:bodyPr wrap="square" rtlCol="0">
+                <a:spAutoFit/>
+              </a:bodyPr>
+              <a:lstStyle/>
+              <a:p>
+                <a:r>
+                  <a:rPr lang="en-US" sz="2800" dirty="0"/>
+                  <a:t>When </a:t>
+                </a:r>
+                <a14:m>
+                  <m:oMath xmlns:m="http://schemas.openxmlformats.org/officeDocument/2006/math">
+                    <m:r>
+                      <a:rPr lang="en-US" sz="2800" i="1" smtClean="0">
+                        <a:latin typeface="Cambria Math" panose="02040503050406030204" pitchFamily="18" charset="0"/>
+                        <a:ea typeface="Cambria Math" panose="02040503050406030204" pitchFamily="18" charset="0"/>
+                      </a:rPr>
+                      <m:t>𝜃</m:t>
+                    </m:r>
+                  </m:oMath>
+                </a14:m>
+                <a:r>
+                  <a:rPr lang="en-US" sz="2800" dirty="0"/>
+                  <a:t> hits </a:t>
+                </a:r>
+                <a14:m>
+                  <m:oMath xmlns:m="http://schemas.openxmlformats.org/officeDocument/2006/math">
+                    <m:r>
+                      <a:rPr lang="en-US" sz="2800" b="0" i="1" smtClean="0">
+                        <a:latin typeface="Cambria Math" panose="02040503050406030204" pitchFamily="18" charset="0"/>
+                      </a:rPr>
+                      <m:t>±</m:t>
+                    </m:r>
+                    <m:f>
+                      <m:fPr>
+                        <m:ctrlPr>
+                          <a:rPr lang="en-US" sz="2800" b="0" i="1" smtClean="0">
+                            <a:latin typeface="Cambria Math" panose="02040503050406030204" pitchFamily="18" charset="0"/>
+                          </a:rPr>
+                        </m:ctrlPr>
+                      </m:fPr>
+                      <m:num>
+                        <m:r>
+                          <a:rPr lang="en-US" sz="2800" b="0" i="1" smtClean="0">
+                            <a:latin typeface="Cambria Math" panose="02040503050406030204" pitchFamily="18" charset="0"/>
+                            <a:ea typeface="Cambria Math" panose="02040503050406030204" pitchFamily="18" charset="0"/>
+                          </a:rPr>
+                          <m:t>𝜋</m:t>
+                        </m:r>
+                      </m:num>
+                      <m:den>
+                        <m:r>
+                          <a:rPr lang="en-US" sz="2800" b="0" i="1" smtClean="0">
+                            <a:latin typeface="Cambria Math" panose="02040503050406030204" pitchFamily="18" charset="0"/>
+                          </a:rPr>
+                          <m:t>2</m:t>
+                        </m:r>
+                      </m:den>
+                    </m:f>
+                  </m:oMath>
+                </a14:m>
+                <a:r>
+                  <a:rPr lang="en-US" sz="2800" dirty="0"/>
+                  <a:t>, we get singularities here</a:t>
+                </a:r>
+              </a:p>
+            </p:txBody>
+          </p:sp>
+        </mc:Choice>
+        <mc:Fallback>
+          <p:sp>
+            <p:nvSpPr>
+              <p:cNvPr id="9" name="TextBox 8">
+                <a:extLst>
+                  <a:ext uri="{FF2B5EF4-FFF2-40B4-BE49-F238E27FC236}">
+                    <a16:creationId xmlns:a16="http://schemas.microsoft.com/office/drawing/2014/main" id="{5A2EC155-436A-19B8-D2C6-094A76AF7C67}"/>
+                  </a:ext>
+                </a:extLst>
+              </p:cNvPr>
+              <p:cNvSpPr txBox="1">
+                <a:spLocks noRot="1" noChangeAspect="1" noMove="1" noResize="1" noEditPoints="1" noAdjustHandles="1" noChangeArrowheads="1" noChangeShapeType="1" noTextEdit="1"/>
+              </p:cNvSpPr>
+              <p:nvPr/>
+            </p:nvSpPr>
+            <p:spPr>
+              <a:xfrm>
+                <a:off x="662985" y="4604558"/>
+                <a:ext cx="6677891" cy="663836"/>
+              </a:xfrm>
+              <a:prstGeom prst="rect">
+                <a:avLst/>
+              </a:prstGeom>
+              <a:blipFill>
+                <a:blip r:embed="rId4"/>
+                <a:stretch>
+                  <a:fillRect l="-1918" b="-12844"/>
+                </a:stretch>
+              </a:blipFill>
+            </p:spPr>
+            <p:txBody>
+              <a:bodyPr/>
+              <a:lstStyle/>
+              <a:p>
+                <a:r>
+                  <a:rPr lang="en-US">
+                    <a:noFill/>
+                  </a:rPr>
+                  <a:t> </a:t>
+                </a:r>
+              </a:p>
+            </p:txBody>
+          </p:sp>
+        </mc:Fallback>
+      </mc:AlternateContent>
+      <mc:AlternateContent xmlns:mc="http://schemas.openxmlformats.org/markup-compatibility/2006">
+        <mc:Choice xmlns:a14="http://schemas.microsoft.com/office/drawing/2010/main" Requires="a14">
+          <p:sp>
+            <p:nvSpPr>
+              <p:cNvPr id="10" name="TextBox 9">
+                <a:extLst>
+                  <a:ext uri="{FF2B5EF4-FFF2-40B4-BE49-F238E27FC236}">
+                    <a16:creationId xmlns:a16="http://schemas.microsoft.com/office/drawing/2014/main" id="{EB966C09-2500-4083-33B2-98A381D0B5AD}"/>
+                  </a:ext>
+                </a:extLst>
+              </p:cNvPr>
+              <p:cNvSpPr txBox="1"/>
+              <p:nvPr/>
+            </p:nvSpPr>
+            <p:spPr>
+              <a:xfrm>
+                <a:off x="662984" y="5268394"/>
+                <a:ext cx="6677891" cy="1425134"/>
+              </a:xfrm>
+              <a:prstGeom prst="rect">
+                <a:avLst/>
+              </a:prstGeom>
+              <a:noFill/>
+            </p:spPr>
+            <p:txBody>
+              <a:bodyPr wrap="square" rtlCol="0">
+                <a:spAutoFit/>
+              </a:bodyPr>
+              <a:lstStyle/>
+              <a:p>
+                <a14:m>
+                  <m:oMath xmlns:m="http://schemas.openxmlformats.org/officeDocument/2006/math">
+                    <m:acc>
+                      <m:accPr>
+                        <m:chr m:val="̇"/>
+                        <m:ctrlPr>
+                          <a:rPr lang="en-US" sz="2800" i="1" smtClean="0">
+                            <a:latin typeface="Cambria Math" panose="02040503050406030204" pitchFamily="18" charset="0"/>
+                          </a:rPr>
+                        </m:ctrlPr>
+                      </m:accPr>
+                      <m:e>
+                        <m:r>
+                          <a:rPr lang="en-US" sz="2800" i="1" smtClean="0">
+                            <a:latin typeface="Cambria Math" panose="02040503050406030204" pitchFamily="18" charset="0"/>
+                            <a:ea typeface="Cambria Math" panose="02040503050406030204" pitchFamily="18" charset="0"/>
+                          </a:rPr>
+                          <m:t>𝜃</m:t>
+                        </m:r>
+                      </m:e>
+                    </m:acc>
+                  </m:oMath>
+                </a14:m>
+                <a:r>
+                  <a:rPr lang="en-US" sz="2800" dirty="0"/>
+                  <a:t> is fine</a:t>
+                </a:r>
+              </a:p>
+              <a:p>
+                <a14:m>
+                  <m:oMath xmlns:m="http://schemas.openxmlformats.org/officeDocument/2006/math">
+                    <m:acc>
+                      <m:accPr>
+                        <m:chr m:val="̇"/>
+                        <m:ctrlPr>
+                          <a:rPr lang="en-US" sz="2800" i="1" smtClean="0">
+                            <a:latin typeface="Cambria Math" panose="02040503050406030204" pitchFamily="18" charset="0"/>
+                          </a:rPr>
+                        </m:ctrlPr>
+                      </m:accPr>
+                      <m:e>
+                        <m:r>
+                          <a:rPr lang="en-US" sz="2800" i="1" smtClean="0">
+                            <a:latin typeface="Cambria Math" panose="02040503050406030204" pitchFamily="18" charset="0"/>
+                            <a:ea typeface="Cambria Math" panose="02040503050406030204" pitchFamily="18" charset="0"/>
+                          </a:rPr>
+                          <m:t>𝜙</m:t>
+                        </m:r>
+                      </m:e>
+                    </m:acc>
+                  </m:oMath>
+                </a14:m>
+                <a:r>
+                  <a:rPr lang="en-US" sz="2800" dirty="0"/>
+                  <a:t> and </a:t>
+                </a:r>
+                <a14:m>
+                  <m:oMath xmlns:m="http://schemas.openxmlformats.org/officeDocument/2006/math">
+                    <m:acc>
+                      <m:accPr>
+                        <m:chr m:val="̇"/>
+                        <m:ctrlPr>
+                          <a:rPr lang="en-US" sz="2800" i="1" smtClean="0">
+                            <a:latin typeface="Cambria Math" panose="02040503050406030204" pitchFamily="18" charset="0"/>
+                          </a:rPr>
+                        </m:ctrlPr>
+                      </m:accPr>
+                      <m:e>
+                        <m:r>
+                          <a:rPr lang="en-US" sz="2800" i="1" smtClean="0">
+                            <a:latin typeface="Cambria Math" panose="02040503050406030204" pitchFamily="18" charset="0"/>
+                            <a:ea typeface="Cambria Math" panose="02040503050406030204" pitchFamily="18" charset="0"/>
+                          </a:rPr>
+                          <m:t>𝜓</m:t>
+                        </m:r>
+                      </m:e>
+                    </m:acc>
+                  </m:oMath>
+                </a14:m>
+                <a:r>
+                  <a:rPr lang="en-US" sz="2800" dirty="0"/>
+                  <a:t> approach infinity</a:t>
+                </a:r>
+              </a:p>
+              <a:p>
+                <a14:m>
+                  <m:oMath xmlns:m="http://schemas.openxmlformats.org/officeDocument/2006/math">
+                    <m:r>
+                      <a:rPr lang="en-US" sz="2800" i="1" smtClean="0">
+                        <a:latin typeface="Cambria Math" panose="02040503050406030204" pitchFamily="18" charset="0"/>
+                        <a:ea typeface="Cambria Math" panose="02040503050406030204" pitchFamily="18" charset="0"/>
+                      </a:rPr>
+                      <m:t>𝜙</m:t>
+                    </m:r>
+                  </m:oMath>
+                </a14:m>
+                <a:r>
+                  <a:rPr lang="en-US" sz="2800" dirty="0"/>
+                  <a:t> and </a:t>
+                </a:r>
+                <a14:m>
+                  <m:oMath xmlns:m="http://schemas.openxmlformats.org/officeDocument/2006/math">
+                    <m:r>
+                      <a:rPr lang="en-US" sz="2800" i="1" smtClean="0">
+                        <a:latin typeface="Cambria Math" panose="02040503050406030204" pitchFamily="18" charset="0"/>
+                        <a:ea typeface="Cambria Math" panose="02040503050406030204" pitchFamily="18" charset="0"/>
+                      </a:rPr>
+                      <m:t>𝜓</m:t>
+                    </m:r>
+                  </m:oMath>
+                </a14:m>
+                <a:r>
+                  <a:rPr lang="en-US" sz="2800" dirty="0"/>
+                  <a:t> are discontinuous</a:t>
+                </a:r>
+              </a:p>
+            </p:txBody>
+          </p:sp>
+        </mc:Choice>
+        <mc:Fallback>
+          <p:sp>
+            <p:nvSpPr>
+              <p:cNvPr id="10" name="TextBox 9">
+                <a:extLst>
+                  <a:ext uri="{FF2B5EF4-FFF2-40B4-BE49-F238E27FC236}">
+                    <a16:creationId xmlns:a16="http://schemas.microsoft.com/office/drawing/2014/main" id="{EB966C09-2500-4083-33B2-98A381D0B5AD}"/>
+                  </a:ext>
+                </a:extLst>
+              </p:cNvPr>
+              <p:cNvSpPr txBox="1">
+                <a:spLocks noRot="1" noChangeAspect="1" noMove="1" noResize="1" noEditPoints="1" noAdjustHandles="1" noChangeArrowheads="1" noChangeShapeType="1" noTextEdit="1"/>
+              </p:cNvSpPr>
+              <p:nvPr/>
+            </p:nvSpPr>
+            <p:spPr>
+              <a:xfrm>
+                <a:off x="662984" y="5268394"/>
+                <a:ext cx="6677891" cy="1425134"/>
+              </a:xfrm>
+              <a:prstGeom prst="rect">
+                <a:avLst/>
+              </a:prstGeom>
+              <a:blipFill>
+                <a:blip r:embed="rId5"/>
+                <a:stretch>
+                  <a:fillRect t="-2564" b="-11111"/>
+                </a:stretch>
+              </a:blipFill>
+            </p:spPr>
+            <p:txBody>
+              <a:bodyPr/>
+              <a:lstStyle/>
+              <a:p>
+                <a:r>
+                  <a:rPr lang="en-US">
+                    <a:noFill/>
+                  </a:rPr>
+                  <a:t> </a:t>
+                </a:r>
+              </a:p>
+            </p:txBody>
+          </p:sp>
+        </mc:Fallback>
+      </mc:AlternateContent>
+      <p:pic>
+        <p:nvPicPr>
+          <p:cNvPr id="12" name="Picture 11">
+            <a:extLst>
+              <a:ext uri="{FF2B5EF4-FFF2-40B4-BE49-F238E27FC236}">
+                <a16:creationId xmlns:a16="http://schemas.microsoft.com/office/drawing/2014/main" id="{F24FA0E5-D397-FF5C-9FDF-D4FFA7AB4755}"/>
+              </a:ext>
+            </a:extLst>
+          </p:cNvPr>
+          <p:cNvPicPr>
+            <a:picLocks noChangeAspect="1"/>
+          </p:cNvPicPr>
+          <p:nvPr/>
+        </p:nvPicPr>
+        <p:blipFill>
+          <a:blip r:embed="rId6"/>
+          <a:stretch>
+            <a:fillRect/>
+          </a:stretch>
+        </p:blipFill>
+        <p:spPr>
+          <a:xfrm>
+            <a:off x="8039099" y="2615840"/>
+            <a:ext cx="3789219" cy="3959859"/>
+          </a:xfrm>
+          <a:prstGeom prst="rect">
+            <a:avLst/>
+          </a:prstGeom>
+        </p:spPr>
+      </p:pic>
+      <p:sp>
+        <p:nvSpPr>
+          <p:cNvPr id="13" name="TextBox 12">
+            <a:extLst>
+              <a:ext uri="{FF2B5EF4-FFF2-40B4-BE49-F238E27FC236}">
+                <a16:creationId xmlns:a16="http://schemas.microsoft.com/office/drawing/2014/main" id="{15347251-8ACF-E5A0-5FDF-7A05E168E62E}"/>
+              </a:ext>
+            </a:extLst>
+          </p:cNvPr>
+          <p:cNvSpPr txBox="1"/>
+          <p:nvPr/>
+        </p:nvSpPr>
+        <p:spPr>
+          <a:xfrm>
+            <a:off x="756550" y="264218"/>
+            <a:ext cx="5821864" cy="707886"/>
+          </a:xfrm>
+          <a:prstGeom prst="rect">
+            <a:avLst/>
+          </a:prstGeom>
+          <a:noFill/>
+        </p:spPr>
+        <p:txBody>
+          <a:bodyPr wrap="square" rtlCol="0">
+            <a:spAutoFit/>
+          </a:bodyPr>
+          <a:lstStyle/>
+          <a:p>
+            <a:pPr algn="ctr"/>
+            <a:r>
+              <a:rPr lang="en-US" sz="4000" dirty="0"/>
+              <a:t>Gimbal Lock</a:t>
+            </a:r>
+          </a:p>
+        </p:txBody>
+      </p:sp>
+      <p:cxnSp>
+        <p:nvCxnSpPr>
+          <p:cNvPr id="15" name="Straight Arrow Connector 14">
+            <a:extLst>
+              <a:ext uri="{FF2B5EF4-FFF2-40B4-BE49-F238E27FC236}">
+                <a16:creationId xmlns:a16="http://schemas.microsoft.com/office/drawing/2014/main" id="{71323F66-D1AD-E8A6-C369-639D5176FBDE}"/>
+              </a:ext>
+            </a:extLst>
+          </p:cNvPr>
+          <p:cNvCxnSpPr>
+            <a:cxnSpLocks/>
+            <a:endCxn id="4" idx="5"/>
+          </p:cNvCxnSpPr>
+          <p:nvPr/>
+        </p:nvCxnSpPr>
+        <p:spPr>
+          <a:xfrm flipH="1" flipV="1">
+            <a:off x="3534910" y="2813479"/>
+            <a:ext cx="2950654" cy="1894812"/>
+          </a:xfrm>
+          <a:prstGeom prst="straightConnector1">
+            <a:avLst/>
+          </a:prstGeom>
+          <a:ln w="25400">
+            <a:solidFill>
+              <a:srgbClr val="FF0000"/>
+            </a:solidFill>
+            <a:tailEnd type="triangle" w="lg" len="lg"/>
+          </a:ln>
+        </p:spPr>
+        <p:style>
+          <a:lnRef idx="2">
+            <a:schemeClr val="accent1"/>
+          </a:lnRef>
+          <a:fillRef idx="0">
+            <a:schemeClr val="accent1"/>
+          </a:fillRef>
+          <a:effectRef idx="1">
+            <a:schemeClr val="accent1"/>
+          </a:effectRef>
+          <a:fontRef idx="minor">
+            <a:schemeClr val="tx1"/>
+          </a:fontRef>
+        </p:style>
+      </p:cxnSp>
+      <p:cxnSp>
+        <p:nvCxnSpPr>
+          <p:cNvPr id="16" name="Straight Arrow Connector 15">
+            <a:extLst>
+              <a:ext uri="{FF2B5EF4-FFF2-40B4-BE49-F238E27FC236}">
+                <a16:creationId xmlns:a16="http://schemas.microsoft.com/office/drawing/2014/main" id="{2217562E-AFA5-46A9-BB4D-BBC4457831D7}"/>
+              </a:ext>
+            </a:extLst>
+          </p:cNvPr>
+          <p:cNvCxnSpPr>
+            <a:cxnSpLocks/>
+            <a:endCxn id="5" idx="4"/>
+          </p:cNvCxnSpPr>
+          <p:nvPr/>
+        </p:nvCxnSpPr>
+        <p:spPr>
+          <a:xfrm flipH="1" flipV="1">
+            <a:off x="4651109" y="2887130"/>
+            <a:ext cx="1834455" cy="1825079"/>
+          </a:xfrm>
+          <a:prstGeom prst="straightConnector1">
+            <a:avLst/>
+          </a:prstGeom>
+          <a:ln w="25400">
+            <a:solidFill>
+              <a:srgbClr val="FF0000"/>
+            </a:solidFill>
+            <a:tailEnd type="triangle" w="lg" len="lg"/>
+          </a:ln>
+        </p:spPr>
+        <p:style>
+          <a:lnRef idx="2">
+            <a:schemeClr val="accent1"/>
+          </a:lnRef>
+          <a:fillRef idx="0">
+            <a:schemeClr val="accent1"/>
+          </a:fillRef>
+          <a:effectRef idx="1">
+            <a:schemeClr val="accent1"/>
+          </a:effectRef>
+          <a:fontRef idx="minor">
+            <a:schemeClr val="tx1"/>
+          </a:fontRef>
+        </p:style>
+      </p:cxnSp>
+      <p:cxnSp>
+        <p:nvCxnSpPr>
+          <p:cNvPr id="19" name="Straight Arrow Connector 18">
+            <a:extLst>
+              <a:ext uri="{FF2B5EF4-FFF2-40B4-BE49-F238E27FC236}">
+                <a16:creationId xmlns:a16="http://schemas.microsoft.com/office/drawing/2014/main" id="{8BC18BEF-84F4-DBFC-9C45-6EB0191BEAAF}"/>
+              </a:ext>
+            </a:extLst>
+          </p:cNvPr>
+          <p:cNvCxnSpPr>
+            <a:cxnSpLocks/>
+            <a:endCxn id="6" idx="5"/>
+          </p:cNvCxnSpPr>
+          <p:nvPr/>
+        </p:nvCxnSpPr>
+        <p:spPr>
+          <a:xfrm flipH="1" flipV="1">
+            <a:off x="3825856" y="3377965"/>
+            <a:ext cx="2657074" cy="1330326"/>
+          </a:xfrm>
+          <a:prstGeom prst="straightConnector1">
+            <a:avLst/>
+          </a:prstGeom>
+          <a:ln w="25400">
+            <a:solidFill>
+              <a:srgbClr val="FF0000"/>
+            </a:solidFill>
+            <a:tailEnd type="triangle" w="lg" len="lg"/>
+          </a:ln>
+        </p:spPr>
+        <p:style>
+          <a:lnRef idx="2">
+            <a:schemeClr val="accent1"/>
+          </a:lnRef>
+          <a:fillRef idx="0">
+            <a:schemeClr val="accent1"/>
+          </a:fillRef>
+          <a:effectRef idx="1">
+            <a:schemeClr val="accent1"/>
+          </a:effectRef>
+          <a:fontRef idx="minor">
+            <a:schemeClr val="tx1"/>
+          </a:fontRef>
+        </p:style>
+      </p:cxnSp>
+      <p:cxnSp>
+        <p:nvCxnSpPr>
+          <p:cNvPr id="22" name="Straight Arrow Connector 21">
+            <a:extLst>
+              <a:ext uri="{FF2B5EF4-FFF2-40B4-BE49-F238E27FC236}">
+                <a16:creationId xmlns:a16="http://schemas.microsoft.com/office/drawing/2014/main" id="{591512B6-C2C9-0917-B62F-17586D9DD119}"/>
+              </a:ext>
+            </a:extLst>
+          </p:cNvPr>
+          <p:cNvCxnSpPr>
+            <a:cxnSpLocks/>
+            <a:endCxn id="7" idx="4"/>
+          </p:cNvCxnSpPr>
+          <p:nvPr/>
+        </p:nvCxnSpPr>
+        <p:spPr>
+          <a:xfrm flipH="1" flipV="1">
+            <a:off x="5810272" y="3451616"/>
+            <a:ext cx="672658" cy="1256675"/>
+          </a:xfrm>
+          <a:prstGeom prst="straightConnector1">
+            <a:avLst/>
+          </a:prstGeom>
+          <a:ln w="25400">
+            <a:solidFill>
+              <a:srgbClr val="FF0000"/>
+            </a:solidFill>
+            <a:tailEnd type="triangle" w="lg" len="lg"/>
+          </a:ln>
+        </p:spPr>
+        <p:style>
+          <a:lnRef idx="2">
+            <a:schemeClr val="accent1"/>
+          </a:lnRef>
+          <a:fillRef idx="0">
+            <a:schemeClr val="accent1"/>
+          </a:fillRef>
+          <a:effectRef idx="1">
+            <a:schemeClr val="accent1"/>
+          </a:effectRef>
+          <a:fontRef idx="minor">
+            <a:schemeClr val="tx1"/>
+          </a:fontRef>
+        </p:style>
+      </p:cxnSp>
+    </p:spTree>
+    <p:extLst>
+      <p:ext uri="{BB962C8B-B14F-4D97-AF65-F5344CB8AC3E}">
+        <p14:creationId xmlns:p14="http://schemas.microsoft.com/office/powerpoint/2010/main" val="3487998338"/>
+      </p:ext>
+    </p:extLst>
+  </p:cSld>
+  <p:clrMapOvr>
+    <a:masterClrMapping/>
+  </p:clrMapOvr>
+  <p:timing>
+    <p:tnLst>
+      <p:par>
+        <p:cTn id="1" dur="indefinite" restart="never" nodeType="tmRoot">
+          <p:childTnLst>
+            <p:seq concurrent="1" nextAc="seek">
+              <p:cTn id="2" dur="indefinite" nodeType="mainSeq">
+                <p:childTnLst>
+                  <p:par>
+                    <p:cTn id="3" fill="hold">
+                      <p:stCondLst>
+                        <p:cond delay="indefinite"/>
+                      </p:stCondLst>
+                      <p:childTnLst>
+                        <p:par>
+                          <p:cTn id="4" fill="hold">
+                            <p:stCondLst>
+                              <p:cond delay="0"/>
+                            </p:stCondLst>
+                            <p:childTnLst>
+                              <p:par>
+                                <p:cTn id="5" presetID="42" presetClass="entr" presetSubtype="0" fill="hold" grpId="0" nodeType="clickEffect">
+                                  <p:stCondLst>
+                                    <p:cond delay="0"/>
+                                  </p:stCondLst>
+                                  <p:childTnLst>
+                                    <p:set>
+                                      <p:cBhvr>
+                                        <p:cTn id="6" dur="1" fill="hold">
+                                          <p:stCondLst>
+                                            <p:cond delay="0"/>
+                                          </p:stCondLst>
+                                        </p:cTn>
+                                        <p:tgtEl>
+                                          <p:spTgt spid="9"/>
+                                        </p:tgtEl>
+                                        <p:attrNameLst>
+                                          <p:attrName>style.visibility</p:attrName>
+                                        </p:attrNameLst>
+                                      </p:cBhvr>
+                                      <p:to>
+                                        <p:strVal val="visible"/>
+                                      </p:to>
+                                    </p:set>
+                                    <p:animEffect transition="in" filter="fade">
+                                      <p:cBhvr>
+                                        <p:cTn id="7" dur="1000"/>
+                                        <p:tgtEl>
+                                          <p:spTgt spid="9"/>
+                                        </p:tgtEl>
+                                      </p:cBhvr>
+                                    </p:animEffect>
+                                    <p:anim calcmode="lin" valueType="num">
+                                      <p:cBhvr>
+                                        <p:cTn id="8" dur="1000" fill="hold"/>
+                                        <p:tgtEl>
+                                          <p:spTgt spid="9"/>
+                                        </p:tgtEl>
+                                        <p:attrNameLst>
+                                          <p:attrName>ppt_x</p:attrName>
+                                        </p:attrNameLst>
+                                      </p:cBhvr>
+                                      <p:tavLst>
+                                        <p:tav tm="0">
+                                          <p:val>
+                                            <p:strVal val="#ppt_x"/>
+                                          </p:val>
+                                        </p:tav>
+                                        <p:tav tm="100000">
+                                          <p:val>
+                                            <p:strVal val="#ppt_x"/>
+                                          </p:val>
+                                        </p:tav>
+                                      </p:tavLst>
+                                    </p:anim>
+                                    <p:anim calcmode="lin" valueType="num">
+                                      <p:cBhvr>
+                                        <p:cTn id="9" dur="1000" fill="hold"/>
+                                        <p:tgtEl>
+                                          <p:spTgt spid="9"/>
+                                        </p:tgtEl>
+                                        <p:attrNameLst>
+                                          <p:attrName>ppt_y</p:attrName>
+                                        </p:attrNameLst>
+                                      </p:cBhvr>
+                                      <p:tavLst>
+                                        <p:tav tm="0">
+                                          <p:val>
+                                            <p:strVal val="#ppt_y+.1"/>
+                                          </p:val>
+                                        </p:tav>
+                                        <p:tav tm="100000">
+                                          <p:val>
+                                            <p:strVal val="#ppt_y"/>
+                                          </p:val>
+                                        </p:tav>
+                                      </p:tavLst>
+                                    </p:anim>
+                                  </p:childTnLst>
+                                </p:cTn>
+                              </p:par>
+                            </p:childTnLst>
+                          </p:cTn>
+                        </p:par>
+                        <p:par>
+                          <p:cTn id="10" fill="hold">
+                            <p:stCondLst>
+                              <p:cond delay="1000"/>
+                            </p:stCondLst>
+                            <p:childTnLst>
+                              <p:par>
+                                <p:cTn id="11" presetID="22" presetClass="entr" presetSubtype="2" fill="hold" nodeType="afterEffect">
+                                  <p:stCondLst>
+                                    <p:cond delay="0"/>
+                                  </p:stCondLst>
+                                  <p:childTnLst>
+                                    <p:set>
+                                      <p:cBhvr>
+                                        <p:cTn id="12" dur="1" fill="hold">
+                                          <p:stCondLst>
+                                            <p:cond delay="0"/>
+                                          </p:stCondLst>
+                                        </p:cTn>
+                                        <p:tgtEl>
+                                          <p:spTgt spid="15"/>
+                                        </p:tgtEl>
+                                        <p:attrNameLst>
+                                          <p:attrName>style.visibility</p:attrName>
+                                        </p:attrNameLst>
+                                      </p:cBhvr>
+                                      <p:to>
+                                        <p:strVal val="visible"/>
+                                      </p:to>
+                                    </p:set>
+                                    <p:animEffect transition="in" filter="wipe(right)">
+                                      <p:cBhvr>
+                                        <p:cTn id="13" dur="500"/>
+                                        <p:tgtEl>
+                                          <p:spTgt spid="15"/>
+                                        </p:tgtEl>
+                                      </p:cBhvr>
+                                    </p:animEffect>
+                                  </p:childTnLst>
+                                </p:cTn>
+                              </p:par>
+                            </p:childTnLst>
+                          </p:cTn>
+                        </p:par>
+                        <p:par>
+                          <p:cTn id="14" fill="hold">
+                            <p:stCondLst>
+                              <p:cond delay="1500"/>
+                            </p:stCondLst>
+                            <p:childTnLst>
+                              <p:par>
+                                <p:cTn id="15" presetID="21" presetClass="entr" presetSubtype="1" fill="hold" grpId="0" nodeType="afterEffect">
+                                  <p:stCondLst>
+                                    <p:cond delay="0"/>
+                                  </p:stCondLst>
+                                  <p:childTnLst>
+                                    <p:set>
+                                      <p:cBhvr>
+                                        <p:cTn id="16" dur="1" fill="hold">
+                                          <p:stCondLst>
+                                            <p:cond delay="0"/>
+                                          </p:stCondLst>
+                                        </p:cTn>
+                                        <p:tgtEl>
+                                          <p:spTgt spid="4"/>
+                                        </p:tgtEl>
+                                        <p:attrNameLst>
+                                          <p:attrName>style.visibility</p:attrName>
+                                        </p:attrNameLst>
+                                      </p:cBhvr>
+                                      <p:to>
+                                        <p:strVal val="visible"/>
+                                      </p:to>
+                                    </p:set>
+                                    <p:animEffect transition="in" filter="wheel(1)">
+                                      <p:cBhvr>
+                                        <p:cTn id="17" dur="500"/>
+                                        <p:tgtEl>
+                                          <p:spTgt spid="4"/>
+                                        </p:tgtEl>
+                                      </p:cBhvr>
+                                    </p:animEffect>
+                                  </p:childTnLst>
+                                </p:cTn>
+                              </p:par>
+                            </p:childTnLst>
+                          </p:cTn>
+                        </p:par>
+                        <p:par>
+                          <p:cTn id="18" fill="hold">
+                            <p:stCondLst>
+                              <p:cond delay="2000"/>
+                            </p:stCondLst>
+                            <p:childTnLst>
+                              <p:par>
+                                <p:cTn id="19" presetID="22" presetClass="entr" presetSubtype="2" fill="hold" nodeType="afterEffect">
+                                  <p:stCondLst>
+                                    <p:cond delay="0"/>
+                                  </p:stCondLst>
+                                  <p:childTnLst>
+                                    <p:set>
+                                      <p:cBhvr>
+                                        <p:cTn id="20" dur="1" fill="hold">
+                                          <p:stCondLst>
+                                            <p:cond delay="0"/>
+                                          </p:stCondLst>
+                                        </p:cTn>
+                                        <p:tgtEl>
+                                          <p:spTgt spid="16"/>
+                                        </p:tgtEl>
+                                        <p:attrNameLst>
+                                          <p:attrName>style.visibility</p:attrName>
+                                        </p:attrNameLst>
+                                      </p:cBhvr>
+                                      <p:to>
+                                        <p:strVal val="visible"/>
+                                      </p:to>
+                                    </p:set>
+                                    <p:animEffect transition="in" filter="wipe(right)">
+                                      <p:cBhvr>
+                                        <p:cTn id="21" dur="500"/>
+                                        <p:tgtEl>
+                                          <p:spTgt spid="16"/>
+                                        </p:tgtEl>
+                                      </p:cBhvr>
+                                    </p:animEffect>
+                                  </p:childTnLst>
+                                </p:cTn>
+                              </p:par>
+                            </p:childTnLst>
+                          </p:cTn>
+                        </p:par>
+                        <p:par>
+                          <p:cTn id="22" fill="hold">
+                            <p:stCondLst>
+                              <p:cond delay="2500"/>
+                            </p:stCondLst>
+                            <p:childTnLst>
+                              <p:par>
+                                <p:cTn id="23" presetID="21" presetClass="entr" presetSubtype="1" fill="hold" grpId="0" nodeType="afterEffect">
+                                  <p:stCondLst>
+                                    <p:cond delay="0"/>
+                                  </p:stCondLst>
+                                  <p:childTnLst>
+                                    <p:set>
+                                      <p:cBhvr>
+                                        <p:cTn id="24" dur="1" fill="hold">
+                                          <p:stCondLst>
+                                            <p:cond delay="0"/>
+                                          </p:stCondLst>
+                                        </p:cTn>
+                                        <p:tgtEl>
+                                          <p:spTgt spid="5"/>
+                                        </p:tgtEl>
+                                        <p:attrNameLst>
+                                          <p:attrName>style.visibility</p:attrName>
+                                        </p:attrNameLst>
+                                      </p:cBhvr>
+                                      <p:to>
+                                        <p:strVal val="visible"/>
+                                      </p:to>
+                                    </p:set>
+                                    <p:animEffect transition="in" filter="wheel(1)">
+                                      <p:cBhvr>
+                                        <p:cTn id="25" dur="500"/>
+                                        <p:tgtEl>
+                                          <p:spTgt spid="5"/>
+                                        </p:tgtEl>
+                                      </p:cBhvr>
+                                    </p:animEffect>
+                                  </p:childTnLst>
+                                </p:cTn>
+                              </p:par>
+                            </p:childTnLst>
+                          </p:cTn>
+                        </p:par>
+                        <p:par>
+                          <p:cTn id="26" fill="hold">
+                            <p:stCondLst>
+                              <p:cond delay="3000"/>
+                            </p:stCondLst>
+                            <p:childTnLst>
+                              <p:par>
+                                <p:cTn id="27" presetID="22" presetClass="entr" presetSubtype="2" fill="hold" nodeType="afterEffect">
+                                  <p:stCondLst>
+                                    <p:cond delay="0"/>
+                                  </p:stCondLst>
+                                  <p:childTnLst>
+                                    <p:set>
+                                      <p:cBhvr>
+                                        <p:cTn id="28" dur="1" fill="hold">
+                                          <p:stCondLst>
+                                            <p:cond delay="0"/>
+                                          </p:stCondLst>
+                                        </p:cTn>
+                                        <p:tgtEl>
+                                          <p:spTgt spid="19"/>
+                                        </p:tgtEl>
+                                        <p:attrNameLst>
+                                          <p:attrName>style.visibility</p:attrName>
+                                        </p:attrNameLst>
+                                      </p:cBhvr>
+                                      <p:to>
+                                        <p:strVal val="visible"/>
+                                      </p:to>
+                                    </p:set>
+                                    <p:animEffect transition="in" filter="wipe(right)">
+                                      <p:cBhvr>
+                                        <p:cTn id="29" dur="500"/>
+                                        <p:tgtEl>
+                                          <p:spTgt spid="19"/>
+                                        </p:tgtEl>
+                                      </p:cBhvr>
+                                    </p:animEffect>
+                                  </p:childTnLst>
+                                </p:cTn>
+                              </p:par>
+                            </p:childTnLst>
+                          </p:cTn>
+                        </p:par>
+                        <p:par>
+                          <p:cTn id="30" fill="hold">
+                            <p:stCondLst>
+                              <p:cond delay="3500"/>
+                            </p:stCondLst>
+                            <p:childTnLst>
+                              <p:par>
+                                <p:cTn id="31" presetID="21" presetClass="entr" presetSubtype="1" fill="hold" grpId="0" nodeType="afterEffect">
+                                  <p:stCondLst>
+                                    <p:cond delay="0"/>
+                                  </p:stCondLst>
+                                  <p:childTnLst>
+                                    <p:set>
+                                      <p:cBhvr>
+                                        <p:cTn id="32" dur="1" fill="hold">
+                                          <p:stCondLst>
+                                            <p:cond delay="0"/>
+                                          </p:stCondLst>
+                                        </p:cTn>
+                                        <p:tgtEl>
+                                          <p:spTgt spid="6"/>
+                                        </p:tgtEl>
+                                        <p:attrNameLst>
+                                          <p:attrName>style.visibility</p:attrName>
+                                        </p:attrNameLst>
+                                      </p:cBhvr>
+                                      <p:to>
+                                        <p:strVal val="visible"/>
+                                      </p:to>
+                                    </p:set>
+                                    <p:animEffect transition="in" filter="wheel(1)">
+                                      <p:cBhvr>
+                                        <p:cTn id="33" dur="500"/>
+                                        <p:tgtEl>
+                                          <p:spTgt spid="6"/>
+                                        </p:tgtEl>
+                                      </p:cBhvr>
+                                    </p:animEffect>
+                                  </p:childTnLst>
+                                </p:cTn>
+                              </p:par>
+                            </p:childTnLst>
+                          </p:cTn>
+                        </p:par>
+                        <p:par>
+                          <p:cTn id="34" fill="hold">
+                            <p:stCondLst>
+                              <p:cond delay="4000"/>
+                            </p:stCondLst>
+                            <p:childTnLst>
+                              <p:par>
+                                <p:cTn id="35" presetID="22" presetClass="entr" presetSubtype="2" fill="hold" nodeType="afterEffect">
+                                  <p:stCondLst>
+                                    <p:cond delay="0"/>
+                                  </p:stCondLst>
+                                  <p:childTnLst>
+                                    <p:set>
+                                      <p:cBhvr>
+                                        <p:cTn id="36" dur="1" fill="hold">
+                                          <p:stCondLst>
+                                            <p:cond delay="0"/>
+                                          </p:stCondLst>
+                                        </p:cTn>
+                                        <p:tgtEl>
+                                          <p:spTgt spid="22"/>
+                                        </p:tgtEl>
+                                        <p:attrNameLst>
+                                          <p:attrName>style.visibility</p:attrName>
+                                        </p:attrNameLst>
+                                      </p:cBhvr>
+                                      <p:to>
+                                        <p:strVal val="visible"/>
+                                      </p:to>
+                                    </p:set>
+                                    <p:animEffect transition="in" filter="wipe(right)">
+                                      <p:cBhvr>
+                                        <p:cTn id="37" dur="500"/>
+                                        <p:tgtEl>
+                                          <p:spTgt spid="22"/>
+                                        </p:tgtEl>
+                                      </p:cBhvr>
+                                    </p:animEffect>
+                                  </p:childTnLst>
+                                </p:cTn>
+                              </p:par>
+                            </p:childTnLst>
+                          </p:cTn>
+                        </p:par>
+                        <p:par>
+                          <p:cTn id="38" fill="hold">
+                            <p:stCondLst>
+                              <p:cond delay="4500"/>
+                            </p:stCondLst>
+                            <p:childTnLst>
+                              <p:par>
+                                <p:cTn id="39" presetID="21" presetClass="entr" presetSubtype="1" fill="hold" grpId="0" nodeType="afterEffect">
+                                  <p:stCondLst>
+                                    <p:cond delay="0"/>
+                                  </p:stCondLst>
+                                  <p:childTnLst>
+                                    <p:set>
+                                      <p:cBhvr>
+                                        <p:cTn id="40" dur="1" fill="hold">
+                                          <p:stCondLst>
+                                            <p:cond delay="0"/>
+                                          </p:stCondLst>
+                                        </p:cTn>
+                                        <p:tgtEl>
+                                          <p:spTgt spid="7"/>
+                                        </p:tgtEl>
+                                        <p:attrNameLst>
+                                          <p:attrName>style.visibility</p:attrName>
+                                        </p:attrNameLst>
+                                      </p:cBhvr>
+                                      <p:to>
+                                        <p:strVal val="visible"/>
+                                      </p:to>
+                                    </p:set>
+                                    <p:animEffect transition="in" filter="wheel(1)">
+                                      <p:cBhvr>
+                                        <p:cTn id="41" dur="500"/>
+                                        <p:tgtEl>
+                                          <p:spTgt spid="7"/>
+                                        </p:tgtEl>
+                                      </p:cBhvr>
+                                    </p:animEffect>
+                                  </p:childTnLst>
+                                </p:cTn>
+                              </p:par>
+                            </p:childTnLst>
+                          </p:cTn>
+                        </p:par>
+                      </p:childTnLst>
+                    </p:cTn>
+                  </p:par>
+                  <p:par>
+                    <p:cTn id="42" fill="hold">
+                      <p:stCondLst>
+                        <p:cond delay="indefinite"/>
+                      </p:stCondLst>
+                      <p:childTnLst>
+                        <p:par>
+                          <p:cTn id="43" fill="hold">
+                            <p:stCondLst>
+                              <p:cond delay="0"/>
+                            </p:stCondLst>
+                            <p:childTnLst>
+                              <p:par>
+                                <p:cTn id="44" presetID="42" presetClass="entr" presetSubtype="0" fill="hold" grpId="0" nodeType="clickEffect">
+                                  <p:stCondLst>
+                                    <p:cond delay="0"/>
+                                  </p:stCondLst>
+                                  <p:childTnLst>
+                                    <p:set>
+                                      <p:cBhvr>
+                                        <p:cTn id="45" dur="1" fill="hold">
+                                          <p:stCondLst>
+                                            <p:cond delay="0"/>
+                                          </p:stCondLst>
+                                        </p:cTn>
+                                        <p:tgtEl>
+                                          <p:spTgt spid="10"/>
+                                        </p:tgtEl>
+                                        <p:attrNameLst>
+                                          <p:attrName>style.visibility</p:attrName>
+                                        </p:attrNameLst>
+                                      </p:cBhvr>
+                                      <p:to>
+                                        <p:strVal val="visible"/>
+                                      </p:to>
+                                    </p:set>
+                                    <p:animEffect transition="in" filter="fade">
+                                      <p:cBhvr>
+                                        <p:cTn id="46" dur="1000"/>
+                                        <p:tgtEl>
+                                          <p:spTgt spid="10"/>
+                                        </p:tgtEl>
+                                      </p:cBhvr>
+                                    </p:animEffect>
+                                    <p:anim calcmode="lin" valueType="num">
+                                      <p:cBhvr>
+                                        <p:cTn id="47" dur="1000" fill="hold"/>
+                                        <p:tgtEl>
+                                          <p:spTgt spid="10"/>
+                                        </p:tgtEl>
+                                        <p:attrNameLst>
+                                          <p:attrName>ppt_x</p:attrName>
+                                        </p:attrNameLst>
+                                      </p:cBhvr>
+                                      <p:tavLst>
+                                        <p:tav tm="0">
+                                          <p:val>
+                                            <p:strVal val="#ppt_x"/>
+                                          </p:val>
+                                        </p:tav>
+                                        <p:tav tm="100000">
+                                          <p:val>
+                                            <p:strVal val="#ppt_x"/>
+                                          </p:val>
+                                        </p:tav>
+                                      </p:tavLst>
+                                    </p:anim>
+                                    <p:anim calcmode="lin" valueType="num">
+                                      <p:cBhvr>
+                                        <p:cTn id="48" dur="1000" fill="hold"/>
+                                        <p:tgtEl>
+                                          <p:spTgt spid="10"/>
+                                        </p:tgtEl>
+                                        <p:attrNameLst>
+                                          <p:attrName>ppt_y</p:attrName>
+                                        </p:attrNameLst>
+                                      </p:cBhvr>
+                                      <p:tavLst>
+                                        <p:tav tm="0">
+                                          <p:val>
+                                            <p:strVal val="#ppt_y+.1"/>
+                                          </p:val>
+                                        </p:tav>
+                                        <p:tav tm="100000">
+                                          <p:val>
+                                            <p:strVal val="#ppt_y"/>
+                                          </p:val>
+                                        </p:tav>
+                                      </p:tavLst>
+                                    </p:anim>
+                                  </p:childTnLst>
+                                </p:cTn>
+                              </p:par>
+                            </p:childTnLst>
+                          </p:cTn>
+                        </p:par>
+                      </p:childTnLst>
+                    </p:cTn>
+                  </p:par>
+                </p:childTnLst>
+              </p:cTn>
+              <p:prevCondLst>
+                <p:cond evt="onPrev" delay="0">
+                  <p:tgtEl>
+                    <p:sldTgt/>
+                  </p:tgtEl>
+                </p:cond>
+              </p:prevCondLst>
+              <p:nextCondLst>
+                <p:cond evt="onNext" delay="0">
+                  <p:tgtEl>
+                    <p:sldTgt/>
+                  </p:tgtEl>
+                </p:cond>
+              </p:nextCondLst>
+            </p:seq>
+          </p:childTnLst>
+        </p:cTn>
+      </p:par>
+    </p:tnLst>
+    <p:bldLst>
+      <p:bldP spid="4" grpId="0" animBg="1"/>
+      <p:bldP spid="5" grpId="0" animBg="1"/>
+      <p:bldP spid="6" grpId="0" animBg="1"/>
+      <p:bldP spid="7" grpId="0" animBg="1"/>
+      <p:bldP spid="9" grpId="0"/>
+      <p:bldP spid="10" grpId="0"/>
+    </p:bldLst>
+  </p:timing>
+</p:sld>
+</file>
+
+<file path=ppt/slides/slide4.xml><?xml version="1.0" encoding="utf-8"?>
+<p:sld xmlns:a="http://schemas.openxmlformats.org/drawingml/2006/main" xmlns:r="http://schemas.openxmlformats.org/officeDocument/2006/relationships" xmlns:p="http://schemas.openxmlformats.org/presentationml/2006/main">
+  <p:cSld>
+    <p:spTree>
+      <p:nvGrpSpPr>
+        <p:cNvPr id="1" name="">
+          <a:extLst>
+            <a:ext uri="{FF2B5EF4-FFF2-40B4-BE49-F238E27FC236}">
+              <a16:creationId xmlns:a16="http://schemas.microsoft.com/office/drawing/2014/main" id="{0AED29C6-DEF8-0C9C-5878-6B81FC79045C}"/>
+            </a:ext>
+          </a:extLst>
+        </p:cNvPr>
+        <p:cNvGrpSpPr/>
+        <p:nvPr/>
+      </p:nvGrpSpPr>
+      <p:grpSpPr>
+        <a:xfrm>
+          <a:off x="0" y="0"/>
+          <a:ext cx="0" cy="0"/>
+          <a:chOff x="0" y="0"/>
+          <a:chExt cx="0" cy="0"/>
+        </a:xfrm>
+      </p:grpSpPr>
+      <mc:AlternateContent xmlns:mc="http://schemas.openxmlformats.org/markup-compatibility/2006">
+        <mc:Choice xmlns:a14="http://schemas.microsoft.com/office/drawing/2010/main" Requires="a14">
+          <p:sp>
+            <p:nvSpPr>
+              <p:cNvPr id="3" name="Content Placeholder 2">
+                <a:extLst>
+                  <a:ext uri="{FF2B5EF4-FFF2-40B4-BE49-F238E27FC236}">
+                    <a16:creationId xmlns:a16="http://schemas.microsoft.com/office/drawing/2014/main" id="{508FA53A-081E-A0C9-2591-B7787F5C3B69}"/>
+                  </a:ext>
+                </a:extLst>
+              </p:cNvPr>
+              <p:cNvSpPr>
+                <a:spLocks noGrp="1"/>
+              </p:cNvSpPr>
+              <p:nvPr>
+                <p:ph idx="1"/>
+              </p:nvPr>
+            </p:nvSpPr>
+            <p:spPr>
+              <a:xfrm>
+                <a:off x="441036" y="1262207"/>
+                <a:ext cx="6001882" cy="4351338"/>
+              </a:xfrm>
+            </p:spPr>
+            <p:txBody>
+              <a:bodyPr/>
+              <a:lstStyle/>
+              <a:p>
+                <a:pPr marL="0" indent="0">
+                  <a:buNone/>
+                </a:pPr>
+                <a14:m>
+                  <m:oMathPara xmlns:m="http://schemas.openxmlformats.org/officeDocument/2006/math">
+                    <m:oMathParaPr>
+                      <m:jc m:val="centerGroup"/>
+                    </m:oMathParaPr>
+                    <m:oMath xmlns:m="http://schemas.openxmlformats.org/officeDocument/2006/math">
+                      <m:acc>
+                        <m:accPr>
+                          <m:chr m:val="̇"/>
+                          <m:ctrlPr>
+                            <a:rPr lang="en-US" i="1" smtClean="0">
+                              <a:latin typeface="Cambria Math" panose="02040503050406030204" pitchFamily="18" charset="0"/>
+                            </a:rPr>
+                          </m:ctrlPr>
+                        </m:accPr>
+                        <m:e>
+                          <m:r>
+                            <a:rPr lang="en-US" i="1" smtClean="0">
+                              <a:latin typeface="Cambria Math" panose="02040503050406030204" pitchFamily="18" charset="0"/>
+                              <a:ea typeface="Cambria Math" panose="02040503050406030204" pitchFamily="18" charset="0"/>
+                            </a:rPr>
+                            <m:t>𝜃</m:t>
+                          </m:r>
+                        </m:e>
+                      </m:acc>
+                      <m:r>
+                        <a:rPr lang="en-US" b="0" i="1" smtClean="0">
+                          <a:latin typeface="Cambria Math" panose="02040503050406030204" pitchFamily="18" charset="0"/>
+                        </a:rPr>
+                        <m:t>=</m:t>
+                      </m:r>
+                      <m:r>
+                        <a:rPr lang="en-US" b="0" i="1" smtClean="0">
+                          <a:latin typeface="Cambria Math" panose="02040503050406030204" pitchFamily="18" charset="0"/>
+                        </a:rPr>
+                        <m:t>𝑞</m:t>
+                      </m:r>
+                      <m:func>
+                        <m:funcPr>
+                          <m:ctrlPr>
+                            <a:rPr lang="en-US" b="0" i="1" smtClean="0">
+                              <a:latin typeface="Cambria Math" panose="02040503050406030204" pitchFamily="18" charset="0"/>
+                            </a:rPr>
+                          </m:ctrlPr>
+                        </m:funcPr>
+                        <m:fName>
+                          <m:r>
+                            <m:rPr>
+                              <m:sty m:val="p"/>
+                            </m:rPr>
+                            <a:rPr lang="en-US" b="0" i="0" smtClean="0">
+                              <a:latin typeface="Cambria Math" panose="02040503050406030204" pitchFamily="18" charset="0"/>
+                            </a:rPr>
+                            <m:t>cos</m:t>
+                          </m:r>
+                        </m:fName>
+                        <m:e>
+                          <m:r>
+                            <a:rPr lang="en-US" b="0" i="1" smtClean="0">
+                              <a:latin typeface="Cambria Math" panose="02040503050406030204" pitchFamily="18" charset="0"/>
+                              <a:ea typeface="Cambria Math" panose="02040503050406030204" pitchFamily="18" charset="0"/>
+                            </a:rPr>
+                            <m:t>𝜙</m:t>
+                          </m:r>
+                        </m:e>
+                      </m:func>
+                      <m:r>
+                        <a:rPr lang="en-US" b="0" i="1" smtClean="0">
+                          <a:latin typeface="Cambria Math" panose="02040503050406030204" pitchFamily="18" charset="0"/>
+                        </a:rPr>
+                        <m:t>−</m:t>
+                      </m:r>
+                      <m:r>
+                        <a:rPr lang="en-US" b="0" i="1" smtClean="0">
+                          <a:latin typeface="Cambria Math" panose="02040503050406030204" pitchFamily="18" charset="0"/>
+                        </a:rPr>
+                        <m:t>𝑟</m:t>
+                      </m:r>
+                      <m:func>
+                        <m:funcPr>
+                          <m:ctrlPr>
+                            <a:rPr lang="en-US" b="0" i="1" smtClean="0">
+                              <a:latin typeface="Cambria Math" panose="02040503050406030204" pitchFamily="18" charset="0"/>
+                            </a:rPr>
+                          </m:ctrlPr>
+                        </m:funcPr>
+                        <m:fName>
+                          <m:r>
+                            <m:rPr>
+                              <m:sty m:val="p"/>
+                            </m:rPr>
+                            <a:rPr lang="en-US" b="0" i="0" smtClean="0">
+                              <a:latin typeface="Cambria Math" panose="02040503050406030204" pitchFamily="18" charset="0"/>
+                            </a:rPr>
+                            <m:t>sin</m:t>
+                          </m:r>
+                        </m:fName>
+                        <m:e>
+                          <m:r>
+                            <a:rPr lang="en-US" b="0" i="1" smtClean="0">
+                              <a:latin typeface="Cambria Math" panose="02040503050406030204" pitchFamily="18" charset="0"/>
+                              <a:ea typeface="Cambria Math" panose="02040503050406030204" pitchFamily="18" charset="0"/>
+                            </a:rPr>
+                            <m:t>𝜙</m:t>
+                          </m:r>
+                        </m:e>
+                      </m:func>
+                    </m:oMath>
+                  </m:oMathPara>
+                </a14:m>
+                <a:endParaRPr lang="en-US" b="0" dirty="0"/>
+              </a:p>
+              <a:p>
+                <a:pPr marL="0" indent="0">
+                  <a:buNone/>
+                </a:pPr>
+                <a:endParaRPr lang="en-US" sz="1200" b="0" dirty="0"/>
+              </a:p>
+              <a:p>
+                <a:pPr marL="0" indent="0">
+                  <a:buNone/>
+                </a:pPr>
+                <a14:m>
+                  <m:oMathPara xmlns:m="http://schemas.openxmlformats.org/officeDocument/2006/math">
+                    <m:oMathParaPr>
+                      <m:jc m:val="centerGroup"/>
+                    </m:oMathParaPr>
+                    <m:oMath xmlns:m="http://schemas.openxmlformats.org/officeDocument/2006/math">
+                      <m:acc>
+                        <m:accPr>
+                          <m:chr m:val="̇"/>
+                          <m:ctrlPr>
+                            <a:rPr lang="en-US" i="1" smtClean="0">
+                              <a:latin typeface="Cambria Math" panose="02040503050406030204" pitchFamily="18" charset="0"/>
+                            </a:rPr>
+                          </m:ctrlPr>
+                        </m:accPr>
+                        <m:e>
+                          <m:r>
+                            <a:rPr lang="en-US" i="1" smtClean="0">
+                              <a:latin typeface="Cambria Math" panose="02040503050406030204" pitchFamily="18" charset="0"/>
+                              <a:ea typeface="Cambria Math" panose="02040503050406030204" pitchFamily="18" charset="0"/>
+                            </a:rPr>
+                            <m:t>𝜓</m:t>
+                          </m:r>
+                        </m:e>
+                      </m:acc>
+                      <m:r>
+                        <a:rPr lang="en-US" b="0" i="1" smtClean="0">
+                          <a:latin typeface="Cambria Math" panose="02040503050406030204" pitchFamily="18" charset="0"/>
+                        </a:rPr>
+                        <m:t>=</m:t>
+                      </m:r>
+                      <m:r>
+                        <a:rPr lang="en-US" b="0" i="1" smtClean="0">
+                          <a:latin typeface="Cambria Math" panose="02040503050406030204" pitchFamily="18" charset="0"/>
+                        </a:rPr>
+                        <m:t>0</m:t>
+                      </m:r>
+                    </m:oMath>
+                  </m:oMathPara>
+                </a14:m>
+                <a:endParaRPr lang="en-US" dirty="0"/>
+              </a:p>
+              <a:p>
+                <a:pPr marL="0" indent="0">
+                  <a:buNone/>
+                </a:pPr>
+                <a:endParaRPr lang="en-US" sz="1200" dirty="0"/>
+              </a:p>
+              <a:p>
+                <a:pPr marL="0" indent="0">
+                  <a:buNone/>
+                </a:pPr>
+                <a14:m>
+                  <m:oMathPara xmlns:m="http://schemas.openxmlformats.org/officeDocument/2006/math">
+                    <m:oMathParaPr>
+                      <m:jc m:val="centerGroup"/>
+                    </m:oMathParaPr>
+                    <m:oMath xmlns:m="http://schemas.openxmlformats.org/officeDocument/2006/math">
+                      <m:acc>
+                        <m:accPr>
+                          <m:chr m:val="̇"/>
+                          <m:ctrlPr>
+                            <a:rPr lang="en-US" i="1" smtClean="0">
+                              <a:latin typeface="Cambria Math" panose="02040503050406030204" pitchFamily="18" charset="0"/>
+                            </a:rPr>
+                          </m:ctrlPr>
+                        </m:accPr>
+                        <m:e>
+                          <m:r>
+                            <a:rPr lang="en-US" i="1" smtClean="0">
+                              <a:latin typeface="Cambria Math" panose="02040503050406030204" pitchFamily="18" charset="0"/>
+                              <a:ea typeface="Cambria Math" panose="02040503050406030204" pitchFamily="18" charset="0"/>
+                            </a:rPr>
+                            <m:t>𝜙</m:t>
+                          </m:r>
+                        </m:e>
+                      </m:acc>
+                      <m:r>
+                        <a:rPr lang="en-US" b="0" i="1" smtClean="0">
+                          <a:latin typeface="Cambria Math" panose="02040503050406030204" pitchFamily="18" charset="0"/>
+                        </a:rPr>
+                        <m:t>=</m:t>
+                      </m:r>
+                      <m:r>
+                        <a:rPr lang="en-US" b="0" i="1" smtClean="0">
+                          <a:latin typeface="Cambria Math" panose="02040503050406030204" pitchFamily="18" charset="0"/>
+                        </a:rPr>
+                        <m:t>𝑝</m:t>
+                      </m:r>
+                      <m:r>
+                        <a:rPr lang="en-US" b="0" i="1" smtClean="0">
+                          <a:latin typeface="Cambria Math" panose="02040503050406030204" pitchFamily="18" charset="0"/>
+                        </a:rPr>
+                        <m:t>+</m:t>
+                      </m:r>
+                      <m:r>
+                        <a:rPr lang="en-US" b="0" i="1" smtClean="0">
+                          <a:latin typeface="Cambria Math" panose="02040503050406030204" pitchFamily="18" charset="0"/>
+                        </a:rPr>
+                        <m:t>𝑟</m:t>
+                      </m:r>
+                    </m:oMath>
+                  </m:oMathPara>
+                </a14:m>
+                <a:endParaRPr lang="en-US" dirty="0"/>
+              </a:p>
+            </p:txBody>
+          </p:sp>
+        </mc:Choice>
+        <mc:Fallback>
+          <p:sp>
+            <p:nvSpPr>
+              <p:cNvPr id="3" name="Content Placeholder 2">
+                <a:extLst>
+                  <a:ext uri="{FF2B5EF4-FFF2-40B4-BE49-F238E27FC236}">
+                    <a16:creationId xmlns:a16="http://schemas.microsoft.com/office/drawing/2014/main" id="{508FA53A-081E-A0C9-2591-B7787F5C3B69}"/>
+                  </a:ext>
+                </a:extLst>
+              </p:cNvPr>
+              <p:cNvSpPr>
+                <a:spLocks noGrp="1" noRot="1" noChangeAspect="1" noMove="1" noResize="1" noEditPoints="1" noAdjustHandles="1" noChangeArrowheads="1" noChangeShapeType="1" noTextEdit="1"/>
+              </p:cNvSpPr>
+              <p:nvPr>
+                <p:ph idx="1"/>
+              </p:nvPr>
+            </p:nvSpPr>
+            <p:spPr>
+              <a:xfrm>
+                <a:off x="441036" y="1262207"/>
+                <a:ext cx="6001882" cy="4351338"/>
+              </a:xfrm>
+              <a:blipFill>
+                <a:blip r:embed="rId2"/>
+                <a:stretch>
+                  <a:fillRect t="-1541"/>
+                </a:stretch>
+              </a:blipFill>
+            </p:spPr>
+            <p:txBody>
+              <a:bodyPr/>
+              <a:lstStyle/>
+              <a:p>
+                <a:r>
+                  <a:rPr lang="en-US">
+                    <a:noFill/>
+                  </a:rPr>
+                  <a:t> </a:t>
+                </a:r>
+              </a:p>
+            </p:txBody>
+          </p:sp>
+        </mc:Fallback>
+      </mc:AlternateContent>
+      <mc:AlternateContent xmlns:mc="http://schemas.openxmlformats.org/markup-compatibility/2006">
+        <mc:Choice xmlns:a14="http://schemas.microsoft.com/office/drawing/2010/main" Requires="a14">
+          <p:sp>
+            <p:nvSpPr>
+              <p:cNvPr id="8" name="TextBox 7">
+                <a:extLst>
+                  <a:ext uri="{FF2B5EF4-FFF2-40B4-BE49-F238E27FC236}">
+                    <a16:creationId xmlns:a16="http://schemas.microsoft.com/office/drawing/2014/main" id="{5D2BED82-259D-A054-9688-F10B85B7612E}"/>
+                  </a:ext>
+                </a:extLst>
+              </p:cNvPr>
+              <p:cNvSpPr txBox="1"/>
+              <p:nvPr/>
+            </p:nvSpPr>
+            <p:spPr>
+              <a:xfrm>
+                <a:off x="8238836" y="440171"/>
+                <a:ext cx="3389746" cy="2031325"/>
+              </a:xfrm>
+              <a:prstGeom prst="rect">
+                <a:avLst/>
+              </a:prstGeom>
+              <a:noFill/>
+            </p:spPr>
+            <p:txBody>
+              <a:bodyPr wrap="square" rtlCol="0">
+                <a:spAutoFit/>
+              </a:bodyPr>
+              <a:lstStyle/>
+              <a:p>
+                <a14:m>
+                  <m:oMath xmlns:m="http://schemas.openxmlformats.org/officeDocument/2006/math">
+                    <m:r>
+                      <a:rPr lang="en-US" i="1">
+                        <a:latin typeface="Cambria Math" panose="02040503050406030204" pitchFamily="18" charset="0"/>
+                        <a:ea typeface="Cambria Math" panose="02040503050406030204" pitchFamily="18" charset="0"/>
+                      </a:rPr>
+                      <m:t>𝜙</m:t>
+                    </m:r>
+                  </m:oMath>
+                </a14:m>
+                <a:r>
+                  <a:rPr lang="en-US" dirty="0"/>
+                  <a:t>  roll</a:t>
+                </a:r>
+              </a:p>
+              <a:p>
+                <a14:m>
+                  <m:oMath xmlns:m="http://schemas.openxmlformats.org/officeDocument/2006/math">
+                    <m:r>
+                      <a:rPr lang="en-US" i="1" smtClean="0">
+                        <a:latin typeface="Cambria Math" panose="02040503050406030204" pitchFamily="18" charset="0"/>
+                        <a:ea typeface="Cambria Math" panose="02040503050406030204" pitchFamily="18" charset="0"/>
+                      </a:rPr>
+                      <m:t>𝜃</m:t>
+                    </m:r>
+                  </m:oMath>
+                </a14:m>
+                <a:r>
+                  <a:rPr lang="en-US" dirty="0">
+                    <a:ea typeface="Cambria Math" panose="02040503050406030204" pitchFamily="18" charset="0"/>
+                  </a:rPr>
+                  <a:t>  pitch</a:t>
+                </a:r>
+              </a:p>
+              <a:p>
+                <a14:m>
+                  <m:oMath xmlns:m="http://schemas.openxmlformats.org/officeDocument/2006/math">
+                    <m:r>
+                      <a:rPr lang="en-US" i="1">
+                        <a:latin typeface="Cambria Math" panose="02040503050406030204" pitchFamily="18" charset="0"/>
+                        <a:ea typeface="Cambria Math" panose="02040503050406030204" pitchFamily="18" charset="0"/>
+                      </a:rPr>
+                      <m:t>𝜓</m:t>
+                    </m:r>
+                  </m:oMath>
+                </a14:m>
+                <a:r>
+                  <a:rPr lang="en-US" dirty="0">
+                    <a:ea typeface="Cambria Math" panose="02040503050406030204" pitchFamily="18" charset="0"/>
+                  </a:rPr>
+                  <a:t>  yaw</a:t>
+                </a:r>
+              </a:p>
+              <a:p>
+                <a:endParaRPr lang="en-US" dirty="0"/>
+              </a:p>
+              <a:p>
+                <a14:m>
+                  <m:oMath xmlns:m="http://schemas.openxmlformats.org/officeDocument/2006/math">
+                    <m:r>
+                      <a:rPr lang="en-US" b="0" i="1" smtClean="0">
+                        <a:latin typeface="Cambria Math" panose="02040503050406030204" pitchFamily="18" charset="0"/>
+                      </a:rPr>
+                      <m:t>𝑝</m:t>
+                    </m:r>
+                  </m:oMath>
+                </a14:m>
+                <a:r>
+                  <a:rPr lang="en-US" b="0" dirty="0"/>
+                  <a:t>  body axis roll rate</a:t>
+                </a:r>
+              </a:p>
+              <a:p>
+                <a14:m>
+                  <m:oMath xmlns:m="http://schemas.openxmlformats.org/officeDocument/2006/math">
+                    <m:r>
+                      <a:rPr lang="en-US" b="0" i="1" smtClean="0">
+                        <a:latin typeface="Cambria Math" panose="02040503050406030204" pitchFamily="18" charset="0"/>
+                      </a:rPr>
+                      <m:t>𝑞</m:t>
+                    </m:r>
+                  </m:oMath>
+                </a14:m>
+                <a:r>
+                  <a:rPr lang="en-US" b="0" dirty="0"/>
+                  <a:t>  body axis pitch rate</a:t>
+                </a:r>
+              </a:p>
+              <a:p>
+                <a14:m>
+                  <m:oMath xmlns:m="http://schemas.openxmlformats.org/officeDocument/2006/math">
+                    <m:r>
+                      <a:rPr lang="en-US" b="0" i="1" smtClean="0">
+                        <a:latin typeface="Cambria Math" panose="02040503050406030204" pitchFamily="18" charset="0"/>
+                      </a:rPr>
+                      <m:t>𝑟</m:t>
+                    </m:r>
+                  </m:oMath>
+                </a14:m>
+                <a:r>
+                  <a:rPr lang="en-US" dirty="0"/>
+                  <a:t>  body axis yaw rate</a:t>
+                </a:r>
+              </a:p>
+            </p:txBody>
+          </p:sp>
+        </mc:Choice>
+        <mc:Fallback>
+          <p:sp>
+            <p:nvSpPr>
+              <p:cNvPr id="8" name="TextBox 7">
+                <a:extLst>
+                  <a:ext uri="{FF2B5EF4-FFF2-40B4-BE49-F238E27FC236}">
+                    <a16:creationId xmlns:a16="http://schemas.microsoft.com/office/drawing/2014/main" id="{5D2BED82-259D-A054-9688-F10B85B7612E}"/>
+                  </a:ext>
+                </a:extLst>
+              </p:cNvPr>
+              <p:cNvSpPr txBox="1">
+                <a:spLocks noRot="1" noChangeAspect="1" noMove="1" noResize="1" noEditPoints="1" noAdjustHandles="1" noChangeArrowheads="1" noChangeShapeType="1" noTextEdit="1"/>
+              </p:cNvSpPr>
+              <p:nvPr/>
+            </p:nvSpPr>
+            <p:spPr>
+              <a:xfrm>
+                <a:off x="8238836" y="440171"/>
+                <a:ext cx="3389746" cy="2031325"/>
+              </a:xfrm>
+              <a:prstGeom prst="rect">
+                <a:avLst/>
+              </a:prstGeom>
+              <a:blipFill>
+                <a:blip r:embed="rId3"/>
+                <a:stretch>
+                  <a:fillRect l="-540" t="-1201" b="-4204"/>
+                </a:stretch>
+              </a:blipFill>
+            </p:spPr>
+            <p:txBody>
+              <a:bodyPr/>
+              <a:lstStyle/>
+              <a:p>
+                <a:r>
+                  <a:rPr lang="en-US">
+                    <a:noFill/>
+                  </a:rPr>
+                  <a:t> </a:t>
+                </a:r>
+              </a:p>
+            </p:txBody>
+          </p:sp>
+        </mc:Fallback>
+      </mc:AlternateContent>
+      <mc:AlternateContent xmlns:mc="http://schemas.openxmlformats.org/markup-compatibility/2006">
+        <mc:Choice xmlns:a14="http://schemas.microsoft.com/office/drawing/2010/main" Requires="a14">
+          <p:sp>
+            <p:nvSpPr>
+              <p:cNvPr id="9" name="TextBox 8">
+                <a:extLst>
+                  <a:ext uri="{FF2B5EF4-FFF2-40B4-BE49-F238E27FC236}">
+                    <a16:creationId xmlns:a16="http://schemas.microsoft.com/office/drawing/2014/main" id="{FC6BBA43-E2D3-4C41-1957-FAE81B8A5263}"/>
+                  </a:ext>
+                </a:extLst>
+              </p:cNvPr>
+              <p:cNvSpPr txBox="1"/>
+              <p:nvPr/>
+            </p:nvSpPr>
+            <p:spPr>
+              <a:xfrm>
+                <a:off x="662985" y="4604558"/>
+                <a:ext cx="7091127" cy="954107"/>
+              </a:xfrm>
+              <a:prstGeom prst="rect">
+                <a:avLst/>
+              </a:prstGeom>
+              <a:noFill/>
+            </p:spPr>
+            <p:txBody>
+              <a:bodyPr wrap="square" rtlCol="0">
+                <a:spAutoFit/>
+              </a:bodyPr>
+              <a:lstStyle/>
+              <a:p>
+                <a:r>
+                  <a:rPr lang="en-US" sz="2800" dirty="0"/>
+                  <a:t>At the poles, </a:t>
+                </a:r>
+                <a14:m>
+                  <m:oMath xmlns:m="http://schemas.openxmlformats.org/officeDocument/2006/math">
+                    <m:r>
+                      <a:rPr lang="en-US" sz="2800" i="1" smtClean="0">
+                        <a:latin typeface="Cambria Math" panose="02040503050406030204" pitchFamily="18" charset="0"/>
+                        <a:ea typeface="Cambria Math" panose="02040503050406030204" pitchFamily="18" charset="0"/>
+                      </a:rPr>
+                      <m:t>𝜙</m:t>
+                    </m:r>
+                  </m:oMath>
+                </a14:m>
+                <a:r>
+                  <a:rPr lang="en-US" sz="2800" dirty="0"/>
+                  <a:t> and </a:t>
+                </a:r>
+                <a14:m>
+                  <m:oMath xmlns:m="http://schemas.openxmlformats.org/officeDocument/2006/math">
+                    <m:r>
+                      <a:rPr lang="en-US" sz="2800" i="1" smtClean="0">
+                        <a:latin typeface="Cambria Math" panose="02040503050406030204" pitchFamily="18" charset="0"/>
+                        <a:ea typeface="Cambria Math" panose="02040503050406030204" pitchFamily="18" charset="0"/>
+                      </a:rPr>
+                      <m:t>𝜓</m:t>
+                    </m:r>
+                  </m:oMath>
+                </a14:m>
+                <a:r>
+                  <a:rPr lang="en-US" sz="2800" dirty="0"/>
+                  <a:t> are interchangeable.</a:t>
+                </a:r>
+                <a:br>
+                  <a:rPr lang="en-US" sz="2800" dirty="0"/>
+                </a:br>
+                <a:r>
+                  <a:rPr lang="en-US" sz="2800" dirty="0"/>
+                  <a:t>Any combination of </a:t>
+                </a:r>
+                <a14:m>
+                  <m:oMath xmlns:m="http://schemas.openxmlformats.org/officeDocument/2006/math">
+                    <m:r>
+                      <a:rPr lang="en-US" sz="2800" i="1" smtClean="0">
+                        <a:latin typeface="Cambria Math" panose="02040503050406030204" pitchFamily="18" charset="0"/>
+                        <a:ea typeface="Cambria Math" panose="02040503050406030204" pitchFamily="18" charset="0"/>
+                      </a:rPr>
+                      <m:t>𝜙</m:t>
+                    </m:r>
+                    <m:r>
+                      <a:rPr lang="en-US" sz="2800" b="0" i="1" smtClean="0">
+                        <a:latin typeface="Cambria Math" panose="02040503050406030204" pitchFamily="18" charset="0"/>
+                        <a:ea typeface="Cambria Math" panose="02040503050406030204" pitchFamily="18" charset="0"/>
+                      </a:rPr>
+                      <m:t>+</m:t>
+                    </m:r>
+                    <m:r>
+                      <a:rPr lang="en-US" sz="2800" b="0" i="1" smtClean="0">
+                        <a:latin typeface="Cambria Math" panose="02040503050406030204" pitchFamily="18" charset="0"/>
+                        <a:ea typeface="Cambria Math" panose="02040503050406030204" pitchFamily="18" charset="0"/>
+                      </a:rPr>
+                      <m:t>𝜓</m:t>
+                    </m:r>
+                  </m:oMath>
+                </a14:m>
+                <a:r>
+                  <a:rPr lang="en-US" sz="2800" dirty="0"/>
+                  <a:t> are equally valid.</a:t>
+                </a:r>
+              </a:p>
+            </p:txBody>
+          </p:sp>
+        </mc:Choice>
+        <mc:Fallback>
+          <p:sp>
+            <p:nvSpPr>
+              <p:cNvPr id="9" name="TextBox 8">
+                <a:extLst>
+                  <a:ext uri="{FF2B5EF4-FFF2-40B4-BE49-F238E27FC236}">
+                    <a16:creationId xmlns:a16="http://schemas.microsoft.com/office/drawing/2014/main" id="{FC6BBA43-E2D3-4C41-1957-FAE81B8A5263}"/>
+                  </a:ext>
+                </a:extLst>
+              </p:cNvPr>
+              <p:cNvSpPr txBox="1">
+                <a:spLocks noRot="1" noChangeAspect="1" noMove="1" noResize="1" noEditPoints="1" noAdjustHandles="1" noChangeArrowheads="1" noChangeShapeType="1" noTextEdit="1"/>
+              </p:cNvSpPr>
+              <p:nvPr/>
+            </p:nvSpPr>
+            <p:spPr>
+              <a:xfrm>
+                <a:off x="662985" y="4604558"/>
+                <a:ext cx="7091127" cy="954107"/>
+              </a:xfrm>
+              <a:prstGeom prst="rect">
+                <a:avLst/>
+              </a:prstGeom>
+              <a:blipFill>
+                <a:blip r:embed="rId4"/>
+                <a:stretch>
+                  <a:fillRect l="-1806" t="-6369" b="-16561"/>
+                </a:stretch>
+              </a:blipFill>
+            </p:spPr>
+            <p:txBody>
+              <a:bodyPr/>
+              <a:lstStyle/>
+              <a:p>
+                <a:r>
+                  <a:rPr lang="en-US">
+                    <a:noFill/>
+                  </a:rPr>
+                  <a:t> </a:t>
+                </a:r>
+              </a:p>
+            </p:txBody>
+          </p:sp>
+        </mc:Fallback>
+      </mc:AlternateContent>
+      <p:pic>
+        <p:nvPicPr>
+          <p:cNvPr id="12" name="Picture 11">
+            <a:extLst>
+              <a:ext uri="{FF2B5EF4-FFF2-40B4-BE49-F238E27FC236}">
+                <a16:creationId xmlns:a16="http://schemas.microsoft.com/office/drawing/2014/main" id="{549AD5A2-466F-4F37-1F9F-AC0396DCD0B7}"/>
+              </a:ext>
+            </a:extLst>
+          </p:cNvPr>
+          <p:cNvPicPr>
+            <a:picLocks noChangeAspect="1"/>
+          </p:cNvPicPr>
+          <p:nvPr/>
+        </p:nvPicPr>
+        <p:blipFill>
+          <a:blip r:embed="rId5"/>
+          <a:stretch>
+            <a:fillRect/>
+          </a:stretch>
+        </p:blipFill>
+        <p:spPr>
+          <a:xfrm>
+            <a:off x="8039099" y="2615840"/>
+            <a:ext cx="3789219" cy="3959859"/>
+          </a:xfrm>
+          <a:prstGeom prst="rect">
+            <a:avLst/>
+          </a:prstGeom>
+        </p:spPr>
+      </p:pic>
+      <p:sp>
+        <p:nvSpPr>
+          <p:cNvPr id="13" name="TextBox 12">
+            <a:extLst>
+              <a:ext uri="{FF2B5EF4-FFF2-40B4-BE49-F238E27FC236}">
+                <a16:creationId xmlns:a16="http://schemas.microsoft.com/office/drawing/2014/main" id="{4EA90B91-9704-9F3A-E3FC-05C3400E5443}"/>
+              </a:ext>
+            </a:extLst>
+          </p:cNvPr>
+          <p:cNvSpPr txBox="1"/>
+          <p:nvPr/>
+        </p:nvSpPr>
+        <p:spPr>
+          <a:xfrm>
+            <a:off x="756550" y="264218"/>
+            <a:ext cx="5821864" cy="707886"/>
+          </a:xfrm>
+          <a:prstGeom prst="rect">
+            <a:avLst/>
+          </a:prstGeom>
+          <a:noFill/>
+        </p:spPr>
+        <p:txBody>
+          <a:bodyPr wrap="square" rtlCol="0">
+            <a:spAutoFit/>
+          </a:bodyPr>
+          <a:lstStyle/>
+          <a:p>
+            <a:pPr algn="ctr"/>
+            <a:r>
+              <a:rPr lang="en-US" sz="4000" dirty="0"/>
+              <a:t>Gimbal Lock</a:t>
+            </a:r>
+          </a:p>
+        </p:txBody>
+      </p:sp>
+      <mc:AlternateContent xmlns:mc="http://schemas.openxmlformats.org/markup-compatibility/2006">
+        <mc:Choice xmlns:a14="http://schemas.microsoft.com/office/drawing/2010/main" Requires="a14">
+          <p:sp>
+            <p:nvSpPr>
+              <p:cNvPr id="2" name="Content Placeholder 2">
+                <a:extLst>
+                  <a:ext uri="{FF2B5EF4-FFF2-40B4-BE49-F238E27FC236}">
+                    <a16:creationId xmlns:a16="http://schemas.microsoft.com/office/drawing/2014/main" id="{099C660B-877D-C133-0D0C-F6DB828B4FAD}"/>
+                  </a:ext>
+                </a:extLst>
+              </p:cNvPr>
+              <p:cNvSpPr txBox="1">
+                <a:spLocks/>
+              </p:cNvSpPr>
+              <p:nvPr/>
+            </p:nvSpPr>
+            <p:spPr>
+              <a:xfrm>
+                <a:off x="441036" y="1262207"/>
+                <a:ext cx="6001882" cy="4351338"/>
+              </a:xfrm>
+              <a:prstGeom prst="rect">
+                <a:avLst/>
+              </a:prstGeom>
+            </p:spPr>
+            <p:txBody>
+              <a:bodyPr vert="horz" lIns="91440" tIns="45720" rIns="91440" bIns="45720" rtlCol="0">
+                <a:normAutofit/>
+              </a:bodyPr>
+              <a:lstStyle>
+                <a:lvl1pPr marL="228600" indent="-228600" algn="l" defTabSz="914400" rtl="0" eaLnBrk="1" latinLnBrk="0" hangingPunct="1">
+                  <a:lnSpc>
+                    <a:spcPct val="90000"/>
+                  </a:lnSpc>
+                  <a:spcBef>
+                    <a:spcPts val="1000"/>
+                  </a:spcBef>
+                  <a:buFont typeface="Arial" panose="020B0604020202020204" pitchFamily="34" charset="0"/>
+                  <a:buChar char="•"/>
+                  <a:defRPr sz="2800" kern="1200">
+                    <a:solidFill>
+                      <a:schemeClr val="tx1"/>
+                    </a:solidFill>
+                    <a:latin typeface="+mn-lt"/>
+                    <a:ea typeface="+mn-ea"/>
+                    <a:cs typeface="+mn-cs"/>
+                  </a:defRPr>
+                </a:lvl1pPr>
+                <a:lvl2pPr marL="685800" indent="-228600" algn="l" defTabSz="914400" rtl="0" eaLnBrk="1" latinLnBrk="0" hangingPunct="1">
+                  <a:lnSpc>
+                    <a:spcPct val="90000"/>
+                  </a:lnSpc>
+                  <a:spcBef>
+                    <a:spcPts val="500"/>
+                  </a:spcBef>
+                  <a:buFont typeface="Arial" panose="020B0604020202020204" pitchFamily="34" charset="0"/>
+                  <a:buChar char="•"/>
+                  <a:defRPr sz="2400" kern="1200">
+                    <a:solidFill>
+                      <a:schemeClr val="tx1"/>
+                    </a:solidFill>
+                    <a:latin typeface="+mn-lt"/>
+                    <a:ea typeface="+mn-ea"/>
+                    <a:cs typeface="+mn-cs"/>
+                  </a:defRPr>
+                </a:lvl2pPr>
+                <a:lvl3pPr marL="1143000" indent="-228600" algn="l" defTabSz="914400" rtl="0" eaLnBrk="1" latinLnBrk="0" hangingPunct="1">
+                  <a:lnSpc>
+                    <a:spcPct val="90000"/>
+                  </a:lnSpc>
+                  <a:spcBef>
+                    <a:spcPts val="500"/>
+                  </a:spcBef>
+                  <a:buFont typeface="Arial" panose="020B0604020202020204" pitchFamily="34" charset="0"/>
+                  <a:buChar char="•"/>
+                  <a:defRPr sz="2000" kern="1200">
+                    <a:solidFill>
+                      <a:schemeClr val="tx1"/>
+                    </a:solidFill>
+                    <a:latin typeface="+mn-lt"/>
+                    <a:ea typeface="+mn-ea"/>
+                    <a:cs typeface="+mn-cs"/>
+                  </a:defRPr>
+                </a:lvl3pPr>
+                <a:lvl4pPr marL="1600200" indent="-228600" algn="l" defTabSz="914400" rtl="0" eaLnBrk="1" latinLnBrk="0" hangingPunct="1">
+                  <a:lnSpc>
+                    <a:spcPct val="90000"/>
+                  </a:lnSpc>
+                  <a:spcBef>
+                    <a:spcPts val="500"/>
+                  </a:spcBef>
+                  <a:buFont typeface="Arial" panose="020B0604020202020204" pitchFamily="34" charset="0"/>
+                  <a:buChar char="•"/>
+                  <a:defRPr sz="1800" kern="1200">
+                    <a:solidFill>
+                      <a:schemeClr val="tx1"/>
+                    </a:solidFill>
+                    <a:latin typeface="+mn-lt"/>
+                    <a:ea typeface="+mn-ea"/>
+                    <a:cs typeface="+mn-cs"/>
+                  </a:defRPr>
+                </a:lvl4pPr>
+                <a:lvl5pPr marL="2057400" indent="-228600" algn="l" defTabSz="914400" rtl="0" eaLnBrk="1" latinLnBrk="0" hangingPunct="1">
+                  <a:lnSpc>
+                    <a:spcPct val="90000"/>
+                  </a:lnSpc>
+                  <a:spcBef>
+                    <a:spcPts val="500"/>
+                  </a:spcBef>
+                  <a:buFont typeface="Arial" panose="020B0604020202020204" pitchFamily="34" charset="0"/>
+                  <a:buChar char="•"/>
+                  <a:defRPr sz="1800" kern="1200">
+                    <a:solidFill>
+                      <a:schemeClr val="tx1"/>
+                    </a:solidFill>
+                    <a:latin typeface="+mn-lt"/>
+                    <a:ea typeface="+mn-ea"/>
+                    <a:cs typeface="+mn-cs"/>
+                  </a:defRPr>
+                </a:lvl5pPr>
+                <a:lvl6pPr marL="2514600" indent="-228600" algn="l" defTabSz="914400" rtl="0" eaLnBrk="1" latinLnBrk="0" hangingPunct="1">
+                  <a:lnSpc>
+                    <a:spcPct val="90000"/>
+                  </a:lnSpc>
+                  <a:spcBef>
+                    <a:spcPts val="500"/>
+                  </a:spcBef>
+                  <a:buFont typeface="Arial" panose="020B0604020202020204" pitchFamily="34" charset="0"/>
+                  <a:buChar char="•"/>
+                  <a:defRPr sz="1800" kern="1200">
+                    <a:solidFill>
+                      <a:schemeClr val="tx1"/>
+                    </a:solidFill>
+                    <a:latin typeface="+mn-lt"/>
+                    <a:ea typeface="+mn-ea"/>
+                    <a:cs typeface="+mn-cs"/>
+                  </a:defRPr>
+                </a:lvl6pPr>
+                <a:lvl7pPr marL="2971800" indent="-228600" algn="l" defTabSz="914400" rtl="0" eaLnBrk="1" latinLnBrk="0" hangingPunct="1">
+                  <a:lnSpc>
+                    <a:spcPct val="90000"/>
+                  </a:lnSpc>
+                  <a:spcBef>
+                    <a:spcPts val="500"/>
+                  </a:spcBef>
+                  <a:buFont typeface="Arial" panose="020B0604020202020204" pitchFamily="34" charset="0"/>
+                  <a:buChar char="•"/>
+                  <a:defRPr sz="1800" kern="1200">
+                    <a:solidFill>
+                      <a:schemeClr val="tx1"/>
+                    </a:solidFill>
+                    <a:latin typeface="+mn-lt"/>
+                    <a:ea typeface="+mn-ea"/>
+                    <a:cs typeface="+mn-cs"/>
+                  </a:defRPr>
+                </a:lvl7pPr>
+                <a:lvl8pPr marL="3429000" indent="-228600" algn="l" defTabSz="914400" rtl="0" eaLnBrk="1" latinLnBrk="0" hangingPunct="1">
+                  <a:lnSpc>
+                    <a:spcPct val="90000"/>
+                  </a:lnSpc>
+                  <a:spcBef>
+                    <a:spcPts val="500"/>
+                  </a:spcBef>
+                  <a:buFont typeface="Arial" panose="020B0604020202020204" pitchFamily="34" charset="0"/>
+                  <a:buChar char="•"/>
+                  <a:defRPr sz="1800" kern="1200">
+                    <a:solidFill>
+                      <a:schemeClr val="tx1"/>
+                    </a:solidFill>
+                    <a:latin typeface="+mn-lt"/>
+                    <a:ea typeface="+mn-ea"/>
+                    <a:cs typeface="+mn-cs"/>
+                  </a:defRPr>
+                </a:lvl8pPr>
+                <a:lvl9pPr marL="3886200" indent="-228600" algn="l" defTabSz="914400" rtl="0" eaLnBrk="1" latinLnBrk="0" hangingPunct="1">
+                  <a:lnSpc>
+                    <a:spcPct val="90000"/>
+                  </a:lnSpc>
+                  <a:spcBef>
+                    <a:spcPts val="500"/>
+                  </a:spcBef>
+                  <a:buFont typeface="Arial" panose="020B0604020202020204" pitchFamily="34" charset="0"/>
+                  <a:buChar char="•"/>
+                  <a:defRPr sz="1800" kern="1200">
+                    <a:solidFill>
+                      <a:schemeClr val="tx1"/>
+                    </a:solidFill>
+                    <a:latin typeface="+mn-lt"/>
+                    <a:ea typeface="+mn-ea"/>
+                    <a:cs typeface="+mn-cs"/>
+                  </a:defRPr>
+                </a:lvl9pPr>
+              </a:lstStyle>
+              <a:p>
+                <a:pPr marL="0" indent="0">
+                  <a:buFont typeface="Arial" panose="020B0604020202020204" pitchFamily="34" charset="0"/>
+                  <a:buNone/>
+                </a:pPr>
+                <a14:m>
+                  <m:oMathPara xmlns:m="http://schemas.openxmlformats.org/officeDocument/2006/math">
+                    <m:oMathParaPr>
+                      <m:jc m:val="centerGroup"/>
+                    </m:oMathParaPr>
+                    <m:oMath xmlns:m="http://schemas.openxmlformats.org/officeDocument/2006/math">
+                      <m:acc>
+                        <m:accPr>
+                          <m:chr m:val="̇"/>
+                          <m:ctrlPr>
+                            <a:rPr lang="en-US" i="1" smtClean="0">
+                              <a:latin typeface="Cambria Math" panose="02040503050406030204" pitchFamily="18" charset="0"/>
+                            </a:rPr>
+                          </m:ctrlPr>
+                        </m:accPr>
+                        <m:e>
+                          <m:r>
+                            <a:rPr lang="en-US" i="1" smtClean="0">
+                              <a:latin typeface="Cambria Math" panose="02040503050406030204" pitchFamily="18" charset="0"/>
+                              <a:ea typeface="Cambria Math" panose="02040503050406030204" pitchFamily="18" charset="0"/>
+                            </a:rPr>
+                            <m:t>𝜃</m:t>
+                          </m:r>
+                        </m:e>
+                      </m:acc>
+                      <m:r>
+                        <a:rPr lang="en-US" i="1" smtClean="0">
+                          <a:latin typeface="Cambria Math" panose="02040503050406030204" pitchFamily="18" charset="0"/>
+                        </a:rPr>
+                        <m:t>=</m:t>
+                      </m:r>
+                      <m:r>
+                        <a:rPr lang="en-US" i="1" smtClean="0">
+                          <a:latin typeface="Cambria Math" panose="02040503050406030204" pitchFamily="18" charset="0"/>
+                        </a:rPr>
+                        <m:t>𝑞</m:t>
+                      </m:r>
+                      <m:func>
+                        <m:funcPr>
+                          <m:ctrlPr>
+                            <a:rPr lang="en-US" i="1" smtClean="0">
+                              <a:latin typeface="Cambria Math" panose="02040503050406030204" pitchFamily="18" charset="0"/>
+                            </a:rPr>
+                          </m:ctrlPr>
+                        </m:funcPr>
+                        <m:fName>
+                          <m:r>
+                            <m:rPr>
+                              <m:sty m:val="p"/>
+                            </m:rPr>
+                            <a:rPr lang="en-US" smtClean="0">
+                              <a:latin typeface="Cambria Math" panose="02040503050406030204" pitchFamily="18" charset="0"/>
+                            </a:rPr>
+                            <m:t>cos</m:t>
+                          </m:r>
+                        </m:fName>
+                        <m:e>
+                          <m:r>
+                            <a:rPr lang="en-US" i="1" smtClean="0">
+                              <a:latin typeface="Cambria Math" panose="02040503050406030204" pitchFamily="18" charset="0"/>
+                              <a:ea typeface="Cambria Math" panose="02040503050406030204" pitchFamily="18" charset="0"/>
+                            </a:rPr>
+                            <m:t>𝜙</m:t>
+                          </m:r>
+                        </m:e>
+                      </m:func>
+                      <m:r>
+                        <a:rPr lang="en-US" i="1" smtClean="0">
+                          <a:latin typeface="Cambria Math" panose="02040503050406030204" pitchFamily="18" charset="0"/>
+                        </a:rPr>
+                        <m:t>−</m:t>
+                      </m:r>
+                      <m:r>
+                        <a:rPr lang="en-US" i="1" smtClean="0">
+                          <a:latin typeface="Cambria Math" panose="02040503050406030204" pitchFamily="18" charset="0"/>
+                        </a:rPr>
+                        <m:t>𝑟</m:t>
+                      </m:r>
+                      <m:func>
+                        <m:funcPr>
+                          <m:ctrlPr>
+                            <a:rPr lang="en-US" i="1" smtClean="0">
+                              <a:latin typeface="Cambria Math" panose="02040503050406030204" pitchFamily="18" charset="0"/>
+                            </a:rPr>
+                          </m:ctrlPr>
+                        </m:funcPr>
+                        <m:fName>
+                          <m:r>
+                            <m:rPr>
+                              <m:sty m:val="p"/>
+                            </m:rPr>
+                            <a:rPr lang="en-US" smtClean="0">
+                              <a:latin typeface="Cambria Math" panose="02040503050406030204" pitchFamily="18" charset="0"/>
+                            </a:rPr>
+                            <m:t>sin</m:t>
+                          </m:r>
+                        </m:fName>
+                        <m:e>
+                          <m:r>
+                            <a:rPr lang="en-US" i="1" smtClean="0">
+                              <a:latin typeface="Cambria Math" panose="02040503050406030204" pitchFamily="18" charset="0"/>
+                              <a:ea typeface="Cambria Math" panose="02040503050406030204" pitchFamily="18" charset="0"/>
+                            </a:rPr>
+                            <m:t>𝜙</m:t>
+                          </m:r>
+                        </m:e>
+                      </m:func>
+                    </m:oMath>
+                  </m:oMathPara>
+                </a14:m>
+                <a:endParaRPr lang="en-US" dirty="0"/>
+              </a:p>
+              <a:p>
+                <a:pPr marL="0" indent="0">
+                  <a:buFont typeface="Arial" panose="020B0604020202020204" pitchFamily="34" charset="0"/>
+                  <a:buNone/>
+                </a:pPr>
+                <a:endParaRPr lang="en-US" sz="1200" dirty="0"/>
+              </a:p>
+              <a:p>
+                <a:pPr marL="0" indent="0">
+                  <a:buFont typeface="Arial" panose="020B0604020202020204" pitchFamily="34" charset="0"/>
+                  <a:buNone/>
+                </a:pPr>
+                <a14:m>
+                  <m:oMathPara xmlns:m="http://schemas.openxmlformats.org/officeDocument/2006/math">
+                    <m:oMathParaPr>
+                      <m:jc m:val="centerGroup"/>
+                    </m:oMathParaPr>
+                    <m:oMath xmlns:m="http://schemas.openxmlformats.org/officeDocument/2006/math">
+                      <m:acc>
+                        <m:accPr>
+                          <m:chr m:val="̇"/>
+                          <m:ctrlPr>
+                            <a:rPr lang="en-US" i="1" smtClean="0">
+                              <a:latin typeface="Cambria Math" panose="02040503050406030204" pitchFamily="18" charset="0"/>
+                            </a:rPr>
+                          </m:ctrlPr>
+                        </m:accPr>
+                        <m:e>
+                          <m:r>
+                            <a:rPr lang="en-US" i="1" smtClean="0">
+                              <a:latin typeface="Cambria Math" panose="02040503050406030204" pitchFamily="18" charset="0"/>
+                              <a:ea typeface="Cambria Math" panose="02040503050406030204" pitchFamily="18" charset="0"/>
+                            </a:rPr>
+                            <m:t>𝜓</m:t>
+                          </m:r>
+                        </m:e>
+                      </m:acc>
+                      <m:r>
+                        <a:rPr lang="en-US" i="1" smtClean="0">
+                          <a:latin typeface="Cambria Math" panose="02040503050406030204" pitchFamily="18" charset="0"/>
+                        </a:rPr>
+                        <m:t>=</m:t>
+                      </m:r>
+                      <m:r>
+                        <a:rPr lang="en-US" i="1" smtClean="0">
+                          <a:latin typeface="Cambria Math" panose="02040503050406030204" pitchFamily="18" charset="0"/>
+                        </a:rPr>
+                        <m:t>𝑞</m:t>
+                      </m:r>
+                      <m:f>
+                        <m:fPr>
+                          <m:ctrlPr>
+                            <a:rPr lang="en-US" i="1" smtClean="0">
+                              <a:latin typeface="Cambria Math" panose="02040503050406030204" pitchFamily="18" charset="0"/>
+                            </a:rPr>
+                          </m:ctrlPr>
+                        </m:fPr>
+                        <m:num>
+                          <m:func>
+                            <m:funcPr>
+                              <m:ctrlPr>
+                                <a:rPr lang="en-US" i="1" smtClean="0">
+                                  <a:latin typeface="Cambria Math" panose="02040503050406030204" pitchFamily="18" charset="0"/>
+                                </a:rPr>
+                              </m:ctrlPr>
+                            </m:funcPr>
+                            <m:fName>
+                              <m:r>
+                                <m:rPr>
+                                  <m:sty m:val="p"/>
+                                </m:rPr>
+                                <a:rPr lang="en-US" smtClean="0">
+                                  <a:latin typeface="Cambria Math" panose="02040503050406030204" pitchFamily="18" charset="0"/>
+                                </a:rPr>
+                                <m:t>sin</m:t>
+                              </m:r>
+                            </m:fName>
+                            <m:e>
+                              <m:r>
+                                <a:rPr lang="en-US" i="1" smtClean="0">
+                                  <a:latin typeface="Cambria Math" panose="02040503050406030204" pitchFamily="18" charset="0"/>
+                                  <a:ea typeface="Cambria Math" panose="02040503050406030204" pitchFamily="18" charset="0"/>
+                                </a:rPr>
+                                <m:t>𝜙</m:t>
+                              </m:r>
+                            </m:e>
+                          </m:func>
+                        </m:num>
+                        <m:den>
+                          <m:func>
+                            <m:funcPr>
+                              <m:ctrlPr>
+                                <a:rPr lang="en-US" i="1" smtClean="0">
+                                  <a:latin typeface="Cambria Math" panose="02040503050406030204" pitchFamily="18" charset="0"/>
+                                </a:rPr>
+                              </m:ctrlPr>
+                            </m:funcPr>
+                            <m:fName>
+                              <m:r>
+                                <m:rPr>
+                                  <m:sty m:val="p"/>
+                                </m:rPr>
+                                <a:rPr lang="en-US" smtClean="0">
+                                  <a:latin typeface="Cambria Math" panose="02040503050406030204" pitchFamily="18" charset="0"/>
+                                </a:rPr>
+                                <m:t>cos</m:t>
+                              </m:r>
+                            </m:fName>
+                            <m:e>
+                              <m:r>
+                                <a:rPr lang="en-US" i="1" smtClean="0">
+                                  <a:latin typeface="Cambria Math" panose="02040503050406030204" pitchFamily="18" charset="0"/>
+                                  <a:ea typeface="Cambria Math" panose="02040503050406030204" pitchFamily="18" charset="0"/>
+                                </a:rPr>
+                                <m:t>𝜃</m:t>
+                              </m:r>
+                            </m:e>
+                          </m:func>
+                        </m:den>
+                      </m:f>
+                      <m:r>
+                        <a:rPr lang="en-US" i="1" smtClean="0">
+                          <a:latin typeface="Cambria Math" panose="02040503050406030204" pitchFamily="18" charset="0"/>
+                        </a:rPr>
+                        <m:t>+</m:t>
+                      </m:r>
+                      <m:r>
+                        <a:rPr lang="en-US" i="1" smtClean="0">
+                          <a:latin typeface="Cambria Math" panose="02040503050406030204" pitchFamily="18" charset="0"/>
+                        </a:rPr>
+                        <m:t>𝑟</m:t>
+                      </m:r>
+                      <m:f>
+                        <m:fPr>
+                          <m:ctrlPr>
+                            <a:rPr lang="en-US" i="1" smtClean="0">
+                              <a:latin typeface="Cambria Math" panose="02040503050406030204" pitchFamily="18" charset="0"/>
+                            </a:rPr>
+                          </m:ctrlPr>
+                        </m:fPr>
+                        <m:num>
+                          <m:func>
+                            <m:funcPr>
+                              <m:ctrlPr>
+                                <a:rPr lang="en-US" i="1" smtClean="0">
+                                  <a:latin typeface="Cambria Math" panose="02040503050406030204" pitchFamily="18" charset="0"/>
+                                </a:rPr>
+                              </m:ctrlPr>
+                            </m:funcPr>
+                            <m:fName>
+                              <m:r>
+                                <m:rPr>
+                                  <m:sty m:val="p"/>
+                                </m:rPr>
+                                <a:rPr lang="en-US" smtClean="0">
+                                  <a:latin typeface="Cambria Math" panose="02040503050406030204" pitchFamily="18" charset="0"/>
+                                </a:rPr>
+                                <m:t>cos</m:t>
+                              </m:r>
+                            </m:fName>
+                            <m:e>
+                              <m:r>
+                                <a:rPr lang="en-US" i="1" smtClean="0">
+                                  <a:latin typeface="Cambria Math" panose="02040503050406030204" pitchFamily="18" charset="0"/>
+                                  <a:ea typeface="Cambria Math" panose="02040503050406030204" pitchFamily="18" charset="0"/>
+                                </a:rPr>
+                                <m:t>𝜙</m:t>
+                              </m:r>
+                            </m:e>
+                          </m:func>
+                        </m:num>
+                        <m:den>
+                          <m:func>
+                            <m:funcPr>
+                              <m:ctrlPr>
+                                <a:rPr lang="en-US" i="1" smtClean="0">
+                                  <a:latin typeface="Cambria Math" panose="02040503050406030204" pitchFamily="18" charset="0"/>
+                                </a:rPr>
+                              </m:ctrlPr>
+                            </m:funcPr>
+                            <m:fName>
+                              <m:r>
+                                <m:rPr>
+                                  <m:sty m:val="p"/>
+                                </m:rPr>
+                                <a:rPr lang="en-US" smtClean="0">
+                                  <a:latin typeface="Cambria Math" panose="02040503050406030204" pitchFamily="18" charset="0"/>
+                                </a:rPr>
+                                <m:t>cos</m:t>
+                              </m:r>
+                            </m:fName>
+                            <m:e>
+                              <m:r>
+                                <a:rPr lang="en-US" i="1" smtClean="0">
+                                  <a:latin typeface="Cambria Math" panose="02040503050406030204" pitchFamily="18" charset="0"/>
+                                  <a:ea typeface="Cambria Math" panose="02040503050406030204" pitchFamily="18" charset="0"/>
+                                </a:rPr>
+                                <m:t>𝜃</m:t>
+                              </m:r>
+                            </m:e>
+                          </m:func>
+                        </m:den>
+                      </m:f>
+                    </m:oMath>
+                  </m:oMathPara>
+                </a14:m>
+                <a:endParaRPr lang="en-US" dirty="0"/>
+              </a:p>
+              <a:p>
+                <a:pPr marL="0" indent="0">
+                  <a:buFont typeface="Arial" panose="020B0604020202020204" pitchFamily="34" charset="0"/>
+                  <a:buNone/>
+                </a:pPr>
+                <a:endParaRPr lang="en-US" sz="1200" dirty="0"/>
+              </a:p>
+              <a:p>
+                <a:pPr marL="0" indent="0">
+                  <a:buFont typeface="Arial" panose="020B0604020202020204" pitchFamily="34" charset="0"/>
+                  <a:buNone/>
+                </a:pPr>
+                <a14:m>
+                  <m:oMathPara xmlns:m="http://schemas.openxmlformats.org/officeDocument/2006/math">
+                    <m:oMathParaPr>
+                      <m:jc m:val="centerGroup"/>
+                    </m:oMathParaPr>
+                    <m:oMath xmlns:m="http://schemas.openxmlformats.org/officeDocument/2006/math">
+                      <m:acc>
+                        <m:accPr>
+                          <m:chr m:val="̇"/>
+                          <m:ctrlPr>
+                            <a:rPr lang="en-US" i="1" smtClean="0">
+                              <a:latin typeface="Cambria Math" panose="02040503050406030204" pitchFamily="18" charset="0"/>
+                            </a:rPr>
+                          </m:ctrlPr>
+                        </m:accPr>
+                        <m:e>
+                          <m:r>
+                            <a:rPr lang="en-US" i="1" smtClean="0">
+                              <a:latin typeface="Cambria Math" panose="02040503050406030204" pitchFamily="18" charset="0"/>
+                              <a:ea typeface="Cambria Math" panose="02040503050406030204" pitchFamily="18" charset="0"/>
+                            </a:rPr>
+                            <m:t>𝜙</m:t>
+                          </m:r>
+                        </m:e>
+                      </m:acc>
+                      <m:r>
+                        <a:rPr lang="en-US" i="1" smtClean="0">
+                          <a:latin typeface="Cambria Math" panose="02040503050406030204" pitchFamily="18" charset="0"/>
+                        </a:rPr>
+                        <m:t>=</m:t>
+                      </m:r>
+                      <m:r>
+                        <a:rPr lang="en-US" i="1" smtClean="0">
+                          <a:latin typeface="Cambria Math" panose="02040503050406030204" pitchFamily="18" charset="0"/>
+                        </a:rPr>
+                        <m:t>𝑝</m:t>
+                      </m:r>
+                      <m:r>
+                        <a:rPr lang="en-US" i="1" smtClean="0">
+                          <a:latin typeface="Cambria Math" panose="02040503050406030204" pitchFamily="18" charset="0"/>
+                        </a:rPr>
+                        <m:t>+</m:t>
+                      </m:r>
+                      <m:r>
+                        <a:rPr lang="en-US" i="1" smtClean="0">
+                          <a:latin typeface="Cambria Math" panose="02040503050406030204" pitchFamily="18" charset="0"/>
+                        </a:rPr>
+                        <m:t>𝑞</m:t>
+                      </m:r>
+                      <m:func>
+                        <m:funcPr>
+                          <m:ctrlPr>
+                            <a:rPr lang="en-US" i="1" smtClean="0">
+                              <a:latin typeface="Cambria Math" panose="02040503050406030204" pitchFamily="18" charset="0"/>
+                            </a:rPr>
+                          </m:ctrlPr>
+                        </m:funcPr>
+                        <m:fName>
+                          <m:r>
+                            <m:rPr>
+                              <m:sty m:val="p"/>
+                            </m:rPr>
+                            <a:rPr lang="en-US" smtClean="0">
+                              <a:latin typeface="Cambria Math" panose="02040503050406030204" pitchFamily="18" charset="0"/>
+                            </a:rPr>
+                            <m:t>sin</m:t>
+                          </m:r>
+                        </m:fName>
+                        <m:e>
+                          <m:r>
+                            <a:rPr lang="en-US" i="1" smtClean="0">
+                              <a:latin typeface="Cambria Math" panose="02040503050406030204" pitchFamily="18" charset="0"/>
+                              <a:ea typeface="Cambria Math" panose="02040503050406030204" pitchFamily="18" charset="0"/>
+                            </a:rPr>
+                            <m:t>𝜙</m:t>
+                          </m:r>
+                        </m:e>
+                      </m:func>
+                      <m:func>
+                        <m:funcPr>
+                          <m:ctrlPr>
+                            <a:rPr lang="en-US" i="1" smtClean="0">
+                              <a:latin typeface="Cambria Math" panose="02040503050406030204" pitchFamily="18" charset="0"/>
+                            </a:rPr>
+                          </m:ctrlPr>
+                        </m:funcPr>
+                        <m:fName>
+                          <m:r>
+                            <m:rPr>
+                              <m:sty m:val="p"/>
+                            </m:rPr>
+                            <a:rPr lang="en-US" smtClean="0">
+                              <a:latin typeface="Cambria Math" panose="02040503050406030204" pitchFamily="18" charset="0"/>
+                            </a:rPr>
+                            <m:t>tan</m:t>
+                          </m:r>
+                        </m:fName>
+                        <m:e>
+                          <m:r>
+                            <a:rPr lang="en-US" i="1" smtClean="0">
+                              <a:latin typeface="Cambria Math" panose="02040503050406030204" pitchFamily="18" charset="0"/>
+                              <a:ea typeface="Cambria Math" panose="02040503050406030204" pitchFamily="18" charset="0"/>
+                            </a:rPr>
+                            <m:t>𝜃</m:t>
+                          </m:r>
+                        </m:e>
+                      </m:func>
+                      <m:r>
+                        <a:rPr lang="en-US" i="1" smtClean="0">
+                          <a:latin typeface="Cambria Math" panose="02040503050406030204" pitchFamily="18" charset="0"/>
+                        </a:rPr>
+                        <m:t>+</m:t>
+                      </m:r>
+                      <m:r>
+                        <a:rPr lang="en-US" i="1" smtClean="0">
+                          <a:latin typeface="Cambria Math" panose="02040503050406030204" pitchFamily="18" charset="0"/>
+                        </a:rPr>
+                        <m:t>𝑟</m:t>
+                      </m:r>
+                      <m:func>
+                        <m:funcPr>
+                          <m:ctrlPr>
+                            <a:rPr lang="en-US" i="1" smtClean="0">
+                              <a:latin typeface="Cambria Math" panose="02040503050406030204" pitchFamily="18" charset="0"/>
+                            </a:rPr>
+                          </m:ctrlPr>
+                        </m:funcPr>
+                        <m:fName>
+                          <m:r>
+                            <m:rPr>
+                              <m:sty m:val="p"/>
+                            </m:rPr>
+                            <a:rPr lang="en-US" smtClean="0">
+                              <a:latin typeface="Cambria Math" panose="02040503050406030204" pitchFamily="18" charset="0"/>
+                            </a:rPr>
+                            <m:t>cos</m:t>
+                          </m:r>
+                        </m:fName>
+                        <m:e>
+                          <m:r>
+                            <a:rPr lang="en-US" i="1" smtClean="0">
+                              <a:latin typeface="Cambria Math" panose="02040503050406030204" pitchFamily="18" charset="0"/>
+                              <a:ea typeface="Cambria Math" panose="02040503050406030204" pitchFamily="18" charset="0"/>
+                            </a:rPr>
+                            <m:t>𝜙</m:t>
+                          </m:r>
+                        </m:e>
+                      </m:func>
+                      <m:func>
+                        <m:funcPr>
+                          <m:ctrlPr>
+                            <a:rPr lang="en-US" i="1" smtClean="0">
+                              <a:latin typeface="Cambria Math" panose="02040503050406030204" pitchFamily="18" charset="0"/>
+                            </a:rPr>
+                          </m:ctrlPr>
+                        </m:funcPr>
+                        <m:fName>
+                          <m:r>
+                            <m:rPr>
+                              <m:sty m:val="p"/>
+                            </m:rPr>
+                            <a:rPr lang="en-US" smtClean="0">
+                              <a:latin typeface="Cambria Math" panose="02040503050406030204" pitchFamily="18" charset="0"/>
+                            </a:rPr>
+                            <m:t>tan</m:t>
+                          </m:r>
+                        </m:fName>
+                        <m:e>
+                          <m:r>
+                            <a:rPr lang="en-US" i="1" smtClean="0">
+                              <a:latin typeface="Cambria Math" panose="02040503050406030204" pitchFamily="18" charset="0"/>
+                              <a:ea typeface="Cambria Math" panose="02040503050406030204" pitchFamily="18" charset="0"/>
+                            </a:rPr>
+                            <m:t>𝜃</m:t>
+                          </m:r>
+                        </m:e>
+                      </m:func>
+                    </m:oMath>
+                  </m:oMathPara>
+                </a14:m>
+                <a:endParaRPr lang="en-US" dirty="0"/>
+              </a:p>
+            </p:txBody>
+          </p:sp>
+        </mc:Choice>
+        <mc:Fallback>
+          <p:sp>
+            <p:nvSpPr>
+              <p:cNvPr id="2" name="Content Placeholder 2">
+                <a:extLst>
+                  <a:ext uri="{FF2B5EF4-FFF2-40B4-BE49-F238E27FC236}">
+                    <a16:creationId xmlns:a16="http://schemas.microsoft.com/office/drawing/2014/main" id="{099C660B-877D-C133-0D0C-F6DB828B4FAD}"/>
+                  </a:ext>
+                </a:extLst>
+              </p:cNvPr>
+              <p:cNvSpPr txBox="1">
+                <a:spLocks noRot="1" noChangeAspect="1" noMove="1" noResize="1" noEditPoints="1" noAdjustHandles="1" noChangeArrowheads="1" noChangeShapeType="1" noTextEdit="1"/>
+              </p:cNvSpPr>
+              <p:nvPr/>
+            </p:nvSpPr>
+            <p:spPr>
+              <a:xfrm>
+                <a:off x="441036" y="1262207"/>
+                <a:ext cx="6001882" cy="4351338"/>
+              </a:xfrm>
+              <a:prstGeom prst="rect">
+                <a:avLst/>
+              </a:prstGeom>
+              <a:blipFill>
+                <a:blip r:embed="rId6"/>
+                <a:stretch>
+                  <a:fillRect t="-1541"/>
+                </a:stretch>
+              </a:blipFill>
+            </p:spPr>
+            <p:txBody>
+              <a:bodyPr/>
+              <a:lstStyle/>
+              <a:p>
+                <a:r>
+                  <a:rPr lang="en-US">
+                    <a:noFill/>
+                  </a:rPr>
+                  <a:t> </a:t>
+                </a:r>
+              </a:p>
+            </p:txBody>
+          </p:sp>
+        </mc:Fallback>
+      </mc:AlternateContent>
+    </p:spTree>
+    <p:extLst>
+      <p:ext uri="{BB962C8B-B14F-4D97-AF65-F5344CB8AC3E}">
+        <p14:creationId xmlns:p14="http://schemas.microsoft.com/office/powerpoint/2010/main" val="861825399"/>
+      </p:ext>
+    </p:extLst>
+  </p:cSld>
+  <p:clrMapOvr>
+    <a:masterClrMapping/>
+  </p:clrMapOvr>
+  <p:timing>
+    <p:tnLst>
+      <p:par>
+        <p:cTn id="1" dur="indefinite" restart="never" nodeType="tmRoot">
+          <p:childTnLst>
+            <p:seq concurrent="1" nextAc="seek">
+              <p:cTn id="2" dur="indefinite" nodeType="mainSeq">
+                <p:childTnLst>
+                  <p:par>
+                    <p:cTn id="3" fill="hold">
+                      <p:stCondLst>
+                        <p:cond delay="indefinite"/>
+                      </p:stCondLst>
+                      <p:childTnLst>
+                        <p:par>
+                          <p:cTn id="4" fill="hold">
+                            <p:stCondLst>
+                              <p:cond delay="0"/>
+                            </p:stCondLst>
+                            <p:childTnLst>
+                              <p:par>
+                                <p:cTn id="5" presetID="42" presetClass="entr" presetSubtype="0" fill="hold" grpId="0" nodeType="clickEffect">
+                                  <p:stCondLst>
+                                    <p:cond delay="0"/>
+                                  </p:stCondLst>
+                                  <p:childTnLst>
+                                    <p:set>
+                                      <p:cBhvr>
+                                        <p:cTn id="6" dur="1" fill="hold">
+                                          <p:stCondLst>
+                                            <p:cond delay="0"/>
+                                          </p:stCondLst>
+                                        </p:cTn>
+                                        <p:tgtEl>
+                                          <p:spTgt spid="9"/>
+                                        </p:tgtEl>
+                                        <p:attrNameLst>
+                                          <p:attrName>style.visibility</p:attrName>
+                                        </p:attrNameLst>
+                                      </p:cBhvr>
+                                      <p:to>
+                                        <p:strVal val="visible"/>
+                                      </p:to>
+                                    </p:set>
+                                    <p:animEffect transition="in" filter="fade">
+                                      <p:cBhvr>
+                                        <p:cTn id="7" dur="1000"/>
+                                        <p:tgtEl>
+                                          <p:spTgt spid="9"/>
+                                        </p:tgtEl>
+                                      </p:cBhvr>
+                                    </p:animEffect>
+                                    <p:anim calcmode="lin" valueType="num">
+                                      <p:cBhvr>
+                                        <p:cTn id="8" dur="1000" fill="hold"/>
+                                        <p:tgtEl>
+                                          <p:spTgt spid="9"/>
+                                        </p:tgtEl>
+                                        <p:attrNameLst>
+                                          <p:attrName>ppt_x</p:attrName>
+                                        </p:attrNameLst>
+                                      </p:cBhvr>
+                                      <p:tavLst>
+                                        <p:tav tm="0">
+                                          <p:val>
+                                            <p:strVal val="#ppt_x"/>
+                                          </p:val>
+                                        </p:tav>
+                                        <p:tav tm="100000">
+                                          <p:val>
+                                            <p:strVal val="#ppt_x"/>
+                                          </p:val>
+                                        </p:tav>
+                                      </p:tavLst>
+                                    </p:anim>
+                                    <p:anim calcmode="lin" valueType="num">
+                                      <p:cBhvr>
+                                        <p:cTn id="9" dur="1000" fill="hold"/>
+                                        <p:tgtEl>
+                                          <p:spTgt spid="9"/>
+                                        </p:tgtEl>
+                                        <p:attrNameLst>
+                                          <p:attrName>ppt_y</p:attrName>
+                                        </p:attrNameLst>
+                                      </p:cBhvr>
+                                      <p:tavLst>
+                                        <p:tav tm="0">
+                                          <p:val>
+                                            <p:strVal val="#ppt_y+.1"/>
+                                          </p:val>
+                                        </p:tav>
+                                        <p:tav tm="100000">
+                                          <p:val>
+                                            <p:strVal val="#ppt_y"/>
+                                          </p:val>
+                                        </p:tav>
+                                      </p:tavLst>
+                                    </p:anim>
+                                  </p:childTnLst>
+                                </p:cTn>
+                              </p:par>
+                            </p:childTnLst>
+                          </p:cTn>
+                        </p:par>
+                      </p:childTnLst>
+                    </p:cTn>
+                  </p:par>
+                  <p:par>
+                    <p:cTn id="10" fill="hold">
+                      <p:stCondLst>
+                        <p:cond delay="indefinite"/>
+                      </p:stCondLst>
+                      <p:childTnLst>
+                        <p:par>
+                          <p:cTn id="11" fill="hold">
+                            <p:stCondLst>
+                              <p:cond delay="0"/>
+                            </p:stCondLst>
+                            <p:childTnLst>
+                              <p:par>
+                                <p:cTn id="12" presetID="10" presetClass="exit" presetSubtype="0" fill="hold" grpId="0" nodeType="clickEffect">
+                                  <p:stCondLst>
+                                    <p:cond delay="0"/>
+                                  </p:stCondLst>
+                                  <p:childTnLst>
+                                    <p:animEffect transition="out" filter="fade">
+                                      <p:cBhvr>
+                                        <p:cTn id="13" dur="500"/>
+                                        <p:tgtEl>
+                                          <p:spTgt spid="2"/>
+                                        </p:tgtEl>
+                                      </p:cBhvr>
+                                    </p:animEffect>
+                                    <p:set>
+                                      <p:cBhvr>
+                                        <p:cTn id="14" dur="1" fill="hold">
+                                          <p:stCondLst>
+                                            <p:cond delay="499"/>
+                                          </p:stCondLst>
+                                        </p:cTn>
+                                        <p:tgtEl>
+                                          <p:spTgt spid="2"/>
+                                        </p:tgtEl>
+                                        <p:attrNameLst>
+                                          <p:attrName>style.visibility</p:attrName>
+                                        </p:attrNameLst>
+                                      </p:cBhvr>
+                                      <p:to>
+                                        <p:strVal val="hidden"/>
+                                      </p:to>
+                                    </p:set>
+                                  </p:childTnLst>
+                                </p:cTn>
+                              </p:par>
+                              <p:par>
+                                <p:cTn id="15" presetID="42" presetClass="entr" presetSubtype="0" fill="hold" grpId="0" nodeType="withEffect">
+                                  <p:stCondLst>
+                                    <p:cond delay="0"/>
+                                  </p:stCondLst>
+                                  <p:childTnLst>
+                                    <p:set>
+                                      <p:cBhvr>
+                                        <p:cTn id="16" dur="1" fill="hold">
+                                          <p:stCondLst>
+                                            <p:cond delay="0"/>
+                                          </p:stCondLst>
+                                        </p:cTn>
+                                        <p:tgtEl>
+                                          <p:spTgt spid="3">
+                                            <p:txEl>
+                                              <p:pRg st="0" end="0"/>
+                                            </p:txEl>
+                                          </p:spTgt>
+                                        </p:tgtEl>
+                                        <p:attrNameLst>
+                                          <p:attrName>style.visibility</p:attrName>
+                                        </p:attrNameLst>
+                                      </p:cBhvr>
+                                      <p:to>
+                                        <p:strVal val="visible"/>
+                                      </p:to>
+                                    </p:set>
+                                    <p:animEffect transition="in" filter="fade">
+                                      <p:cBhvr>
+                                        <p:cTn id="17" dur="1000"/>
+                                        <p:tgtEl>
+                                          <p:spTgt spid="3">
+                                            <p:txEl>
+                                              <p:pRg st="0" end="0"/>
+                                            </p:txEl>
+                                          </p:spTgt>
+                                        </p:tgtEl>
+                                      </p:cBhvr>
+                                    </p:animEffect>
+                                    <p:anim calcmode="lin" valueType="num">
+                                      <p:cBhvr>
+                                        <p:cTn id="18" dur="1000" fill="hold"/>
+                                        <p:tgtEl>
+                                          <p:spTgt spid="3">
+                                            <p:txEl>
+                                              <p:pRg st="0" end="0"/>
+                                            </p:txEl>
+                                          </p:spTgt>
+                                        </p:tgtEl>
+                                        <p:attrNameLst>
+                                          <p:attrName>ppt_x</p:attrName>
+                                        </p:attrNameLst>
+                                      </p:cBhvr>
+                                      <p:tavLst>
+                                        <p:tav tm="0">
+                                          <p:val>
+                                            <p:strVal val="#ppt_x"/>
+                                          </p:val>
+                                        </p:tav>
+                                        <p:tav tm="100000">
+                                          <p:val>
+                                            <p:strVal val="#ppt_x"/>
+                                          </p:val>
+                                        </p:tav>
+                                      </p:tavLst>
+                                    </p:anim>
+                                    <p:anim calcmode="lin" valueType="num">
+                                      <p:cBhvr>
+                                        <p:cTn id="19" dur="1000" fill="hold"/>
+                                        <p:tgtEl>
+                                          <p:spTgt spid="3">
+                                            <p:txEl>
+                                              <p:pRg st="0" end="0"/>
+                                            </p:txEl>
+                                          </p:spTgt>
+                                        </p:tgtEl>
+                                        <p:attrNameLst>
+                                          <p:attrName>ppt_y</p:attrName>
+                                        </p:attrNameLst>
+                                      </p:cBhvr>
+                                      <p:tavLst>
+                                        <p:tav tm="0">
+                                          <p:val>
+                                            <p:strVal val="#ppt_y+.1"/>
+                                          </p:val>
+                                        </p:tav>
+                                        <p:tav tm="100000">
+                                          <p:val>
+                                            <p:strVal val="#ppt_y"/>
+                                          </p:val>
+                                        </p:tav>
+                                      </p:tavLst>
+                                    </p:anim>
+                                  </p:childTnLst>
+                                </p:cTn>
+                              </p:par>
+                            </p:childTnLst>
+                          </p:cTn>
+                        </p:par>
+                        <p:par>
+                          <p:cTn id="20" fill="hold">
+                            <p:stCondLst>
+                              <p:cond delay="1000"/>
+                            </p:stCondLst>
+                            <p:childTnLst>
+                              <p:par>
+                                <p:cTn id="21" presetID="42" presetClass="entr" presetSubtype="0" fill="hold" grpId="0" nodeType="afterEffect">
+                                  <p:stCondLst>
+                                    <p:cond delay="0"/>
+                                  </p:stCondLst>
+                                  <p:childTnLst>
+                                    <p:set>
+                                      <p:cBhvr>
+                                        <p:cTn id="22" dur="1" fill="hold">
+                                          <p:stCondLst>
+                                            <p:cond delay="0"/>
+                                          </p:stCondLst>
+                                        </p:cTn>
+                                        <p:tgtEl>
+                                          <p:spTgt spid="3">
+                                            <p:txEl>
+                                              <p:pRg st="2" end="2"/>
+                                            </p:txEl>
+                                          </p:spTgt>
+                                        </p:tgtEl>
+                                        <p:attrNameLst>
+                                          <p:attrName>style.visibility</p:attrName>
+                                        </p:attrNameLst>
+                                      </p:cBhvr>
+                                      <p:to>
+                                        <p:strVal val="visible"/>
+                                      </p:to>
+                                    </p:set>
+                                    <p:animEffect transition="in" filter="fade">
+                                      <p:cBhvr>
+                                        <p:cTn id="23" dur="1000"/>
+                                        <p:tgtEl>
+                                          <p:spTgt spid="3">
+                                            <p:txEl>
+                                              <p:pRg st="2" end="2"/>
+                                            </p:txEl>
+                                          </p:spTgt>
+                                        </p:tgtEl>
+                                      </p:cBhvr>
+                                    </p:animEffect>
+                                    <p:anim calcmode="lin" valueType="num">
+                                      <p:cBhvr>
+                                        <p:cTn id="24" dur="1000" fill="hold"/>
+                                        <p:tgtEl>
+                                          <p:spTgt spid="3">
+                                            <p:txEl>
+                                              <p:pRg st="2" end="2"/>
+                                            </p:txEl>
+                                          </p:spTgt>
+                                        </p:tgtEl>
+                                        <p:attrNameLst>
+                                          <p:attrName>ppt_x</p:attrName>
+                                        </p:attrNameLst>
+                                      </p:cBhvr>
+                                      <p:tavLst>
+                                        <p:tav tm="0">
+                                          <p:val>
+                                            <p:strVal val="#ppt_x"/>
+                                          </p:val>
+                                        </p:tav>
+                                        <p:tav tm="100000">
+                                          <p:val>
+                                            <p:strVal val="#ppt_x"/>
+                                          </p:val>
+                                        </p:tav>
+                                      </p:tavLst>
+                                    </p:anim>
+                                    <p:anim calcmode="lin" valueType="num">
+                                      <p:cBhvr>
+                                        <p:cTn id="25" dur="1000" fill="hold"/>
+                                        <p:tgtEl>
+                                          <p:spTgt spid="3">
+                                            <p:txEl>
+                                              <p:pRg st="2" end="2"/>
+                                            </p:txEl>
+                                          </p:spTgt>
+                                        </p:tgtEl>
+                                        <p:attrNameLst>
+                                          <p:attrName>ppt_y</p:attrName>
+                                        </p:attrNameLst>
+                                      </p:cBhvr>
+                                      <p:tavLst>
+                                        <p:tav tm="0">
+                                          <p:val>
+                                            <p:strVal val="#ppt_y+.1"/>
+                                          </p:val>
+                                        </p:tav>
+                                        <p:tav tm="100000">
+                                          <p:val>
+                                            <p:strVal val="#ppt_y"/>
+                                          </p:val>
+                                        </p:tav>
+                                      </p:tavLst>
+                                    </p:anim>
+                                  </p:childTnLst>
+                                </p:cTn>
+                              </p:par>
+                            </p:childTnLst>
+                          </p:cTn>
+                        </p:par>
+                        <p:par>
+                          <p:cTn id="26" fill="hold">
+                            <p:stCondLst>
+                              <p:cond delay="2000"/>
+                            </p:stCondLst>
+                            <p:childTnLst>
+                              <p:par>
+                                <p:cTn id="27" presetID="42" presetClass="entr" presetSubtype="0" fill="hold" grpId="0" nodeType="afterEffect">
+                                  <p:stCondLst>
+                                    <p:cond delay="0"/>
+                                  </p:stCondLst>
+                                  <p:childTnLst>
+                                    <p:set>
+                                      <p:cBhvr>
+                                        <p:cTn id="28" dur="1" fill="hold">
+                                          <p:stCondLst>
+                                            <p:cond delay="0"/>
+                                          </p:stCondLst>
+                                        </p:cTn>
+                                        <p:tgtEl>
+                                          <p:spTgt spid="3">
+                                            <p:txEl>
+                                              <p:pRg st="4" end="4"/>
+                                            </p:txEl>
+                                          </p:spTgt>
+                                        </p:tgtEl>
+                                        <p:attrNameLst>
+                                          <p:attrName>style.visibility</p:attrName>
+                                        </p:attrNameLst>
+                                      </p:cBhvr>
+                                      <p:to>
+                                        <p:strVal val="visible"/>
+                                      </p:to>
+                                    </p:set>
+                                    <p:animEffect transition="in" filter="fade">
+                                      <p:cBhvr>
+                                        <p:cTn id="29" dur="1000"/>
+                                        <p:tgtEl>
+                                          <p:spTgt spid="3">
+                                            <p:txEl>
+                                              <p:pRg st="4" end="4"/>
+                                            </p:txEl>
+                                          </p:spTgt>
+                                        </p:tgtEl>
+                                      </p:cBhvr>
+                                    </p:animEffect>
+                                    <p:anim calcmode="lin" valueType="num">
+                                      <p:cBhvr>
+                                        <p:cTn id="30" dur="1000" fill="hold"/>
+                                        <p:tgtEl>
+                                          <p:spTgt spid="3">
+                                            <p:txEl>
+                                              <p:pRg st="4" end="4"/>
+                                            </p:txEl>
+                                          </p:spTgt>
+                                        </p:tgtEl>
+                                        <p:attrNameLst>
+                                          <p:attrName>ppt_x</p:attrName>
+                                        </p:attrNameLst>
+                                      </p:cBhvr>
+                                      <p:tavLst>
+                                        <p:tav tm="0">
+                                          <p:val>
+                                            <p:strVal val="#ppt_x"/>
+                                          </p:val>
+                                        </p:tav>
+                                        <p:tav tm="100000">
+                                          <p:val>
+                                            <p:strVal val="#ppt_x"/>
+                                          </p:val>
+                                        </p:tav>
+                                      </p:tavLst>
+                                    </p:anim>
+                                    <p:anim calcmode="lin" valueType="num">
+                                      <p:cBhvr>
+                                        <p:cTn id="31" dur="1000" fill="hold"/>
+                                        <p:tgtEl>
+                                          <p:spTgt spid="3">
+                                            <p:txEl>
+                                              <p:pRg st="4" end="4"/>
+                                            </p:txEl>
+                                          </p:spTgt>
+                                        </p:tgtEl>
+                                        <p:attrNameLst>
+                                          <p:attrName>ppt_y</p:attrName>
+                                        </p:attrNameLst>
+                                      </p:cBhvr>
+                                      <p:tavLst>
+                                        <p:tav tm="0">
+                                          <p:val>
+                                            <p:strVal val="#ppt_y+.1"/>
+                                          </p:val>
+                                        </p:tav>
+                                        <p:tav tm="100000">
+                                          <p:val>
+                                            <p:strVal val="#ppt_y"/>
+                                          </p:val>
+                                        </p:tav>
+                                      </p:tavLst>
+                                    </p:anim>
+                                  </p:childTnLst>
+                                </p:cTn>
+                              </p:par>
+                            </p:childTnLst>
+                          </p:cTn>
+                        </p:par>
+                      </p:childTnLst>
+                    </p:cTn>
+                  </p:par>
+                </p:childTnLst>
+              </p:cTn>
+              <p:prevCondLst>
+                <p:cond evt="onPrev" delay="0">
+                  <p:tgtEl>
+                    <p:sldTgt/>
+                  </p:tgtEl>
+                </p:cond>
+              </p:prevCondLst>
+              <p:nextCondLst>
+                <p:cond evt="onNext" delay="0">
+                  <p:tgtEl>
+                    <p:sldTgt/>
+                  </p:tgtEl>
+                </p:cond>
+              </p:nextCondLst>
+            </p:seq>
+          </p:childTnLst>
+        </p:cTn>
+      </p:par>
+    </p:tnLst>
+    <p:bldLst>
+      <p:bldP spid="3" grpId="0" uiExpand="1" build="p"/>
+      <p:bldP spid="9" grpId="0"/>
+      <p:bldP spid="2" grpId="0"/>
+    </p:bldLst>
+  </p:timing>
 </p:sld>
 </file>
 

--- a/Euler/Euler.pptx
+++ b/Euler/Euler.pptx
@@ -4,13 +4,18 @@
   <p:sldMasterIdLst>
     <p:sldMasterId id="2147483756" r:id="rId1"/>
   </p:sldMasterIdLst>
+  <p:notesMasterIdLst>
+    <p:notesMasterId r:id="rId10"/>
+  </p:notesMasterIdLst>
   <p:sldIdLst>
     <p:sldId id="260" r:id="rId2"/>
     <p:sldId id="261" r:id="rId3"/>
     <p:sldId id="258" r:id="rId4"/>
     <p:sldId id="259" r:id="rId5"/>
-    <p:sldId id="256" r:id="rId6"/>
-    <p:sldId id="257" r:id="rId7"/>
+    <p:sldId id="262" r:id="rId6"/>
+    <p:sldId id="263" r:id="rId7"/>
+    <p:sldId id="256" r:id="rId8"/>
+    <p:sldId id="257" r:id="rId9"/>
   </p:sldIdLst>
   <p:sldSz cx="12192000" cy="6858000"/>
   <p:notesSz cx="6858000" cy="9144000"/>
@@ -115,6 +120,547 @@
     </p:ext>
   </p:extLst>
 </p:presentation>
+</file>
+
+<file path=ppt/notesMasters/notesMaster1.xml><?xml version="1.0" encoding="utf-8"?>
+<p:notesMaster xmlns:a="http://schemas.openxmlformats.org/drawingml/2006/main" xmlns:r="http://schemas.openxmlformats.org/officeDocument/2006/relationships" xmlns:p="http://schemas.openxmlformats.org/presentationml/2006/main">
+  <p:cSld>
+    <p:bg>
+      <p:bgRef idx="1001">
+        <a:schemeClr val="bg1"/>
+      </p:bgRef>
+    </p:bg>
+    <p:spTree>
+      <p:nvGrpSpPr>
+        <p:cNvPr id="1" name=""/>
+        <p:cNvGrpSpPr/>
+        <p:nvPr/>
+      </p:nvGrpSpPr>
+      <p:grpSpPr>
+        <a:xfrm>
+          <a:off x="0" y="0"/>
+          <a:ext cx="0" cy="0"/>
+          <a:chOff x="0" y="0"/>
+          <a:chExt cx="0" cy="0"/>
+        </a:xfrm>
+      </p:grpSpPr>
+      <p:sp>
+        <p:nvSpPr>
+          <p:cNvPr id="2" name="Header Placeholder 1"/>
+          <p:cNvSpPr>
+            <a:spLocks noGrp="1"/>
+          </p:cNvSpPr>
+          <p:nvPr>
+            <p:ph type="hdr" sz="quarter"/>
+          </p:nvPr>
+        </p:nvSpPr>
+        <p:spPr>
+          <a:xfrm>
+            <a:off x="0" y="0"/>
+            <a:ext cx="2971800" cy="458788"/>
+          </a:xfrm>
+          <a:prstGeom prst="rect">
+            <a:avLst/>
+          </a:prstGeom>
+        </p:spPr>
+        <p:txBody>
+          <a:bodyPr vert="horz" lIns="91440" tIns="45720" rIns="91440" bIns="45720" rtlCol="0"/>
+          <a:lstStyle>
+            <a:lvl1pPr algn="l">
+              <a:defRPr sz="1200"/>
+            </a:lvl1pPr>
+          </a:lstStyle>
+          <a:p>
+            <a:endParaRPr lang="en-US"/>
+          </a:p>
+        </p:txBody>
+      </p:sp>
+      <p:sp>
+        <p:nvSpPr>
+          <p:cNvPr id="3" name="Date Placeholder 2"/>
+          <p:cNvSpPr>
+            <a:spLocks noGrp="1"/>
+          </p:cNvSpPr>
+          <p:nvPr>
+            <p:ph type="dt" idx="1"/>
+          </p:nvPr>
+        </p:nvSpPr>
+        <p:spPr>
+          <a:xfrm>
+            <a:off x="3884613" y="0"/>
+            <a:ext cx="2971800" cy="458788"/>
+          </a:xfrm>
+          <a:prstGeom prst="rect">
+            <a:avLst/>
+          </a:prstGeom>
+        </p:spPr>
+        <p:txBody>
+          <a:bodyPr vert="horz" lIns="91440" tIns="45720" rIns="91440" bIns="45720" rtlCol="0"/>
+          <a:lstStyle>
+            <a:lvl1pPr algn="r">
+              <a:defRPr sz="1200"/>
+            </a:lvl1pPr>
+          </a:lstStyle>
+          <a:p>
+            <a:fld id="{4B07E4D4-F8F8-476B-81B5-17DA280C7B0E}" type="datetimeFigureOut">
+              <a:rPr lang="en-US" smtClean="0"/>
+              <a:t>7/7/2026</a:t>
+            </a:fld>
+            <a:endParaRPr lang="en-US"/>
+          </a:p>
+        </p:txBody>
+      </p:sp>
+      <p:sp>
+        <p:nvSpPr>
+          <p:cNvPr id="4" name="Slide Image Placeholder 3"/>
+          <p:cNvSpPr>
+            <a:spLocks noGrp="1" noRot="1" noChangeAspect="1"/>
+          </p:cNvSpPr>
+          <p:nvPr>
+            <p:ph type="sldImg" idx="2"/>
+          </p:nvPr>
+        </p:nvSpPr>
+        <p:spPr>
+          <a:xfrm>
+            <a:off x="685800" y="1143000"/>
+            <a:ext cx="5486400" cy="3086100"/>
+          </a:xfrm>
+          <a:prstGeom prst="rect">
+            <a:avLst/>
+          </a:prstGeom>
+          <a:noFill/>
+          <a:ln w="12700">
+            <a:solidFill>
+              <a:prstClr val="black"/>
+            </a:solidFill>
+          </a:ln>
+        </p:spPr>
+        <p:txBody>
+          <a:bodyPr vert="horz" lIns="91440" tIns="45720" rIns="91440" bIns="45720" rtlCol="0" anchor="ctr"/>
+          <a:lstStyle/>
+          <a:p>
+            <a:endParaRPr lang="en-US"/>
+          </a:p>
+        </p:txBody>
+      </p:sp>
+      <p:sp>
+        <p:nvSpPr>
+          <p:cNvPr id="5" name="Notes Placeholder 4"/>
+          <p:cNvSpPr>
+            <a:spLocks noGrp="1"/>
+          </p:cNvSpPr>
+          <p:nvPr>
+            <p:ph type="body" sz="quarter" idx="3"/>
+          </p:nvPr>
+        </p:nvSpPr>
+        <p:spPr>
+          <a:xfrm>
+            <a:off x="685800" y="4400550"/>
+            <a:ext cx="5486400" cy="3600450"/>
+          </a:xfrm>
+          <a:prstGeom prst="rect">
+            <a:avLst/>
+          </a:prstGeom>
+        </p:spPr>
+        <p:txBody>
+          <a:bodyPr vert="horz" lIns="91440" tIns="45720" rIns="91440" bIns="45720" rtlCol="0"/>
+          <a:lstStyle/>
+          <a:p>
+            <a:pPr lvl="0"/>
+            <a:r>
+              <a:rPr lang="en-US"/>
+              <a:t>Click to edit Master text styles</a:t>
+            </a:r>
+          </a:p>
+          <a:p>
+            <a:pPr lvl="1"/>
+            <a:r>
+              <a:rPr lang="en-US"/>
+              <a:t>Second level</a:t>
+            </a:r>
+          </a:p>
+          <a:p>
+            <a:pPr lvl="2"/>
+            <a:r>
+              <a:rPr lang="en-US"/>
+              <a:t>Third level</a:t>
+            </a:r>
+          </a:p>
+          <a:p>
+            <a:pPr lvl="3"/>
+            <a:r>
+              <a:rPr lang="en-US"/>
+              <a:t>Fourth level</a:t>
+            </a:r>
+          </a:p>
+          <a:p>
+            <a:pPr lvl="4"/>
+            <a:r>
+              <a:rPr lang="en-US"/>
+              <a:t>Fifth level</a:t>
+            </a:r>
+          </a:p>
+        </p:txBody>
+      </p:sp>
+      <p:sp>
+        <p:nvSpPr>
+          <p:cNvPr id="6" name="Footer Placeholder 5"/>
+          <p:cNvSpPr>
+            <a:spLocks noGrp="1"/>
+          </p:cNvSpPr>
+          <p:nvPr>
+            <p:ph type="ftr" sz="quarter" idx="4"/>
+          </p:nvPr>
+        </p:nvSpPr>
+        <p:spPr>
+          <a:xfrm>
+            <a:off x="0" y="8685213"/>
+            <a:ext cx="2971800" cy="458787"/>
+          </a:xfrm>
+          <a:prstGeom prst="rect">
+            <a:avLst/>
+          </a:prstGeom>
+        </p:spPr>
+        <p:txBody>
+          <a:bodyPr vert="horz" lIns="91440" tIns="45720" rIns="91440" bIns="45720" rtlCol="0" anchor="b"/>
+          <a:lstStyle>
+            <a:lvl1pPr algn="l">
+              <a:defRPr sz="1200"/>
+            </a:lvl1pPr>
+          </a:lstStyle>
+          <a:p>
+            <a:endParaRPr lang="en-US"/>
+          </a:p>
+        </p:txBody>
+      </p:sp>
+      <p:sp>
+        <p:nvSpPr>
+          <p:cNvPr id="7" name="Slide Number Placeholder 6"/>
+          <p:cNvSpPr>
+            <a:spLocks noGrp="1"/>
+          </p:cNvSpPr>
+          <p:nvPr>
+            <p:ph type="sldNum" sz="quarter" idx="5"/>
+          </p:nvPr>
+        </p:nvSpPr>
+        <p:spPr>
+          <a:xfrm>
+            <a:off x="3884613" y="8685213"/>
+            <a:ext cx="2971800" cy="458787"/>
+          </a:xfrm>
+          <a:prstGeom prst="rect">
+            <a:avLst/>
+          </a:prstGeom>
+        </p:spPr>
+        <p:txBody>
+          <a:bodyPr vert="horz" lIns="91440" tIns="45720" rIns="91440" bIns="45720" rtlCol="0" anchor="b"/>
+          <a:lstStyle>
+            <a:lvl1pPr algn="r">
+              <a:defRPr sz="1200"/>
+            </a:lvl1pPr>
+          </a:lstStyle>
+          <a:p>
+            <a:fld id="{1E13FF40-78BC-44EE-ABF1-49D2518F58D4}" type="slidenum">
+              <a:rPr lang="en-US" smtClean="0"/>
+              <a:t>‹#›</a:t>
+            </a:fld>
+            <a:endParaRPr lang="en-US"/>
+          </a:p>
+        </p:txBody>
+      </p:sp>
+    </p:spTree>
+    <p:extLst>
+      <p:ext uri="{BB962C8B-B14F-4D97-AF65-F5344CB8AC3E}">
+        <p14:creationId xmlns:p14="http://schemas.microsoft.com/office/powerpoint/2010/main" val="1895947613"/>
+      </p:ext>
+    </p:extLst>
+  </p:cSld>
+  <p:clrMap bg1="lt1" tx1="dk1" bg2="lt2" tx2="dk2" accent1="accent1" accent2="accent2" accent3="accent3" accent4="accent4" accent5="accent5" accent6="accent6" hlink="hlink" folHlink="folHlink"/>
+  <p:notesStyle>
+    <a:lvl1pPr marL="0" algn="l" defTabSz="914400" rtl="0" eaLnBrk="1" latinLnBrk="0" hangingPunct="1">
+      <a:defRPr sz="1200" kern="1200">
+        <a:solidFill>
+          <a:schemeClr val="tx1"/>
+        </a:solidFill>
+        <a:latin typeface="+mn-lt"/>
+        <a:ea typeface="+mn-ea"/>
+        <a:cs typeface="+mn-cs"/>
+      </a:defRPr>
+    </a:lvl1pPr>
+    <a:lvl2pPr marL="457200" algn="l" defTabSz="914400" rtl="0" eaLnBrk="1" latinLnBrk="0" hangingPunct="1">
+      <a:defRPr sz="1200" kern="1200">
+        <a:solidFill>
+          <a:schemeClr val="tx1"/>
+        </a:solidFill>
+        <a:latin typeface="+mn-lt"/>
+        <a:ea typeface="+mn-ea"/>
+        <a:cs typeface="+mn-cs"/>
+      </a:defRPr>
+    </a:lvl2pPr>
+    <a:lvl3pPr marL="914400" algn="l" defTabSz="914400" rtl="0" eaLnBrk="1" latinLnBrk="0" hangingPunct="1">
+      <a:defRPr sz="1200" kern="1200">
+        <a:solidFill>
+          <a:schemeClr val="tx1"/>
+        </a:solidFill>
+        <a:latin typeface="+mn-lt"/>
+        <a:ea typeface="+mn-ea"/>
+        <a:cs typeface="+mn-cs"/>
+      </a:defRPr>
+    </a:lvl3pPr>
+    <a:lvl4pPr marL="1371600" algn="l" defTabSz="914400" rtl="0" eaLnBrk="1" latinLnBrk="0" hangingPunct="1">
+      <a:defRPr sz="1200" kern="1200">
+        <a:solidFill>
+          <a:schemeClr val="tx1"/>
+        </a:solidFill>
+        <a:latin typeface="+mn-lt"/>
+        <a:ea typeface="+mn-ea"/>
+        <a:cs typeface="+mn-cs"/>
+      </a:defRPr>
+    </a:lvl4pPr>
+    <a:lvl5pPr marL="1828800" algn="l" defTabSz="914400" rtl="0" eaLnBrk="1" latinLnBrk="0" hangingPunct="1">
+      <a:defRPr sz="1200" kern="1200">
+        <a:solidFill>
+          <a:schemeClr val="tx1"/>
+        </a:solidFill>
+        <a:latin typeface="+mn-lt"/>
+        <a:ea typeface="+mn-ea"/>
+        <a:cs typeface="+mn-cs"/>
+      </a:defRPr>
+    </a:lvl5pPr>
+    <a:lvl6pPr marL="2286000" algn="l" defTabSz="914400" rtl="0" eaLnBrk="1" latinLnBrk="0" hangingPunct="1">
+      <a:defRPr sz="1200" kern="1200">
+        <a:solidFill>
+          <a:schemeClr val="tx1"/>
+        </a:solidFill>
+        <a:latin typeface="+mn-lt"/>
+        <a:ea typeface="+mn-ea"/>
+        <a:cs typeface="+mn-cs"/>
+      </a:defRPr>
+    </a:lvl6pPr>
+    <a:lvl7pPr marL="2743200" algn="l" defTabSz="914400" rtl="0" eaLnBrk="1" latinLnBrk="0" hangingPunct="1">
+      <a:defRPr sz="1200" kern="1200">
+        <a:solidFill>
+          <a:schemeClr val="tx1"/>
+        </a:solidFill>
+        <a:latin typeface="+mn-lt"/>
+        <a:ea typeface="+mn-ea"/>
+        <a:cs typeface="+mn-cs"/>
+      </a:defRPr>
+    </a:lvl7pPr>
+    <a:lvl8pPr marL="3200400" algn="l" defTabSz="914400" rtl="0" eaLnBrk="1" latinLnBrk="0" hangingPunct="1">
+      <a:defRPr sz="1200" kern="1200">
+        <a:solidFill>
+          <a:schemeClr val="tx1"/>
+        </a:solidFill>
+        <a:latin typeface="+mn-lt"/>
+        <a:ea typeface="+mn-ea"/>
+        <a:cs typeface="+mn-cs"/>
+      </a:defRPr>
+    </a:lvl8pPr>
+    <a:lvl9pPr marL="3657600" algn="l" defTabSz="914400" rtl="0" eaLnBrk="1" latinLnBrk="0" hangingPunct="1">
+      <a:defRPr sz="1200" kern="1200">
+        <a:solidFill>
+          <a:schemeClr val="tx1"/>
+        </a:solidFill>
+        <a:latin typeface="+mn-lt"/>
+        <a:ea typeface="+mn-ea"/>
+        <a:cs typeface="+mn-cs"/>
+      </a:defRPr>
+    </a:lvl9pPr>
+  </p:notesStyle>
+</p:notesMaster>
+</file>
+
+<file path=ppt/notesSlides/notesSlide1.xml><?xml version="1.0" encoding="utf-8"?>
+<p:notes xmlns:a="http://schemas.openxmlformats.org/drawingml/2006/main" xmlns:r="http://schemas.openxmlformats.org/officeDocument/2006/relationships" xmlns:p="http://schemas.openxmlformats.org/presentationml/2006/main">
+  <p:cSld>
+    <p:spTree>
+      <p:nvGrpSpPr>
+        <p:cNvPr id="1" name=""/>
+        <p:cNvGrpSpPr/>
+        <p:nvPr/>
+      </p:nvGrpSpPr>
+      <p:grpSpPr>
+        <a:xfrm>
+          <a:off x="0" y="0"/>
+          <a:ext cx="0" cy="0"/>
+          <a:chOff x="0" y="0"/>
+          <a:chExt cx="0" cy="0"/>
+        </a:xfrm>
+      </p:grpSpPr>
+      <p:sp>
+        <p:nvSpPr>
+          <p:cNvPr id="2" name="Slide Image Placeholder 1"/>
+          <p:cNvSpPr>
+            <a:spLocks noGrp="1" noRot="1" noChangeAspect="1"/>
+          </p:cNvSpPr>
+          <p:nvPr>
+            <p:ph type="sldImg"/>
+          </p:nvPr>
+        </p:nvSpPr>
+        <p:spPr/>
+      </p:sp>
+      <p:sp>
+        <p:nvSpPr>
+          <p:cNvPr id="3" name="Notes Placeholder 2"/>
+          <p:cNvSpPr>
+            <a:spLocks noGrp="1"/>
+          </p:cNvSpPr>
+          <p:nvPr>
+            <p:ph type="body" idx="1"/>
+          </p:nvPr>
+        </p:nvSpPr>
+        <p:spPr/>
+        <p:txBody>
+          <a:bodyPr/>
+          <a:lstStyle/>
+          <a:p>
+            <a:endParaRPr lang="en-US" dirty="0"/>
+          </a:p>
+        </p:txBody>
+      </p:sp>
+      <p:sp>
+        <p:nvSpPr>
+          <p:cNvPr id="4" name="Slide Number Placeholder 3"/>
+          <p:cNvSpPr>
+            <a:spLocks noGrp="1"/>
+          </p:cNvSpPr>
+          <p:nvPr>
+            <p:ph type="sldNum" sz="quarter" idx="5"/>
+          </p:nvPr>
+        </p:nvSpPr>
+        <p:spPr/>
+        <p:txBody>
+          <a:bodyPr/>
+          <a:lstStyle/>
+          <a:p>
+            <a:fld id="{1E13FF40-78BC-44EE-ABF1-49D2518F58D4}" type="slidenum">
+              <a:rPr lang="en-US" smtClean="0"/>
+              <a:t>5</a:t>
+            </a:fld>
+            <a:endParaRPr lang="en-US"/>
+          </a:p>
+        </p:txBody>
+      </p:sp>
+    </p:spTree>
+    <p:extLst>
+      <p:ext uri="{BB962C8B-B14F-4D97-AF65-F5344CB8AC3E}">
+        <p14:creationId xmlns:p14="http://schemas.microsoft.com/office/powerpoint/2010/main" val="1170733273"/>
+      </p:ext>
+    </p:extLst>
+  </p:cSld>
+  <p:clrMapOvr>
+    <a:masterClrMapping/>
+  </p:clrMapOvr>
+</p:notes>
+</file>
+
+<file path=ppt/notesSlides/notesSlide2.xml><?xml version="1.0" encoding="utf-8"?>
+<p:notes xmlns:a="http://schemas.openxmlformats.org/drawingml/2006/main" xmlns:r="http://schemas.openxmlformats.org/officeDocument/2006/relationships" xmlns:p="http://schemas.openxmlformats.org/presentationml/2006/main">
+  <p:cSld>
+    <p:spTree>
+      <p:nvGrpSpPr>
+        <p:cNvPr id="1" name="">
+          <a:extLst>
+            <a:ext uri="{FF2B5EF4-FFF2-40B4-BE49-F238E27FC236}">
+              <a16:creationId xmlns:a16="http://schemas.microsoft.com/office/drawing/2014/main" id="{51406B60-ED68-BEA8-FAEB-7D1DC473D37B}"/>
+            </a:ext>
+          </a:extLst>
+        </p:cNvPr>
+        <p:cNvGrpSpPr/>
+        <p:nvPr/>
+      </p:nvGrpSpPr>
+      <p:grpSpPr>
+        <a:xfrm>
+          <a:off x="0" y="0"/>
+          <a:ext cx="0" cy="0"/>
+          <a:chOff x="0" y="0"/>
+          <a:chExt cx="0" cy="0"/>
+        </a:xfrm>
+      </p:grpSpPr>
+      <p:sp>
+        <p:nvSpPr>
+          <p:cNvPr id="2" name="Slide Image Placeholder 1">
+            <a:extLst>
+              <a:ext uri="{FF2B5EF4-FFF2-40B4-BE49-F238E27FC236}">
+                <a16:creationId xmlns:a16="http://schemas.microsoft.com/office/drawing/2014/main" id="{F5180B5D-DA3F-8AF1-2958-5FB2B53C4AAA}"/>
+              </a:ext>
+            </a:extLst>
+          </p:cNvPr>
+          <p:cNvSpPr>
+            <a:spLocks noGrp="1" noRot="1" noChangeAspect="1"/>
+          </p:cNvSpPr>
+          <p:nvPr>
+            <p:ph type="sldImg"/>
+          </p:nvPr>
+        </p:nvSpPr>
+        <p:spPr/>
+      </p:sp>
+      <p:sp>
+        <p:nvSpPr>
+          <p:cNvPr id="3" name="Notes Placeholder 2">
+            <a:extLst>
+              <a:ext uri="{FF2B5EF4-FFF2-40B4-BE49-F238E27FC236}">
+                <a16:creationId xmlns:a16="http://schemas.microsoft.com/office/drawing/2014/main" id="{52836BF1-493F-BC43-17D6-D407AAAFA703}"/>
+              </a:ext>
+            </a:extLst>
+          </p:cNvPr>
+          <p:cNvSpPr>
+            <a:spLocks noGrp="1"/>
+          </p:cNvSpPr>
+          <p:nvPr>
+            <p:ph type="body" idx="1"/>
+          </p:nvPr>
+        </p:nvSpPr>
+        <p:spPr/>
+        <p:txBody>
+          <a:bodyPr/>
+          <a:lstStyle/>
+          <a:p>
+            <a:endParaRPr lang="en-US" dirty="0"/>
+          </a:p>
+        </p:txBody>
+      </p:sp>
+      <p:sp>
+        <p:nvSpPr>
+          <p:cNvPr id="4" name="Slide Number Placeholder 3">
+            <a:extLst>
+              <a:ext uri="{FF2B5EF4-FFF2-40B4-BE49-F238E27FC236}">
+                <a16:creationId xmlns:a16="http://schemas.microsoft.com/office/drawing/2014/main" id="{E7032070-45B5-C4D3-6571-0023BD5F4612}"/>
+              </a:ext>
+            </a:extLst>
+          </p:cNvPr>
+          <p:cNvSpPr>
+            <a:spLocks noGrp="1"/>
+          </p:cNvSpPr>
+          <p:nvPr>
+            <p:ph type="sldNum" sz="quarter" idx="5"/>
+          </p:nvPr>
+        </p:nvSpPr>
+        <p:spPr/>
+        <p:txBody>
+          <a:bodyPr/>
+          <a:lstStyle/>
+          <a:p>
+            <a:fld id="{1E13FF40-78BC-44EE-ABF1-49D2518F58D4}" type="slidenum">
+              <a:rPr lang="en-US" smtClean="0"/>
+              <a:t>6</a:t>
+            </a:fld>
+            <a:endParaRPr lang="en-US"/>
+          </a:p>
+        </p:txBody>
+      </p:sp>
+    </p:spTree>
+    <p:extLst>
+      <p:ext uri="{BB962C8B-B14F-4D97-AF65-F5344CB8AC3E}">
+        <p14:creationId xmlns:p14="http://schemas.microsoft.com/office/powerpoint/2010/main" val="3717336654"/>
+      </p:ext>
+    </p:extLst>
+  </p:cSld>
+  <p:clrMapOvr>
+    <a:masterClrMapping/>
+  </p:clrMapOvr>
+</p:notes>
 </file>
 
 <file path=ppt/slideLayouts/slideLayout1.xml><?xml version="1.0" encoding="utf-8"?>
@@ -8943,6 +9489,2118 @@
   <p:cSld>
     <p:spTree>
       <p:nvGrpSpPr>
+        <p:cNvPr id="1" name="">
+          <a:extLst>
+            <a:ext uri="{FF2B5EF4-FFF2-40B4-BE49-F238E27FC236}">
+              <a16:creationId xmlns:a16="http://schemas.microsoft.com/office/drawing/2014/main" id="{991D86CC-7694-EFD1-546D-54FC4E4C709A}"/>
+            </a:ext>
+          </a:extLst>
+        </p:cNvPr>
+        <p:cNvGrpSpPr/>
+        <p:nvPr/>
+      </p:nvGrpSpPr>
+      <p:grpSpPr>
+        <a:xfrm>
+          <a:off x="0" y="0"/>
+          <a:ext cx="0" cy="0"/>
+          <a:chOff x="0" y="0"/>
+          <a:chExt cx="0" cy="0"/>
+        </a:xfrm>
+      </p:grpSpPr>
+      <p:sp>
+        <p:nvSpPr>
+          <p:cNvPr id="2" name="Title 1">
+            <a:extLst>
+              <a:ext uri="{FF2B5EF4-FFF2-40B4-BE49-F238E27FC236}">
+                <a16:creationId xmlns:a16="http://schemas.microsoft.com/office/drawing/2014/main" id="{453C9B67-E587-C486-A2A9-A14D96D35A11}"/>
+              </a:ext>
+            </a:extLst>
+          </p:cNvPr>
+          <p:cNvSpPr>
+            <a:spLocks noGrp="1"/>
+          </p:cNvSpPr>
+          <p:nvPr>
+            <p:ph type="title"/>
+          </p:nvPr>
+        </p:nvSpPr>
+        <p:spPr>
+          <a:xfrm>
+            <a:off x="838200" y="365125"/>
+            <a:ext cx="10515600" cy="719439"/>
+          </a:xfrm>
+        </p:spPr>
+        <p:txBody>
+          <a:bodyPr/>
+          <a:lstStyle/>
+          <a:p>
+            <a:r>
+              <a:rPr lang="en-US" dirty="0"/>
+              <a:t>Altazimuth (Az/El) Mounts</a:t>
+            </a:r>
+          </a:p>
+        </p:txBody>
+      </p:sp>
+      <p:sp>
+        <p:nvSpPr>
+          <p:cNvPr id="13" name="TextBox 12">
+            <a:extLst>
+              <a:ext uri="{FF2B5EF4-FFF2-40B4-BE49-F238E27FC236}">
+                <a16:creationId xmlns:a16="http://schemas.microsoft.com/office/drawing/2014/main" id="{46F5043E-2532-6CD6-EC77-061D1B22F077}"/>
+              </a:ext>
+            </a:extLst>
+          </p:cNvPr>
+          <p:cNvSpPr txBox="1"/>
+          <p:nvPr/>
+        </p:nvSpPr>
+        <p:spPr>
+          <a:xfrm>
+            <a:off x="553211" y="1084564"/>
+            <a:ext cx="4660415" cy="461665"/>
+          </a:xfrm>
+          <a:prstGeom prst="rect">
+            <a:avLst/>
+          </a:prstGeom>
+          <a:noFill/>
+        </p:spPr>
+        <p:txBody>
+          <a:bodyPr wrap="square" rtlCol="0">
+            <a:spAutoFit/>
+          </a:bodyPr>
+          <a:lstStyle/>
+          <a:p>
+            <a:pPr algn="ctr"/>
+            <a:r>
+              <a:rPr lang="en-US" sz="2400" dirty="0"/>
+              <a:t>Some Typical Game Scenarios</a:t>
+            </a:r>
+          </a:p>
+        </p:txBody>
+      </p:sp>
+      <p:pic>
+        <p:nvPicPr>
+          <p:cNvPr id="4" name="Picture 3">
+            <a:extLst>
+              <a:ext uri="{FF2B5EF4-FFF2-40B4-BE49-F238E27FC236}">
+                <a16:creationId xmlns:a16="http://schemas.microsoft.com/office/drawing/2014/main" id="{F08ACC8C-5BA9-9278-9F4F-C80B3F99DB63}"/>
+              </a:ext>
+            </a:extLst>
+          </p:cNvPr>
+          <p:cNvPicPr>
+            <a:picLocks noChangeAspect="1"/>
+          </p:cNvPicPr>
+          <p:nvPr/>
+        </p:nvPicPr>
+        <p:blipFill>
+          <a:blip r:embed="rId3">
+            <a:extLst>
+              <a:ext uri="{28A0092B-C50C-407E-A947-70E740481C1C}">
+                <a14:useLocalDpi xmlns:a14="http://schemas.microsoft.com/office/drawing/2010/main" val="0"/>
+              </a:ext>
+            </a:extLst>
+          </a:blip>
+          <a:stretch>
+            <a:fillRect/>
+          </a:stretch>
+        </p:blipFill>
+        <p:spPr>
+          <a:xfrm>
+            <a:off x="7963640" y="667660"/>
+            <a:ext cx="3924848" cy="3277057"/>
+          </a:xfrm>
+          <a:prstGeom prst="rect">
+            <a:avLst/>
+          </a:prstGeom>
+        </p:spPr>
+      </p:pic>
+      <p:pic>
+        <p:nvPicPr>
+          <p:cNvPr id="8" name="Picture 7">
+            <a:extLst>
+              <a:ext uri="{FF2B5EF4-FFF2-40B4-BE49-F238E27FC236}">
+                <a16:creationId xmlns:a16="http://schemas.microsoft.com/office/drawing/2014/main" id="{37BC0648-163E-E401-C70A-0BF56DA56F2E}"/>
+              </a:ext>
+            </a:extLst>
+          </p:cNvPr>
+          <p:cNvPicPr>
+            <a:picLocks noChangeAspect="1"/>
+          </p:cNvPicPr>
+          <p:nvPr/>
+        </p:nvPicPr>
+        <p:blipFill>
+          <a:blip r:embed="rId4">
+            <a:extLst>
+              <a:ext uri="{28A0092B-C50C-407E-A947-70E740481C1C}">
+                <a14:useLocalDpi xmlns:a14="http://schemas.microsoft.com/office/drawing/2010/main" val="0"/>
+              </a:ext>
+            </a:extLst>
+          </a:blip>
+          <a:stretch>
+            <a:fillRect/>
+          </a:stretch>
+        </p:blipFill>
+        <p:spPr>
+          <a:xfrm>
+            <a:off x="303512" y="2654224"/>
+            <a:ext cx="4157451" cy="3990876"/>
+          </a:xfrm>
+          <a:prstGeom prst="rect">
+            <a:avLst/>
+          </a:prstGeom>
+        </p:spPr>
+      </p:pic>
+      <p:sp>
+        <p:nvSpPr>
+          <p:cNvPr id="17" name="Arc 16">
+            <a:extLst>
+              <a:ext uri="{FF2B5EF4-FFF2-40B4-BE49-F238E27FC236}">
+                <a16:creationId xmlns:a16="http://schemas.microsoft.com/office/drawing/2014/main" id="{5580AE24-F8B0-F22E-83A2-E2E86C6E9393}"/>
+              </a:ext>
+            </a:extLst>
+          </p:cNvPr>
+          <p:cNvSpPr/>
+          <p:nvPr/>
+        </p:nvSpPr>
+        <p:spPr>
+          <a:xfrm>
+            <a:off x="9145689" y="2306188"/>
+            <a:ext cx="380724" cy="748855"/>
+          </a:xfrm>
+          <a:prstGeom prst="arc">
+            <a:avLst>
+              <a:gd name="adj1" fmla="val 4823677"/>
+              <a:gd name="adj2" fmla="val 21139031"/>
+            </a:avLst>
+          </a:prstGeom>
+          <a:ln w="50800">
+            <a:solidFill>
+              <a:srgbClr val="FF0000"/>
+            </a:solidFill>
+            <a:tailEnd type="triangle" w="med" len="med"/>
+          </a:ln>
+        </p:spPr>
+        <p:style>
+          <a:lnRef idx="2">
+            <a:schemeClr val="accent1"/>
+          </a:lnRef>
+          <a:fillRef idx="0">
+            <a:schemeClr val="accent1"/>
+          </a:fillRef>
+          <a:effectRef idx="1">
+            <a:schemeClr val="accent1"/>
+          </a:effectRef>
+          <a:fontRef idx="minor">
+            <a:schemeClr val="tx1"/>
+          </a:fontRef>
+        </p:style>
+        <p:txBody>
+          <a:bodyPr rtlCol="0" anchor="ctr"/>
+          <a:lstStyle/>
+          <a:p>
+            <a:pPr algn="ctr"/>
+            <a:endParaRPr lang="en-US"/>
+          </a:p>
+        </p:txBody>
+      </p:sp>
+      <p:grpSp>
+        <p:nvGrpSpPr>
+          <p:cNvPr id="27" name="Group 26">
+            <a:extLst>
+              <a:ext uri="{FF2B5EF4-FFF2-40B4-BE49-F238E27FC236}">
+                <a16:creationId xmlns:a16="http://schemas.microsoft.com/office/drawing/2014/main" id="{A77EAF1D-D342-1BB3-BC4D-955B7404B771}"/>
+              </a:ext>
+            </a:extLst>
+          </p:cNvPr>
+          <p:cNvGrpSpPr/>
+          <p:nvPr/>
+        </p:nvGrpSpPr>
+        <p:grpSpPr>
+          <a:xfrm>
+            <a:off x="9013379" y="2760638"/>
+            <a:ext cx="1173849" cy="212437"/>
+            <a:chOff x="1266168" y="5467926"/>
+            <a:chExt cx="1173849" cy="212437"/>
+          </a:xfrm>
+        </p:grpSpPr>
+        <p:sp>
+          <p:nvSpPr>
+            <p:cNvPr id="18" name="Arc 17">
+              <a:extLst>
+                <a:ext uri="{FF2B5EF4-FFF2-40B4-BE49-F238E27FC236}">
+                  <a16:creationId xmlns:a16="http://schemas.microsoft.com/office/drawing/2014/main" id="{47F33AFA-AFF5-5B48-3982-D5FE70461001}"/>
+                </a:ext>
+              </a:extLst>
+            </p:cNvPr>
+            <p:cNvSpPr/>
+            <p:nvPr/>
+          </p:nvSpPr>
+          <p:spPr>
+            <a:xfrm>
+              <a:off x="1266168" y="5467926"/>
+              <a:ext cx="1173849" cy="212437"/>
+            </a:xfrm>
+            <a:prstGeom prst="arc">
+              <a:avLst>
+                <a:gd name="adj1" fmla="val 5749682"/>
+                <a:gd name="adj2" fmla="val 11706270"/>
+              </a:avLst>
+            </a:prstGeom>
+            <a:ln w="50800">
+              <a:solidFill>
+                <a:srgbClr val="00FF00"/>
+              </a:solidFill>
+              <a:headEnd type="none"/>
+              <a:tailEnd type="none" w="med" len="med"/>
+            </a:ln>
+          </p:spPr>
+          <p:style>
+            <a:lnRef idx="2">
+              <a:schemeClr val="accent1"/>
+            </a:lnRef>
+            <a:fillRef idx="0">
+              <a:schemeClr val="accent1"/>
+            </a:fillRef>
+            <a:effectRef idx="1">
+              <a:schemeClr val="accent1"/>
+            </a:effectRef>
+            <a:fontRef idx="minor">
+              <a:schemeClr val="tx1"/>
+            </a:fontRef>
+          </p:style>
+          <p:txBody>
+            <a:bodyPr rtlCol="0" anchor="ctr"/>
+            <a:lstStyle/>
+            <a:p>
+              <a:pPr algn="ctr"/>
+              <a:endParaRPr lang="en-US"/>
+            </a:p>
+          </p:txBody>
+        </p:sp>
+        <p:sp>
+          <p:nvSpPr>
+            <p:cNvPr id="19" name="Arc 18">
+              <a:extLst>
+                <a:ext uri="{FF2B5EF4-FFF2-40B4-BE49-F238E27FC236}">
+                  <a16:creationId xmlns:a16="http://schemas.microsoft.com/office/drawing/2014/main" id="{36B7E16E-8C3E-33B7-8AA4-CA02BD5A6698}"/>
+                </a:ext>
+              </a:extLst>
+            </p:cNvPr>
+            <p:cNvSpPr/>
+            <p:nvPr/>
+          </p:nvSpPr>
+          <p:spPr>
+            <a:xfrm>
+              <a:off x="1266168" y="5467926"/>
+              <a:ext cx="1173849" cy="212437"/>
+            </a:xfrm>
+            <a:prstGeom prst="arc">
+              <a:avLst>
+                <a:gd name="adj1" fmla="val 19903826"/>
+                <a:gd name="adj2" fmla="val 21229863"/>
+              </a:avLst>
+            </a:prstGeom>
+            <a:ln w="50800">
+              <a:solidFill>
+                <a:srgbClr val="00FF00"/>
+              </a:solidFill>
+              <a:headEnd type="none"/>
+              <a:tailEnd type="triangle" w="med" len="med"/>
+            </a:ln>
+          </p:spPr>
+          <p:style>
+            <a:lnRef idx="2">
+              <a:schemeClr val="accent1"/>
+            </a:lnRef>
+            <a:fillRef idx="0">
+              <a:schemeClr val="accent1"/>
+            </a:fillRef>
+            <a:effectRef idx="1">
+              <a:schemeClr val="accent1"/>
+            </a:effectRef>
+            <a:fontRef idx="minor">
+              <a:schemeClr val="tx1"/>
+            </a:fontRef>
+          </p:style>
+          <p:txBody>
+            <a:bodyPr rtlCol="0" anchor="ctr"/>
+            <a:lstStyle/>
+            <a:p>
+              <a:pPr algn="ctr"/>
+              <a:endParaRPr lang="en-US"/>
+            </a:p>
+          </p:txBody>
+        </p:sp>
+      </p:grpSp>
+      <p:grpSp>
+        <p:nvGrpSpPr>
+          <p:cNvPr id="28" name="Group 27">
+            <a:extLst>
+              <a:ext uri="{FF2B5EF4-FFF2-40B4-BE49-F238E27FC236}">
+                <a16:creationId xmlns:a16="http://schemas.microsoft.com/office/drawing/2014/main" id="{D0C554AF-F63F-905B-4130-C63997043284}"/>
+              </a:ext>
+            </a:extLst>
+          </p:cNvPr>
+          <p:cNvGrpSpPr/>
+          <p:nvPr/>
+        </p:nvGrpSpPr>
+        <p:grpSpPr>
+          <a:xfrm>
+            <a:off x="1167573" y="4526279"/>
+            <a:ext cx="1330867" cy="947661"/>
+            <a:chOff x="8682181" y="4533185"/>
+            <a:chExt cx="1330867" cy="947661"/>
+          </a:xfrm>
+        </p:grpSpPr>
+        <p:sp>
+          <p:nvSpPr>
+            <p:cNvPr id="21" name="Arc 20">
+              <a:extLst>
+                <a:ext uri="{FF2B5EF4-FFF2-40B4-BE49-F238E27FC236}">
+                  <a16:creationId xmlns:a16="http://schemas.microsoft.com/office/drawing/2014/main" id="{6EE6D35C-AB6A-CDF1-56D8-B7995EE2950D}"/>
+                </a:ext>
+              </a:extLst>
+            </p:cNvPr>
+            <p:cNvSpPr/>
+            <p:nvPr/>
+          </p:nvSpPr>
+          <p:spPr>
+            <a:xfrm>
+              <a:off x="8682181" y="4533185"/>
+              <a:ext cx="1330867" cy="934741"/>
+            </a:xfrm>
+            <a:prstGeom prst="arc">
+              <a:avLst>
+                <a:gd name="adj1" fmla="val 19012440"/>
+                <a:gd name="adj2" fmla="val 2278130"/>
+              </a:avLst>
+            </a:prstGeom>
+            <a:ln w="50800">
+              <a:solidFill>
+                <a:srgbClr val="00FF00"/>
+              </a:solidFill>
+              <a:headEnd type="none"/>
+              <a:tailEnd type="triangle" w="med" len="med"/>
+            </a:ln>
+          </p:spPr>
+          <p:style>
+            <a:lnRef idx="2">
+              <a:schemeClr val="accent1"/>
+            </a:lnRef>
+            <a:fillRef idx="0">
+              <a:schemeClr val="accent1"/>
+            </a:fillRef>
+            <a:effectRef idx="1">
+              <a:schemeClr val="accent1"/>
+            </a:effectRef>
+            <a:fontRef idx="minor">
+              <a:schemeClr val="tx1"/>
+            </a:fontRef>
+          </p:style>
+          <p:txBody>
+            <a:bodyPr rtlCol="0" anchor="ctr"/>
+            <a:lstStyle/>
+            <a:p>
+              <a:pPr algn="ctr"/>
+              <a:endParaRPr lang="en-US"/>
+            </a:p>
+          </p:txBody>
+        </p:sp>
+        <p:sp>
+          <p:nvSpPr>
+            <p:cNvPr id="22" name="Arc 21">
+              <a:extLst>
+                <a:ext uri="{FF2B5EF4-FFF2-40B4-BE49-F238E27FC236}">
+                  <a16:creationId xmlns:a16="http://schemas.microsoft.com/office/drawing/2014/main" id="{97BE462A-94A3-3B09-6FF2-887D660587B2}"/>
+                </a:ext>
+              </a:extLst>
+            </p:cNvPr>
+            <p:cNvSpPr/>
+            <p:nvPr/>
+          </p:nvSpPr>
+          <p:spPr>
+            <a:xfrm>
+              <a:off x="8682181" y="4546105"/>
+              <a:ext cx="1330867" cy="934741"/>
+            </a:xfrm>
+            <a:prstGeom prst="arc">
+              <a:avLst>
+                <a:gd name="adj1" fmla="val 5962913"/>
+                <a:gd name="adj2" fmla="val 14791355"/>
+              </a:avLst>
+            </a:prstGeom>
+            <a:ln w="50800">
+              <a:solidFill>
+                <a:srgbClr val="00FF00"/>
+              </a:solidFill>
+              <a:headEnd type="none"/>
+              <a:tailEnd type="none" w="med" len="med"/>
+            </a:ln>
+          </p:spPr>
+          <p:style>
+            <a:lnRef idx="2">
+              <a:schemeClr val="accent1"/>
+            </a:lnRef>
+            <a:fillRef idx="0">
+              <a:schemeClr val="accent1"/>
+            </a:fillRef>
+            <a:effectRef idx="1">
+              <a:schemeClr val="accent1"/>
+            </a:effectRef>
+            <a:fontRef idx="minor">
+              <a:schemeClr val="tx1"/>
+            </a:fontRef>
+          </p:style>
+          <p:txBody>
+            <a:bodyPr rtlCol="0" anchor="ctr"/>
+            <a:lstStyle/>
+            <a:p>
+              <a:pPr algn="ctr"/>
+              <a:endParaRPr lang="en-US"/>
+            </a:p>
+          </p:txBody>
+        </p:sp>
+      </p:grpSp>
+      <p:grpSp>
+        <p:nvGrpSpPr>
+          <p:cNvPr id="29" name="Group 28">
+            <a:extLst>
+              <a:ext uri="{FF2B5EF4-FFF2-40B4-BE49-F238E27FC236}">
+                <a16:creationId xmlns:a16="http://schemas.microsoft.com/office/drawing/2014/main" id="{5BA329BA-44E2-4924-DD01-EA1F86A41493}"/>
+              </a:ext>
+            </a:extLst>
+          </p:cNvPr>
+          <p:cNvGrpSpPr/>
+          <p:nvPr/>
+        </p:nvGrpSpPr>
+        <p:grpSpPr>
+          <a:xfrm>
+            <a:off x="1563906" y="4151851"/>
+            <a:ext cx="294086" cy="761775"/>
+            <a:chOff x="9078514" y="4158757"/>
+            <a:chExt cx="294086" cy="761775"/>
+          </a:xfrm>
+        </p:grpSpPr>
+        <p:sp>
+          <p:nvSpPr>
+            <p:cNvPr id="23" name="Arc 22">
+              <a:extLst>
+                <a:ext uri="{FF2B5EF4-FFF2-40B4-BE49-F238E27FC236}">
+                  <a16:creationId xmlns:a16="http://schemas.microsoft.com/office/drawing/2014/main" id="{7C22849A-6849-86A7-82F2-FB6FCEC3C17E}"/>
+                </a:ext>
+              </a:extLst>
+            </p:cNvPr>
+            <p:cNvSpPr/>
+            <p:nvPr/>
+          </p:nvSpPr>
+          <p:spPr>
+            <a:xfrm>
+              <a:off x="9078515" y="4158757"/>
+              <a:ext cx="294085" cy="748855"/>
+            </a:xfrm>
+            <a:prstGeom prst="arc">
+              <a:avLst>
+                <a:gd name="adj1" fmla="val 4823677"/>
+                <a:gd name="adj2" fmla="val 12959237"/>
+              </a:avLst>
+            </a:prstGeom>
+            <a:ln w="50800">
+              <a:solidFill>
+                <a:srgbClr val="FF0000"/>
+              </a:solidFill>
+              <a:tailEnd type="none" w="med" len="med"/>
+            </a:ln>
+          </p:spPr>
+          <p:style>
+            <a:lnRef idx="2">
+              <a:schemeClr val="accent1"/>
+            </a:lnRef>
+            <a:fillRef idx="0">
+              <a:schemeClr val="accent1"/>
+            </a:fillRef>
+            <a:effectRef idx="1">
+              <a:schemeClr val="accent1"/>
+            </a:effectRef>
+            <a:fontRef idx="minor">
+              <a:schemeClr val="tx1"/>
+            </a:fontRef>
+          </p:style>
+          <p:txBody>
+            <a:bodyPr rtlCol="0" anchor="ctr"/>
+            <a:lstStyle/>
+            <a:p>
+              <a:pPr algn="ctr"/>
+              <a:endParaRPr lang="en-US"/>
+            </a:p>
+          </p:txBody>
+        </p:sp>
+        <p:sp>
+          <p:nvSpPr>
+            <p:cNvPr id="24" name="Arc 23">
+              <a:extLst>
+                <a:ext uri="{FF2B5EF4-FFF2-40B4-BE49-F238E27FC236}">
+                  <a16:creationId xmlns:a16="http://schemas.microsoft.com/office/drawing/2014/main" id="{D044B286-D483-0596-8F2D-C1F8C1753A94}"/>
+                </a:ext>
+              </a:extLst>
+            </p:cNvPr>
+            <p:cNvSpPr/>
+            <p:nvPr/>
+          </p:nvSpPr>
+          <p:spPr>
+            <a:xfrm>
+              <a:off x="9078514" y="4171677"/>
+              <a:ext cx="294085" cy="748855"/>
+            </a:xfrm>
+            <a:prstGeom prst="arc">
+              <a:avLst>
+                <a:gd name="adj1" fmla="val 18412206"/>
+                <a:gd name="adj2" fmla="val 2964496"/>
+              </a:avLst>
+            </a:prstGeom>
+            <a:ln w="50800">
+              <a:solidFill>
+                <a:srgbClr val="FF0000"/>
+              </a:solidFill>
+              <a:tailEnd type="triangle" w="med" len="med"/>
+            </a:ln>
+          </p:spPr>
+          <p:style>
+            <a:lnRef idx="2">
+              <a:schemeClr val="accent1"/>
+            </a:lnRef>
+            <a:fillRef idx="0">
+              <a:schemeClr val="accent1"/>
+            </a:fillRef>
+            <a:effectRef idx="1">
+              <a:schemeClr val="accent1"/>
+            </a:effectRef>
+            <a:fontRef idx="minor">
+              <a:schemeClr val="tx1"/>
+            </a:fontRef>
+          </p:style>
+          <p:txBody>
+            <a:bodyPr rtlCol="0" anchor="ctr"/>
+            <a:lstStyle/>
+            <a:p>
+              <a:pPr algn="ctr"/>
+              <a:endParaRPr lang="en-US"/>
+            </a:p>
+          </p:txBody>
+        </p:sp>
+      </p:grpSp>
+      <p:sp>
+        <p:nvSpPr>
+          <p:cNvPr id="25" name="TextBox 24">
+            <a:extLst>
+              <a:ext uri="{FF2B5EF4-FFF2-40B4-BE49-F238E27FC236}">
+                <a16:creationId xmlns:a16="http://schemas.microsoft.com/office/drawing/2014/main" id="{7BC296F3-ADEB-5C0F-B0E2-D4F8D4415AD6}"/>
+              </a:ext>
+            </a:extLst>
+          </p:cNvPr>
+          <p:cNvSpPr txBox="1"/>
+          <p:nvPr/>
+        </p:nvSpPr>
+        <p:spPr>
+          <a:xfrm>
+            <a:off x="7963640" y="205995"/>
+            <a:ext cx="3924848" cy="461665"/>
+          </a:xfrm>
+          <a:prstGeom prst="rect">
+            <a:avLst/>
+          </a:prstGeom>
+          <a:noFill/>
+        </p:spPr>
+        <p:txBody>
+          <a:bodyPr wrap="square" rtlCol="0">
+            <a:spAutoFit/>
+          </a:bodyPr>
+          <a:lstStyle/>
+          <a:p>
+            <a:r>
+              <a:rPr lang="en-US" sz="2400" dirty="0"/>
+              <a:t>Security Camera</a:t>
+            </a:r>
+          </a:p>
+        </p:txBody>
+      </p:sp>
+      <p:sp>
+        <p:nvSpPr>
+          <p:cNvPr id="26" name="TextBox 25">
+            <a:extLst>
+              <a:ext uri="{FF2B5EF4-FFF2-40B4-BE49-F238E27FC236}">
+                <a16:creationId xmlns:a16="http://schemas.microsoft.com/office/drawing/2014/main" id="{F9726032-E676-6FD8-552A-4C136ED31022}"/>
+              </a:ext>
+            </a:extLst>
+          </p:cNvPr>
+          <p:cNvSpPr txBox="1"/>
+          <p:nvPr/>
+        </p:nvSpPr>
+        <p:spPr>
+          <a:xfrm>
+            <a:off x="303511" y="2192559"/>
+            <a:ext cx="4157451" cy="461665"/>
+          </a:xfrm>
+          <a:prstGeom prst="rect">
+            <a:avLst/>
+          </a:prstGeom>
+          <a:noFill/>
+        </p:spPr>
+        <p:txBody>
+          <a:bodyPr wrap="square" rtlCol="0">
+            <a:spAutoFit/>
+          </a:bodyPr>
+          <a:lstStyle/>
+          <a:p>
+            <a:r>
+              <a:rPr lang="en-US" sz="2400" dirty="0"/>
+              <a:t>Laser Turret</a:t>
+            </a:r>
+          </a:p>
+        </p:txBody>
+      </p:sp>
+      <p:sp>
+        <p:nvSpPr>
+          <p:cNvPr id="30" name="TextBox 29">
+            <a:extLst>
+              <a:ext uri="{FF2B5EF4-FFF2-40B4-BE49-F238E27FC236}">
+                <a16:creationId xmlns:a16="http://schemas.microsoft.com/office/drawing/2014/main" id="{75FF37ED-21DB-C53E-09D3-E556B1D6DFD6}"/>
+              </a:ext>
+            </a:extLst>
+          </p:cNvPr>
+          <p:cNvSpPr txBox="1"/>
+          <p:nvPr/>
+        </p:nvSpPr>
+        <p:spPr>
+          <a:xfrm>
+            <a:off x="5630837" y="4526278"/>
+            <a:ext cx="6257652" cy="1569660"/>
+          </a:xfrm>
+          <a:prstGeom prst="rect">
+            <a:avLst/>
+          </a:prstGeom>
+          <a:noFill/>
+        </p:spPr>
+        <p:txBody>
+          <a:bodyPr wrap="square" rtlCol="0">
+            <a:spAutoFit/>
+          </a:bodyPr>
+          <a:lstStyle/>
+          <a:p>
+            <a:r>
+              <a:rPr lang="en-US" sz="2400" dirty="0"/>
+              <a:t>They only have 2 degrees of freedom</a:t>
+            </a:r>
+          </a:p>
+          <a:p>
+            <a:r>
+              <a:rPr lang="en-US" sz="2400" dirty="0"/>
+              <a:t>Physically, Specifically</a:t>
+            </a:r>
+          </a:p>
+          <a:p>
+            <a:pPr marL="342900" indent="-342900">
+              <a:buFont typeface="Arial" panose="020B0604020202020204" pitchFamily="34" charset="0"/>
+              <a:buChar char="•"/>
+            </a:pPr>
+            <a:r>
+              <a:rPr lang="en-US" sz="2400" dirty="0"/>
+              <a:t>Azimuth (Yaw)</a:t>
+            </a:r>
+          </a:p>
+          <a:p>
+            <a:pPr marL="342900" indent="-342900">
+              <a:buFont typeface="Arial" panose="020B0604020202020204" pitchFamily="34" charset="0"/>
+              <a:buChar char="•"/>
+            </a:pPr>
+            <a:r>
+              <a:rPr lang="en-US" sz="2400" dirty="0"/>
+              <a:t>Altitude/Elevation (Pitch)</a:t>
+            </a:r>
+          </a:p>
+        </p:txBody>
+      </p:sp>
+    </p:spTree>
+    <p:extLst>
+      <p:ext uri="{BB962C8B-B14F-4D97-AF65-F5344CB8AC3E}">
+        <p14:creationId xmlns:p14="http://schemas.microsoft.com/office/powerpoint/2010/main" val="556293377"/>
+      </p:ext>
+    </p:extLst>
+  </p:cSld>
+  <p:clrMapOvr>
+    <a:masterClrMapping/>
+  </p:clrMapOvr>
+  <p:timing>
+    <p:tnLst>
+      <p:par>
+        <p:cTn id="1" dur="indefinite" restart="never" nodeType="tmRoot">
+          <p:childTnLst>
+            <p:seq concurrent="1" nextAc="seek">
+              <p:cTn id="2" dur="indefinite" nodeType="mainSeq">
+                <p:childTnLst>
+                  <p:par>
+                    <p:cTn id="3" fill="hold">
+                      <p:stCondLst>
+                        <p:cond delay="indefinite"/>
+                      </p:stCondLst>
+                      <p:childTnLst>
+                        <p:par>
+                          <p:cTn id="4" fill="hold">
+                            <p:stCondLst>
+                              <p:cond delay="0"/>
+                            </p:stCondLst>
+                            <p:childTnLst>
+                              <p:par>
+                                <p:cTn id="5" presetID="42" presetClass="entr" presetSubtype="0" fill="hold" grpId="0" nodeType="clickEffect">
+                                  <p:stCondLst>
+                                    <p:cond delay="0"/>
+                                  </p:stCondLst>
+                                  <p:childTnLst>
+                                    <p:set>
+                                      <p:cBhvr>
+                                        <p:cTn id="6" dur="1" fill="hold">
+                                          <p:stCondLst>
+                                            <p:cond delay="0"/>
+                                          </p:stCondLst>
+                                        </p:cTn>
+                                        <p:tgtEl>
+                                          <p:spTgt spid="30"/>
+                                        </p:tgtEl>
+                                        <p:attrNameLst>
+                                          <p:attrName>style.visibility</p:attrName>
+                                        </p:attrNameLst>
+                                      </p:cBhvr>
+                                      <p:to>
+                                        <p:strVal val="visible"/>
+                                      </p:to>
+                                    </p:set>
+                                    <p:animEffect transition="in" filter="fade">
+                                      <p:cBhvr>
+                                        <p:cTn id="7" dur="1000"/>
+                                        <p:tgtEl>
+                                          <p:spTgt spid="30"/>
+                                        </p:tgtEl>
+                                      </p:cBhvr>
+                                    </p:animEffect>
+                                    <p:anim calcmode="lin" valueType="num">
+                                      <p:cBhvr>
+                                        <p:cTn id="8" dur="1000" fill="hold"/>
+                                        <p:tgtEl>
+                                          <p:spTgt spid="30"/>
+                                        </p:tgtEl>
+                                        <p:attrNameLst>
+                                          <p:attrName>ppt_x</p:attrName>
+                                        </p:attrNameLst>
+                                      </p:cBhvr>
+                                      <p:tavLst>
+                                        <p:tav tm="0">
+                                          <p:val>
+                                            <p:strVal val="#ppt_x"/>
+                                          </p:val>
+                                        </p:tav>
+                                        <p:tav tm="100000">
+                                          <p:val>
+                                            <p:strVal val="#ppt_x"/>
+                                          </p:val>
+                                        </p:tav>
+                                      </p:tavLst>
+                                    </p:anim>
+                                    <p:anim calcmode="lin" valueType="num">
+                                      <p:cBhvr>
+                                        <p:cTn id="9" dur="1000" fill="hold"/>
+                                        <p:tgtEl>
+                                          <p:spTgt spid="30"/>
+                                        </p:tgtEl>
+                                        <p:attrNameLst>
+                                          <p:attrName>ppt_y</p:attrName>
+                                        </p:attrNameLst>
+                                      </p:cBhvr>
+                                      <p:tavLst>
+                                        <p:tav tm="0">
+                                          <p:val>
+                                            <p:strVal val="#ppt_y+.1"/>
+                                          </p:val>
+                                        </p:tav>
+                                        <p:tav tm="100000">
+                                          <p:val>
+                                            <p:strVal val="#ppt_y"/>
+                                          </p:val>
+                                        </p:tav>
+                                      </p:tavLst>
+                                    </p:anim>
+                                  </p:childTnLst>
+                                </p:cTn>
+                              </p:par>
+                            </p:childTnLst>
+                          </p:cTn>
+                        </p:par>
+                      </p:childTnLst>
+                    </p:cTn>
+                  </p:par>
+                  <p:par>
+                    <p:cTn id="10" fill="hold">
+                      <p:stCondLst>
+                        <p:cond delay="indefinite"/>
+                      </p:stCondLst>
+                      <p:childTnLst>
+                        <p:par>
+                          <p:cTn id="11" fill="hold">
+                            <p:stCondLst>
+                              <p:cond delay="0"/>
+                            </p:stCondLst>
+                            <p:childTnLst>
+                              <p:par>
+                                <p:cTn id="12" presetID="2" presetClass="entr" presetSubtype="4" fill="hold" nodeType="clickEffect">
+                                  <p:stCondLst>
+                                    <p:cond delay="0"/>
+                                  </p:stCondLst>
+                                  <p:childTnLst>
+                                    <p:set>
+                                      <p:cBhvr>
+                                        <p:cTn id="13" dur="1" fill="hold">
+                                          <p:stCondLst>
+                                            <p:cond delay="0"/>
+                                          </p:stCondLst>
+                                        </p:cTn>
+                                        <p:tgtEl>
+                                          <p:spTgt spid="27"/>
+                                        </p:tgtEl>
+                                        <p:attrNameLst>
+                                          <p:attrName>style.visibility</p:attrName>
+                                        </p:attrNameLst>
+                                      </p:cBhvr>
+                                      <p:to>
+                                        <p:strVal val="visible"/>
+                                      </p:to>
+                                    </p:set>
+                                    <p:anim calcmode="lin" valueType="num">
+                                      <p:cBhvr additive="base">
+                                        <p:cTn id="14" dur="500" fill="hold"/>
+                                        <p:tgtEl>
+                                          <p:spTgt spid="27"/>
+                                        </p:tgtEl>
+                                        <p:attrNameLst>
+                                          <p:attrName>ppt_x</p:attrName>
+                                        </p:attrNameLst>
+                                      </p:cBhvr>
+                                      <p:tavLst>
+                                        <p:tav tm="0">
+                                          <p:val>
+                                            <p:strVal val="#ppt_x"/>
+                                          </p:val>
+                                        </p:tav>
+                                        <p:tav tm="100000">
+                                          <p:val>
+                                            <p:strVal val="#ppt_x"/>
+                                          </p:val>
+                                        </p:tav>
+                                      </p:tavLst>
+                                    </p:anim>
+                                    <p:anim calcmode="lin" valueType="num">
+                                      <p:cBhvr additive="base">
+                                        <p:cTn id="15" dur="500" fill="hold"/>
+                                        <p:tgtEl>
+                                          <p:spTgt spid="27"/>
+                                        </p:tgtEl>
+                                        <p:attrNameLst>
+                                          <p:attrName>ppt_y</p:attrName>
+                                        </p:attrNameLst>
+                                      </p:cBhvr>
+                                      <p:tavLst>
+                                        <p:tav tm="0">
+                                          <p:val>
+                                            <p:strVal val="1+#ppt_h/2"/>
+                                          </p:val>
+                                        </p:tav>
+                                        <p:tav tm="100000">
+                                          <p:val>
+                                            <p:strVal val="#ppt_y"/>
+                                          </p:val>
+                                        </p:tav>
+                                      </p:tavLst>
+                                    </p:anim>
+                                  </p:childTnLst>
+                                </p:cTn>
+                              </p:par>
+                            </p:childTnLst>
+                          </p:cTn>
+                        </p:par>
+                      </p:childTnLst>
+                    </p:cTn>
+                  </p:par>
+                  <p:par>
+                    <p:cTn id="16" fill="hold">
+                      <p:stCondLst>
+                        <p:cond delay="indefinite"/>
+                      </p:stCondLst>
+                      <p:childTnLst>
+                        <p:par>
+                          <p:cTn id="17" fill="hold">
+                            <p:stCondLst>
+                              <p:cond delay="0"/>
+                            </p:stCondLst>
+                            <p:childTnLst>
+                              <p:par>
+                                <p:cTn id="18" presetID="2" presetClass="entr" presetSubtype="8" fill="hold" grpId="0" nodeType="clickEffect">
+                                  <p:stCondLst>
+                                    <p:cond delay="0"/>
+                                  </p:stCondLst>
+                                  <p:childTnLst>
+                                    <p:set>
+                                      <p:cBhvr>
+                                        <p:cTn id="19" dur="1" fill="hold">
+                                          <p:stCondLst>
+                                            <p:cond delay="0"/>
+                                          </p:stCondLst>
+                                        </p:cTn>
+                                        <p:tgtEl>
+                                          <p:spTgt spid="17"/>
+                                        </p:tgtEl>
+                                        <p:attrNameLst>
+                                          <p:attrName>style.visibility</p:attrName>
+                                        </p:attrNameLst>
+                                      </p:cBhvr>
+                                      <p:to>
+                                        <p:strVal val="visible"/>
+                                      </p:to>
+                                    </p:set>
+                                    <p:anim calcmode="lin" valueType="num">
+                                      <p:cBhvr additive="base">
+                                        <p:cTn id="20" dur="500" fill="hold"/>
+                                        <p:tgtEl>
+                                          <p:spTgt spid="17"/>
+                                        </p:tgtEl>
+                                        <p:attrNameLst>
+                                          <p:attrName>ppt_x</p:attrName>
+                                        </p:attrNameLst>
+                                      </p:cBhvr>
+                                      <p:tavLst>
+                                        <p:tav tm="0">
+                                          <p:val>
+                                            <p:strVal val="0-#ppt_w/2"/>
+                                          </p:val>
+                                        </p:tav>
+                                        <p:tav tm="100000">
+                                          <p:val>
+                                            <p:strVal val="#ppt_x"/>
+                                          </p:val>
+                                        </p:tav>
+                                      </p:tavLst>
+                                    </p:anim>
+                                    <p:anim calcmode="lin" valueType="num">
+                                      <p:cBhvr additive="base">
+                                        <p:cTn id="21" dur="500" fill="hold"/>
+                                        <p:tgtEl>
+                                          <p:spTgt spid="17"/>
+                                        </p:tgtEl>
+                                        <p:attrNameLst>
+                                          <p:attrName>ppt_y</p:attrName>
+                                        </p:attrNameLst>
+                                      </p:cBhvr>
+                                      <p:tavLst>
+                                        <p:tav tm="0">
+                                          <p:val>
+                                            <p:strVal val="#ppt_y"/>
+                                          </p:val>
+                                        </p:tav>
+                                        <p:tav tm="100000">
+                                          <p:val>
+                                            <p:strVal val="#ppt_y"/>
+                                          </p:val>
+                                        </p:tav>
+                                      </p:tavLst>
+                                    </p:anim>
+                                  </p:childTnLst>
+                                </p:cTn>
+                              </p:par>
+                            </p:childTnLst>
+                          </p:cTn>
+                        </p:par>
+                      </p:childTnLst>
+                    </p:cTn>
+                  </p:par>
+                  <p:par>
+                    <p:cTn id="22" fill="hold">
+                      <p:stCondLst>
+                        <p:cond delay="indefinite"/>
+                      </p:stCondLst>
+                      <p:childTnLst>
+                        <p:par>
+                          <p:cTn id="23" fill="hold">
+                            <p:stCondLst>
+                              <p:cond delay="0"/>
+                            </p:stCondLst>
+                            <p:childTnLst>
+                              <p:par>
+                                <p:cTn id="24" presetID="2" presetClass="entr" presetSubtype="4" fill="hold" nodeType="clickEffect">
+                                  <p:stCondLst>
+                                    <p:cond delay="0"/>
+                                  </p:stCondLst>
+                                  <p:childTnLst>
+                                    <p:set>
+                                      <p:cBhvr>
+                                        <p:cTn id="25" dur="1" fill="hold">
+                                          <p:stCondLst>
+                                            <p:cond delay="0"/>
+                                          </p:stCondLst>
+                                        </p:cTn>
+                                        <p:tgtEl>
+                                          <p:spTgt spid="28"/>
+                                        </p:tgtEl>
+                                        <p:attrNameLst>
+                                          <p:attrName>style.visibility</p:attrName>
+                                        </p:attrNameLst>
+                                      </p:cBhvr>
+                                      <p:to>
+                                        <p:strVal val="visible"/>
+                                      </p:to>
+                                    </p:set>
+                                    <p:anim calcmode="lin" valueType="num">
+                                      <p:cBhvr additive="base">
+                                        <p:cTn id="26" dur="500" fill="hold"/>
+                                        <p:tgtEl>
+                                          <p:spTgt spid="28"/>
+                                        </p:tgtEl>
+                                        <p:attrNameLst>
+                                          <p:attrName>ppt_x</p:attrName>
+                                        </p:attrNameLst>
+                                      </p:cBhvr>
+                                      <p:tavLst>
+                                        <p:tav tm="0">
+                                          <p:val>
+                                            <p:strVal val="#ppt_x"/>
+                                          </p:val>
+                                        </p:tav>
+                                        <p:tav tm="100000">
+                                          <p:val>
+                                            <p:strVal val="#ppt_x"/>
+                                          </p:val>
+                                        </p:tav>
+                                      </p:tavLst>
+                                    </p:anim>
+                                    <p:anim calcmode="lin" valueType="num">
+                                      <p:cBhvr additive="base">
+                                        <p:cTn id="27" dur="500" fill="hold"/>
+                                        <p:tgtEl>
+                                          <p:spTgt spid="28"/>
+                                        </p:tgtEl>
+                                        <p:attrNameLst>
+                                          <p:attrName>ppt_y</p:attrName>
+                                        </p:attrNameLst>
+                                      </p:cBhvr>
+                                      <p:tavLst>
+                                        <p:tav tm="0">
+                                          <p:val>
+                                            <p:strVal val="1+#ppt_h/2"/>
+                                          </p:val>
+                                        </p:tav>
+                                        <p:tav tm="100000">
+                                          <p:val>
+                                            <p:strVal val="#ppt_y"/>
+                                          </p:val>
+                                        </p:tav>
+                                      </p:tavLst>
+                                    </p:anim>
+                                  </p:childTnLst>
+                                </p:cTn>
+                              </p:par>
+                            </p:childTnLst>
+                          </p:cTn>
+                        </p:par>
+                      </p:childTnLst>
+                    </p:cTn>
+                  </p:par>
+                  <p:par>
+                    <p:cTn id="28" fill="hold">
+                      <p:stCondLst>
+                        <p:cond delay="indefinite"/>
+                      </p:stCondLst>
+                      <p:childTnLst>
+                        <p:par>
+                          <p:cTn id="29" fill="hold">
+                            <p:stCondLst>
+                              <p:cond delay="0"/>
+                            </p:stCondLst>
+                            <p:childTnLst>
+                              <p:par>
+                                <p:cTn id="30" presetID="2" presetClass="entr" presetSubtype="8" fill="hold" nodeType="clickEffect">
+                                  <p:stCondLst>
+                                    <p:cond delay="0"/>
+                                  </p:stCondLst>
+                                  <p:childTnLst>
+                                    <p:set>
+                                      <p:cBhvr>
+                                        <p:cTn id="31" dur="1" fill="hold">
+                                          <p:stCondLst>
+                                            <p:cond delay="0"/>
+                                          </p:stCondLst>
+                                        </p:cTn>
+                                        <p:tgtEl>
+                                          <p:spTgt spid="29"/>
+                                        </p:tgtEl>
+                                        <p:attrNameLst>
+                                          <p:attrName>style.visibility</p:attrName>
+                                        </p:attrNameLst>
+                                      </p:cBhvr>
+                                      <p:to>
+                                        <p:strVal val="visible"/>
+                                      </p:to>
+                                    </p:set>
+                                    <p:anim calcmode="lin" valueType="num">
+                                      <p:cBhvr additive="base">
+                                        <p:cTn id="32" dur="500" fill="hold"/>
+                                        <p:tgtEl>
+                                          <p:spTgt spid="29"/>
+                                        </p:tgtEl>
+                                        <p:attrNameLst>
+                                          <p:attrName>ppt_x</p:attrName>
+                                        </p:attrNameLst>
+                                      </p:cBhvr>
+                                      <p:tavLst>
+                                        <p:tav tm="0">
+                                          <p:val>
+                                            <p:strVal val="0-#ppt_w/2"/>
+                                          </p:val>
+                                        </p:tav>
+                                        <p:tav tm="100000">
+                                          <p:val>
+                                            <p:strVal val="#ppt_x"/>
+                                          </p:val>
+                                        </p:tav>
+                                      </p:tavLst>
+                                    </p:anim>
+                                    <p:anim calcmode="lin" valueType="num">
+                                      <p:cBhvr additive="base">
+                                        <p:cTn id="33" dur="500" fill="hold"/>
+                                        <p:tgtEl>
+                                          <p:spTgt spid="29"/>
+                                        </p:tgtEl>
+                                        <p:attrNameLst>
+                                          <p:attrName>ppt_y</p:attrName>
+                                        </p:attrNameLst>
+                                      </p:cBhvr>
+                                      <p:tavLst>
+                                        <p:tav tm="0">
+                                          <p:val>
+                                            <p:strVal val="#ppt_y"/>
+                                          </p:val>
+                                        </p:tav>
+                                        <p:tav tm="100000">
+                                          <p:val>
+                                            <p:strVal val="#ppt_y"/>
+                                          </p:val>
+                                        </p:tav>
+                                      </p:tavLst>
+                                    </p:anim>
+                                  </p:childTnLst>
+                                </p:cTn>
+                              </p:par>
+                            </p:childTnLst>
+                          </p:cTn>
+                        </p:par>
+                      </p:childTnLst>
+                    </p:cTn>
+                  </p:par>
+                </p:childTnLst>
+              </p:cTn>
+              <p:prevCondLst>
+                <p:cond evt="onPrev" delay="0">
+                  <p:tgtEl>
+                    <p:sldTgt/>
+                  </p:tgtEl>
+                </p:cond>
+              </p:prevCondLst>
+              <p:nextCondLst>
+                <p:cond evt="onNext" delay="0">
+                  <p:tgtEl>
+                    <p:sldTgt/>
+                  </p:tgtEl>
+                </p:cond>
+              </p:nextCondLst>
+            </p:seq>
+          </p:childTnLst>
+        </p:cTn>
+      </p:par>
+    </p:tnLst>
+    <p:bldLst>
+      <p:bldP spid="17" grpId="0" animBg="1"/>
+      <p:bldP spid="30" grpId="0"/>
+    </p:bldLst>
+  </p:timing>
+</p:sld>
+</file>
+
+<file path=ppt/slides/slide6.xml><?xml version="1.0" encoding="utf-8"?>
+<p:sld xmlns:a="http://schemas.openxmlformats.org/drawingml/2006/main" xmlns:r="http://schemas.openxmlformats.org/officeDocument/2006/relationships" xmlns:p="http://schemas.openxmlformats.org/presentationml/2006/main">
+  <p:cSld>
+    <p:spTree>
+      <p:nvGrpSpPr>
+        <p:cNvPr id="1" name="">
+          <a:extLst>
+            <a:ext uri="{FF2B5EF4-FFF2-40B4-BE49-F238E27FC236}">
+              <a16:creationId xmlns:a16="http://schemas.microsoft.com/office/drawing/2014/main" id="{D4DD2C2F-1BEF-64EA-BC1A-A4B83574AB90}"/>
+            </a:ext>
+          </a:extLst>
+        </p:cNvPr>
+        <p:cNvGrpSpPr/>
+        <p:nvPr/>
+      </p:nvGrpSpPr>
+      <p:grpSpPr>
+        <a:xfrm>
+          <a:off x="0" y="0"/>
+          <a:ext cx="0" cy="0"/>
+          <a:chOff x="0" y="0"/>
+          <a:chExt cx="0" cy="0"/>
+        </a:xfrm>
+      </p:grpSpPr>
+      <p:sp>
+        <p:nvSpPr>
+          <p:cNvPr id="2" name="Title 1">
+            <a:extLst>
+              <a:ext uri="{FF2B5EF4-FFF2-40B4-BE49-F238E27FC236}">
+                <a16:creationId xmlns:a16="http://schemas.microsoft.com/office/drawing/2014/main" id="{26FCE092-94EA-3819-AA7C-98073DF75F37}"/>
+              </a:ext>
+            </a:extLst>
+          </p:cNvPr>
+          <p:cNvSpPr>
+            <a:spLocks noGrp="1"/>
+          </p:cNvSpPr>
+          <p:nvPr>
+            <p:ph type="title"/>
+          </p:nvPr>
+        </p:nvSpPr>
+        <p:spPr>
+          <a:xfrm>
+            <a:off x="838200" y="365125"/>
+            <a:ext cx="10515600" cy="719439"/>
+          </a:xfrm>
+        </p:spPr>
+        <p:txBody>
+          <a:bodyPr/>
+          <a:lstStyle/>
+          <a:p>
+            <a:r>
+              <a:rPr lang="en-US" dirty="0"/>
+              <a:t>Altazimuth (Az/El) Mounts</a:t>
+            </a:r>
+          </a:p>
+        </p:txBody>
+      </p:sp>
+      <p:sp>
+        <p:nvSpPr>
+          <p:cNvPr id="13" name="TextBox 12">
+            <a:extLst>
+              <a:ext uri="{FF2B5EF4-FFF2-40B4-BE49-F238E27FC236}">
+                <a16:creationId xmlns:a16="http://schemas.microsoft.com/office/drawing/2014/main" id="{AE374227-7470-4BB7-DC28-F702C5D6662C}"/>
+              </a:ext>
+            </a:extLst>
+          </p:cNvPr>
+          <p:cNvSpPr txBox="1"/>
+          <p:nvPr/>
+        </p:nvSpPr>
+        <p:spPr>
+          <a:xfrm>
+            <a:off x="553211" y="1084564"/>
+            <a:ext cx="4660415" cy="461665"/>
+          </a:xfrm>
+          <a:prstGeom prst="rect">
+            <a:avLst/>
+          </a:prstGeom>
+          <a:noFill/>
+        </p:spPr>
+        <p:txBody>
+          <a:bodyPr wrap="square" rtlCol="0">
+            <a:spAutoFit/>
+          </a:bodyPr>
+          <a:lstStyle/>
+          <a:p>
+            <a:pPr algn="ctr"/>
+            <a:r>
+              <a:rPr lang="en-US" sz="2400" dirty="0"/>
+              <a:t>Some Typical Game Scenarios</a:t>
+            </a:r>
+          </a:p>
+        </p:txBody>
+      </p:sp>
+      <p:sp>
+        <p:nvSpPr>
+          <p:cNvPr id="30" name="TextBox 29">
+            <a:extLst>
+              <a:ext uri="{FF2B5EF4-FFF2-40B4-BE49-F238E27FC236}">
+                <a16:creationId xmlns:a16="http://schemas.microsoft.com/office/drawing/2014/main" id="{1CDD4404-692A-7BF2-8415-DCFAA4561D13}"/>
+              </a:ext>
+            </a:extLst>
+          </p:cNvPr>
+          <p:cNvSpPr txBox="1"/>
+          <p:nvPr/>
+        </p:nvSpPr>
+        <p:spPr>
+          <a:xfrm>
+            <a:off x="309029" y="1692192"/>
+            <a:ext cx="5460835" cy="1569660"/>
+          </a:xfrm>
+          <a:prstGeom prst="rect">
+            <a:avLst/>
+          </a:prstGeom>
+          <a:noFill/>
+        </p:spPr>
+        <p:txBody>
+          <a:bodyPr wrap="square" rtlCol="0">
+            <a:spAutoFit/>
+          </a:bodyPr>
+          <a:lstStyle/>
+          <a:p>
+            <a:r>
+              <a:rPr lang="en-US" sz="2400" dirty="0"/>
+              <a:t>Quaternions</a:t>
+            </a:r>
+          </a:p>
+          <a:p>
+            <a:pPr marL="342900" indent="-342900">
+              <a:buFont typeface="Arial" panose="020B0604020202020204" pitchFamily="34" charset="0"/>
+              <a:buChar char="•"/>
+            </a:pPr>
+            <a:r>
+              <a:rPr lang="en-US" sz="2400" dirty="0"/>
+              <a:t>Unrestricted</a:t>
+            </a:r>
+          </a:p>
+          <a:p>
+            <a:pPr marL="342900" indent="-342900">
+              <a:buFont typeface="Arial" panose="020B0604020202020204" pitchFamily="34" charset="0"/>
+              <a:buChar char="•"/>
+            </a:pPr>
+            <a:r>
+              <a:rPr lang="en-US" sz="2400" dirty="0"/>
+              <a:t>3 Degrees of Freedom</a:t>
+            </a:r>
+          </a:p>
+          <a:p>
+            <a:pPr marL="342900" indent="-342900">
+              <a:buFont typeface="Arial" panose="020B0604020202020204" pitchFamily="34" charset="0"/>
+              <a:buChar char="•"/>
+            </a:pPr>
+            <a:r>
+              <a:rPr lang="en-US" sz="2400" dirty="0"/>
+              <a:t>On a Single Joint</a:t>
+            </a:r>
+          </a:p>
+        </p:txBody>
+      </p:sp>
+      <p:pic>
+        <p:nvPicPr>
+          <p:cNvPr id="5" name="Picture 4">
+            <a:extLst>
+              <a:ext uri="{FF2B5EF4-FFF2-40B4-BE49-F238E27FC236}">
+                <a16:creationId xmlns:a16="http://schemas.microsoft.com/office/drawing/2014/main" id="{BE0BCADD-986D-5469-601D-B67B07E0D791}"/>
+              </a:ext>
+            </a:extLst>
+          </p:cNvPr>
+          <p:cNvPicPr>
+            <a:picLocks noChangeAspect="1"/>
+          </p:cNvPicPr>
+          <p:nvPr/>
+        </p:nvPicPr>
+        <p:blipFill>
+          <a:blip r:embed="rId3">
+            <a:extLst>
+              <a:ext uri="{28A0092B-C50C-407E-A947-70E740481C1C}">
+                <a14:useLocalDpi xmlns:a14="http://schemas.microsoft.com/office/drawing/2010/main" val="0"/>
+              </a:ext>
+            </a:extLst>
+          </a:blip>
+          <a:stretch>
+            <a:fillRect/>
+          </a:stretch>
+        </p:blipFill>
+        <p:spPr>
+          <a:xfrm>
+            <a:off x="6329120" y="1765685"/>
+            <a:ext cx="5553850" cy="4887007"/>
+          </a:xfrm>
+          <a:prstGeom prst="rect">
+            <a:avLst/>
+          </a:prstGeom>
+        </p:spPr>
+      </p:pic>
+      <p:sp>
+        <p:nvSpPr>
+          <p:cNvPr id="6" name="TextBox 5">
+            <a:extLst>
+              <a:ext uri="{FF2B5EF4-FFF2-40B4-BE49-F238E27FC236}">
+                <a16:creationId xmlns:a16="http://schemas.microsoft.com/office/drawing/2014/main" id="{864822A8-0334-E506-13B5-92C7C90FAB35}"/>
+              </a:ext>
+            </a:extLst>
+          </p:cNvPr>
+          <p:cNvSpPr txBox="1"/>
+          <p:nvPr/>
+        </p:nvSpPr>
+        <p:spPr>
+          <a:xfrm>
+            <a:off x="6329120" y="1230527"/>
+            <a:ext cx="5553849" cy="461665"/>
+          </a:xfrm>
+          <a:prstGeom prst="rect">
+            <a:avLst/>
+          </a:prstGeom>
+          <a:noFill/>
+        </p:spPr>
+        <p:txBody>
+          <a:bodyPr wrap="square" rtlCol="0">
+            <a:spAutoFit/>
+          </a:bodyPr>
+          <a:lstStyle/>
+          <a:p>
+            <a:r>
+              <a:rPr lang="en-US" sz="2400" dirty="0"/>
+              <a:t>Quaternions Allow Roll</a:t>
+            </a:r>
+          </a:p>
+        </p:txBody>
+      </p:sp>
+      <p:pic>
+        <p:nvPicPr>
+          <p:cNvPr id="10" name="Picture 9">
+            <a:extLst>
+              <a:ext uri="{FF2B5EF4-FFF2-40B4-BE49-F238E27FC236}">
+                <a16:creationId xmlns:a16="http://schemas.microsoft.com/office/drawing/2014/main" id="{D40AA7E4-DA35-E02A-B0E2-D2D879CB8715}"/>
+              </a:ext>
+            </a:extLst>
+          </p:cNvPr>
+          <p:cNvPicPr>
+            <a:picLocks noChangeAspect="1"/>
+          </p:cNvPicPr>
+          <p:nvPr/>
+        </p:nvPicPr>
+        <p:blipFill>
+          <a:blip r:embed="rId4">
+            <a:extLst>
+              <a:ext uri="{28A0092B-C50C-407E-A947-70E740481C1C}">
+                <a14:useLocalDpi xmlns:a14="http://schemas.microsoft.com/office/drawing/2010/main" val="0"/>
+              </a:ext>
+            </a:extLst>
+          </a:blip>
+          <a:stretch>
+            <a:fillRect/>
+          </a:stretch>
+        </p:blipFill>
+        <p:spPr>
+          <a:xfrm>
+            <a:off x="1888763" y="4009792"/>
+            <a:ext cx="2772268" cy="2569748"/>
+          </a:xfrm>
+          <a:prstGeom prst="rect">
+            <a:avLst/>
+          </a:prstGeom>
+        </p:spPr>
+      </p:pic>
+      <p:sp>
+        <p:nvSpPr>
+          <p:cNvPr id="11" name="TextBox 10">
+            <a:extLst>
+              <a:ext uri="{FF2B5EF4-FFF2-40B4-BE49-F238E27FC236}">
+                <a16:creationId xmlns:a16="http://schemas.microsoft.com/office/drawing/2014/main" id="{11B55A2C-185D-323A-B0FD-32AD2D229952}"/>
+              </a:ext>
+            </a:extLst>
+          </p:cNvPr>
+          <p:cNvSpPr txBox="1"/>
+          <p:nvPr/>
+        </p:nvSpPr>
+        <p:spPr>
+          <a:xfrm>
+            <a:off x="1884107" y="3548127"/>
+            <a:ext cx="2772268" cy="461665"/>
+          </a:xfrm>
+          <a:prstGeom prst="rect">
+            <a:avLst/>
+          </a:prstGeom>
+          <a:noFill/>
+        </p:spPr>
+        <p:txBody>
+          <a:bodyPr wrap="square" rtlCol="0">
+            <a:spAutoFit/>
+          </a:bodyPr>
+          <a:lstStyle/>
+          <a:p>
+            <a:r>
+              <a:rPr lang="en-US" sz="2400" dirty="0"/>
+              <a:t>Need Constraints</a:t>
+            </a:r>
+          </a:p>
+        </p:txBody>
+      </p:sp>
+      <p:grpSp>
+        <p:nvGrpSpPr>
+          <p:cNvPr id="32" name="Group 31">
+            <a:extLst>
+              <a:ext uri="{FF2B5EF4-FFF2-40B4-BE49-F238E27FC236}">
+                <a16:creationId xmlns:a16="http://schemas.microsoft.com/office/drawing/2014/main" id="{6DB416F9-29D0-84EA-F61B-EE92F2D32565}"/>
+              </a:ext>
+            </a:extLst>
+          </p:cNvPr>
+          <p:cNvGrpSpPr/>
+          <p:nvPr/>
+        </p:nvGrpSpPr>
+        <p:grpSpPr>
+          <a:xfrm>
+            <a:off x="8574213" y="4862693"/>
+            <a:ext cx="1330867" cy="550556"/>
+            <a:chOff x="8574213" y="4862693"/>
+            <a:chExt cx="1330867" cy="550556"/>
+          </a:xfrm>
+        </p:grpSpPr>
+        <p:sp>
+          <p:nvSpPr>
+            <p:cNvPr id="14" name="Arc 13">
+              <a:extLst>
+                <a:ext uri="{FF2B5EF4-FFF2-40B4-BE49-F238E27FC236}">
+                  <a16:creationId xmlns:a16="http://schemas.microsoft.com/office/drawing/2014/main" id="{DBA2B46C-D06B-455F-E84A-EEEFC6A3D5A2}"/>
+                </a:ext>
+              </a:extLst>
+            </p:cNvPr>
+            <p:cNvSpPr/>
+            <p:nvPr/>
+          </p:nvSpPr>
+          <p:spPr>
+            <a:xfrm>
+              <a:off x="8574213" y="4862693"/>
+              <a:ext cx="1330867" cy="543050"/>
+            </a:xfrm>
+            <a:prstGeom prst="arc">
+              <a:avLst>
+                <a:gd name="adj1" fmla="val 19392547"/>
+                <a:gd name="adj2" fmla="val 1080808"/>
+              </a:avLst>
+            </a:prstGeom>
+            <a:ln w="50800">
+              <a:solidFill>
+                <a:srgbClr val="00FF00"/>
+              </a:solidFill>
+              <a:headEnd type="none"/>
+              <a:tailEnd type="triangle" w="med" len="med"/>
+            </a:ln>
+          </p:spPr>
+          <p:style>
+            <a:lnRef idx="2">
+              <a:schemeClr val="accent1"/>
+            </a:lnRef>
+            <a:fillRef idx="0">
+              <a:schemeClr val="accent1"/>
+            </a:fillRef>
+            <a:effectRef idx="1">
+              <a:schemeClr val="accent1"/>
+            </a:effectRef>
+            <a:fontRef idx="minor">
+              <a:schemeClr val="tx1"/>
+            </a:fontRef>
+          </p:style>
+          <p:txBody>
+            <a:bodyPr rtlCol="0" anchor="ctr"/>
+            <a:lstStyle/>
+            <a:p>
+              <a:pPr algn="ctr"/>
+              <a:endParaRPr lang="en-US"/>
+            </a:p>
+          </p:txBody>
+        </p:sp>
+        <p:sp>
+          <p:nvSpPr>
+            <p:cNvPr id="15" name="Arc 14">
+              <a:extLst>
+                <a:ext uri="{FF2B5EF4-FFF2-40B4-BE49-F238E27FC236}">
+                  <a16:creationId xmlns:a16="http://schemas.microsoft.com/office/drawing/2014/main" id="{4251575B-1953-2E9D-14E5-959BCADA59B9}"/>
+                </a:ext>
+              </a:extLst>
+            </p:cNvPr>
+            <p:cNvSpPr/>
+            <p:nvPr/>
+          </p:nvSpPr>
+          <p:spPr>
+            <a:xfrm>
+              <a:off x="8574213" y="4870199"/>
+              <a:ext cx="1330867" cy="543050"/>
+            </a:xfrm>
+            <a:prstGeom prst="arc">
+              <a:avLst>
+                <a:gd name="adj1" fmla="val 9600784"/>
+                <a:gd name="adj2" fmla="val 12829323"/>
+              </a:avLst>
+            </a:prstGeom>
+            <a:ln w="50800">
+              <a:solidFill>
+                <a:srgbClr val="00FF00"/>
+              </a:solidFill>
+              <a:headEnd type="none"/>
+              <a:tailEnd type="none" w="med" len="med"/>
+            </a:ln>
+          </p:spPr>
+          <p:style>
+            <a:lnRef idx="2">
+              <a:schemeClr val="accent1"/>
+            </a:lnRef>
+            <a:fillRef idx="0">
+              <a:schemeClr val="accent1"/>
+            </a:fillRef>
+            <a:effectRef idx="1">
+              <a:schemeClr val="accent1"/>
+            </a:effectRef>
+            <a:fontRef idx="minor">
+              <a:schemeClr val="tx1"/>
+            </a:fontRef>
+          </p:style>
+          <p:txBody>
+            <a:bodyPr rtlCol="0" anchor="ctr"/>
+            <a:lstStyle/>
+            <a:p>
+              <a:pPr algn="ctr"/>
+              <a:endParaRPr lang="en-US"/>
+            </a:p>
+          </p:txBody>
+        </p:sp>
+      </p:grpSp>
+      <p:grpSp>
+        <p:nvGrpSpPr>
+          <p:cNvPr id="33" name="Group 32">
+            <a:extLst>
+              <a:ext uri="{FF2B5EF4-FFF2-40B4-BE49-F238E27FC236}">
+                <a16:creationId xmlns:a16="http://schemas.microsoft.com/office/drawing/2014/main" id="{F15B61F1-DBDD-3D56-252C-4A3243665371}"/>
+              </a:ext>
+            </a:extLst>
+          </p:cNvPr>
+          <p:cNvGrpSpPr/>
+          <p:nvPr/>
+        </p:nvGrpSpPr>
+        <p:grpSpPr>
+          <a:xfrm>
+            <a:off x="9418320" y="3932181"/>
+            <a:ext cx="678416" cy="761775"/>
+            <a:chOff x="9418320" y="3932181"/>
+            <a:chExt cx="678416" cy="761775"/>
+          </a:xfrm>
+        </p:grpSpPr>
+        <p:sp>
+          <p:nvSpPr>
+            <p:cNvPr id="20" name="Arc 19">
+              <a:extLst>
+                <a:ext uri="{FF2B5EF4-FFF2-40B4-BE49-F238E27FC236}">
+                  <a16:creationId xmlns:a16="http://schemas.microsoft.com/office/drawing/2014/main" id="{26EB1223-6C67-77E0-D04C-F12A434A33D0}"/>
+                </a:ext>
+              </a:extLst>
+            </p:cNvPr>
+            <p:cNvSpPr/>
+            <p:nvPr/>
+          </p:nvSpPr>
+          <p:spPr>
+            <a:xfrm>
+              <a:off x="9418322" y="3932181"/>
+              <a:ext cx="678414" cy="748855"/>
+            </a:xfrm>
+            <a:prstGeom prst="arc">
+              <a:avLst>
+                <a:gd name="adj1" fmla="val 4823677"/>
+                <a:gd name="adj2" fmla="val 8848936"/>
+              </a:avLst>
+            </a:prstGeom>
+            <a:ln w="50800">
+              <a:solidFill>
+                <a:srgbClr val="FF0000"/>
+              </a:solidFill>
+              <a:tailEnd type="none" w="med" len="med"/>
+            </a:ln>
+          </p:spPr>
+          <p:style>
+            <a:lnRef idx="2">
+              <a:schemeClr val="accent1"/>
+            </a:lnRef>
+            <a:fillRef idx="0">
+              <a:schemeClr val="accent1"/>
+            </a:fillRef>
+            <a:effectRef idx="1">
+              <a:schemeClr val="accent1"/>
+            </a:effectRef>
+            <a:fontRef idx="minor">
+              <a:schemeClr val="tx1"/>
+            </a:fontRef>
+          </p:style>
+          <p:txBody>
+            <a:bodyPr rtlCol="0" anchor="ctr"/>
+            <a:lstStyle/>
+            <a:p>
+              <a:pPr algn="ctr"/>
+              <a:endParaRPr lang="en-US"/>
+            </a:p>
+          </p:txBody>
+        </p:sp>
+        <p:sp>
+          <p:nvSpPr>
+            <p:cNvPr id="31" name="Arc 30">
+              <a:extLst>
+                <a:ext uri="{FF2B5EF4-FFF2-40B4-BE49-F238E27FC236}">
+                  <a16:creationId xmlns:a16="http://schemas.microsoft.com/office/drawing/2014/main" id="{A7EDA6DE-FC88-73A9-A89B-0FBB481A0289}"/>
+                </a:ext>
+              </a:extLst>
+            </p:cNvPr>
+            <p:cNvSpPr/>
+            <p:nvPr/>
+          </p:nvSpPr>
+          <p:spPr>
+            <a:xfrm>
+              <a:off x="9418320" y="3945101"/>
+              <a:ext cx="678414" cy="748855"/>
+            </a:xfrm>
+            <a:prstGeom prst="arc">
+              <a:avLst>
+                <a:gd name="adj1" fmla="val 18412206"/>
+                <a:gd name="adj2" fmla="val 20990444"/>
+              </a:avLst>
+            </a:prstGeom>
+            <a:ln w="50800">
+              <a:solidFill>
+                <a:srgbClr val="FF0000"/>
+              </a:solidFill>
+              <a:tailEnd type="triangle" w="med" len="med"/>
+            </a:ln>
+          </p:spPr>
+          <p:style>
+            <a:lnRef idx="2">
+              <a:schemeClr val="accent1"/>
+            </a:lnRef>
+            <a:fillRef idx="0">
+              <a:schemeClr val="accent1"/>
+            </a:fillRef>
+            <a:effectRef idx="1">
+              <a:schemeClr val="accent1"/>
+            </a:effectRef>
+            <a:fontRef idx="minor">
+              <a:schemeClr val="tx1"/>
+            </a:fontRef>
+          </p:style>
+          <p:txBody>
+            <a:bodyPr rtlCol="0" anchor="ctr"/>
+            <a:lstStyle/>
+            <a:p>
+              <a:pPr algn="ctr"/>
+              <a:endParaRPr lang="en-US"/>
+            </a:p>
+          </p:txBody>
+        </p:sp>
+      </p:grpSp>
+    </p:spTree>
+    <p:extLst>
+      <p:ext uri="{BB962C8B-B14F-4D97-AF65-F5344CB8AC3E}">
+        <p14:creationId xmlns:p14="http://schemas.microsoft.com/office/powerpoint/2010/main" val="2839902044"/>
+      </p:ext>
+    </p:extLst>
+  </p:cSld>
+  <p:clrMapOvr>
+    <a:masterClrMapping/>
+  </p:clrMapOvr>
+  <p:timing>
+    <p:tnLst>
+      <p:par>
+        <p:cTn id="1" dur="indefinite" restart="never" nodeType="tmRoot">
+          <p:childTnLst>
+            <p:seq concurrent="1" nextAc="seek">
+              <p:cTn id="2" dur="indefinite" nodeType="mainSeq">
+                <p:childTnLst>
+                  <p:par>
+                    <p:cTn id="3" fill="hold">
+                      <p:stCondLst>
+                        <p:cond delay="indefinite"/>
+                      </p:stCondLst>
+                      <p:childTnLst>
+                        <p:par>
+                          <p:cTn id="4" fill="hold">
+                            <p:stCondLst>
+                              <p:cond delay="0"/>
+                            </p:stCondLst>
+                            <p:childTnLst>
+                              <p:par>
+                                <p:cTn id="5" presetID="42" presetClass="entr" presetSubtype="0" fill="hold" grpId="0" nodeType="clickEffect">
+                                  <p:stCondLst>
+                                    <p:cond delay="0"/>
+                                  </p:stCondLst>
+                                  <p:childTnLst>
+                                    <p:set>
+                                      <p:cBhvr>
+                                        <p:cTn id="6" dur="1" fill="hold">
+                                          <p:stCondLst>
+                                            <p:cond delay="0"/>
+                                          </p:stCondLst>
+                                        </p:cTn>
+                                        <p:tgtEl>
+                                          <p:spTgt spid="11"/>
+                                        </p:tgtEl>
+                                        <p:attrNameLst>
+                                          <p:attrName>style.visibility</p:attrName>
+                                        </p:attrNameLst>
+                                      </p:cBhvr>
+                                      <p:to>
+                                        <p:strVal val="visible"/>
+                                      </p:to>
+                                    </p:set>
+                                    <p:animEffect transition="in" filter="fade">
+                                      <p:cBhvr>
+                                        <p:cTn id="7" dur="1000"/>
+                                        <p:tgtEl>
+                                          <p:spTgt spid="11"/>
+                                        </p:tgtEl>
+                                      </p:cBhvr>
+                                    </p:animEffect>
+                                    <p:anim calcmode="lin" valueType="num">
+                                      <p:cBhvr>
+                                        <p:cTn id="8" dur="1000" fill="hold"/>
+                                        <p:tgtEl>
+                                          <p:spTgt spid="11"/>
+                                        </p:tgtEl>
+                                        <p:attrNameLst>
+                                          <p:attrName>ppt_x</p:attrName>
+                                        </p:attrNameLst>
+                                      </p:cBhvr>
+                                      <p:tavLst>
+                                        <p:tav tm="0">
+                                          <p:val>
+                                            <p:strVal val="#ppt_x"/>
+                                          </p:val>
+                                        </p:tav>
+                                        <p:tav tm="100000">
+                                          <p:val>
+                                            <p:strVal val="#ppt_x"/>
+                                          </p:val>
+                                        </p:tav>
+                                      </p:tavLst>
+                                    </p:anim>
+                                    <p:anim calcmode="lin" valueType="num">
+                                      <p:cBhvr>
+                                        <p:cTn id="9" dur="1000" fill="hold"/>
+                                        <p:tgtEl>
+                                          <p:spTgt spid="11"/>
+                                        </p:tgtEl>
+                                        <p:attrNameLst>
+                                          <p:attrName>ppt_y</p:attrName>
+                                        </p:attrNameLst>
+                                      </p:cBhvr>
+                                      <p:tavLst>
+                                        <p:tav tm="0">
+                                          <p:val>
+                                            <p:strVal val="#ppt_y+.1"/>
+                                          </p:val>
+                                        </p:tav>
+                                        <p:tav tm="100000">
+                                          <p:val>
+                                            <p:strVal val="#ppt_y"/>
+                                          </p:val>
+                                        </p:tav>
+                                      </p:tavLst>
+                                    </p:anim>
+                                  </p:childTnLst>
+                                </p:cTn>
+                              </p:par>
+                              <p:par>
+                                <p:cTn id="10" presetID="42" presetClass="entr" presetSubtype="0" fill="hold" nodeType="withEffect">
+                                  <p:stCondLst>
+                                    <p:cond delay="0"/>
+                                  </p:stCondLst>
+                                  <p:childTnLst>
+                                    <p:set>
+                                      <p:cBhvr>
+                                        <p:cTn id="11" dur="1" fill="hold">
+                                          <p:stCondLst>
+                                            <p:cond delay="0"/>
+                                          </p:stCondLst>
+                                        </p:cTn>
+                                        <p:tgtEl>
+                                          <p:spTgt spid="10"/>
+                                        </p:tgtEl>
+                                        <p:attrNameLst>
+                                          <p:attrName>style.visibility</p:attrName>
+                                        </p:attrNameLst>
+                                      </p:cBhvr>
+                                      <p:to>
+                                        <p:strVal val="visible"/>
+                                      </p:to>
+                                    </p:set>
+                                    <p:animEffect transition="in" filter="fade">
+                                      <p:cBhvr>
+                                        <p:cTn id="12" dur="1000"/>
+                                        <p:tgtEl>
+                                          <p:spTgt spid="10"/>
+                                        </p:tgtEl>
+                                      </p:cBhvr>
+                                    </p:animEffect>
+                                    <p:anim calcmode="lin" valueType="num">
+                                      <p:cBhvr>
+                                        <p:cTn id="13" dur="1000" fill="hold"/>
+                                        <p:tgtEl>
+                                          <p:spTgt spid="10"/>
+                                        </p:tgtEl>
+                                        <p:attrNameLst>
+                                          <p:attrName>ppt_x</p:attrName>
+                                        </p:attrNameLst>
+                                      </p:cBhvr>
+                                      <p:tavLst>
+                                        <p:tav tm="0">
+                                          <p:val>
+                                            <p:strVal val="#ppt_x"/>
+                                          </p:val>
+                                        </p:tav>
+                                        <p:tav tm="100000">
+                                          <p:val>
+                                            <p:strVal val="#ppt_x"/>
+                                          </p:val>
+                                        </p:tav>
+                                      </p:tavLst>
+                                    </p:anim>
+                                    <p:anim calcmode="lin" valueType="num">
+                                      <p:cBhvr>
+                                        <p:cTn id="14" dur="1000" fill="hold"/>
+                                        <p:tgtEl>
+                                          <p:spTgt spid="10"/>
+                                        </p:tgtEl>
+                                        <p:attrNameLst>
+                                          <p:attrName>ppt_y</p:attrName>
+                                        </p:attrNameLst>
+                                      </p:cBhvr>
+                                      <p:tavLst>
+                                        <p:tav tm="0">
+                                          <p:val>
+                                            <p:strVal val="#ppt_y+.1"/>
+                                          </p:val>
+                                        </p:tav>
+                                        <p:tav tm="100000">
+                                          <p:val>
+                                            <p:strVal val="#ppt_y"/>
+                                          </p:val>
+                                        </p:tav>
+                                      </p:tavLst>
+                                    </p:anim>
+                                  </p:childTnLst>
+                                </p:cTn>
+                              </p:par>
+                            </p:childTnLst>
+                          </p:cTn>
+                        </p:par>
+                      </p:childTnLst>
+                    </p:cTn>
+                  </p:par>
+                  <p:par>
+                    <p:cTn id="15" fill="hold">
+                      <p:stCondLst>
+                        <p:cond delay="indefinite"/>
+                      </p:stCondLst>
+                      <p:childTnLst>
+                        <p:par>
+                          <p:cTn id="16" fill="hold">
+                            <p:stCondLst>
+                              <p:cond delay="0"/>
+                            </p:stCondLst>
+                            <p:childTnLst>
+                              <p:par>
+                                <p:cTn id="17" presetID="10" presetClass="entr" presetSubtype="0" fill="hold" nodeType="clickEffect">
+                                  <p:stCondLst>
+                                    <p:cond delay="0"/>
+                                  </p:stCondLst>
+                                  <p:childTnLst>
+                                    <p:set>
+                                      <p:cBhvr>
+                                        <p:cTn id="18" dur="1" fill="hold">
+                                          <p:stCondLst>
+                                            <p:cond delay="0"/>
+                                          </p:stCondLst>
+                                        </p:cTn>
+                                        <p:tgtEl>
+                                          <p:spTgt spid="33"/>
+                                        </p:tgtEl>
+                                        <p:attrNameLst>
+                                          <p:attrName>style.visibility</p:attrName>
+                                        </p:attrNameLst>
+                                      </p:cBhvr>
+                                      <p:to>
+                                        <p:strVal val="visible"/>
+                                      </p:to>
+                                    </p:set>
+                                    <p:animEffect transition="in" filter="fade">
+                                      <p:cBhvr>
+                                        <p:cTn id="19" dur="500"/>
+                                        <p:tgtEl>
+                                          <p:spTgt spid="33"/>
+                                        </p:tgtEl>
+                                      </p:cBhvr>
+                                    </p:animEffect>
+                                  </p:childTnLst>
+                                </p:cTn>
+                              </p:par>
+                              <p:par>
+                                <p:cTn id="20" presetID="10" presetClass="entr" presetSubtype="0" fill="hold" nodeType="withEffect">
+                                  <p:stCondLst>
+                                    <p:cond delay="0"/>
+                                  </p:stCondLst>
+                                  <p:childTnLst>
+                                    <p:set>
+                                      <p:cBhvr>
+                                        <p:cTn id="21" dur="1" fill="hold">
+                                          <p:stCondLst>
+                                            <p:cond delay="0"/>
+                                          </p:stCondLst>
+                                        </p:cTn>
+                                        <p:tgtEl>
+                                          <p:spTgt spid="32"/>
+                                        </p:tgtEl>
+                                        <p:attrNameLst>
+                                          <p:attrName>style.visibility</p:attrName>
+                                        </p:attrNameLst>
+                                      </p:cBhvr>
+                                      <p:to>
+                                        <p:strVal val="visible"/>
+                                      </p:to>
+                                    </p:set>
+                                    <p:animEffect transition="in" filter="fade">
+                                      <p:cBhvr>
+                                        <p:cTn id="22" dur="500"/>
+                                        <p:tgtEl>
+                                          <p:spTgt spid="32"/>
+                                        </p:tgtEl>
+                                      </p:cBhvr>
+                                    </p:animEffect>
+                                  </p:childTnLst>
+                                </p:cTn>
+                              </p:par>
+                            </p:childTnLst>
+                          </p:cTn>
+                        </p:par>
+                      </p:childTnLst>
+                    </p:cTn>
+                  </p:par>
+                </p:childTnLst>
+              </p:cTn>
+              <p:prevCondLst>
+                <p:cond evt="onPrev" delay="0">
+                  <p:tgtEl>
+                    <p:sldTgt/>
+                  </p:tgtEl>
+                </p:cond>
+              </p:prevCondLst>
+              <p:nextCondLst>
+                <p:cond evt="onNext" delay="0">
+                  <p:tgtEl>
+                    <p:sldTgt/>
+                  </p:tgtEl>
+                </p:cond>
+              </p:nextCondLst>
+            </p:seq>
+          </p:childTnLst>
+        </p:cTn>
+      </p:par>
+    </p:tnLst>
+    <p:bldLst>
+      <p:bldP spid="11" grpId="0"/>
+    </p:bldLst>
+  </p:timing>
+</p:sld>
+</file>
+
+<file path=ppt/slides/slide7.xml><?xml version="1.0" encoding="utf-8"?>
+<p:sld xmlns:a="http://schemas.openxmlformats.org/drawingml/2006/main" xmlns:r="http://schemas.openxmlformats.org/officeDocument/2006/relationships" xmlns:p="http://schemas.openxmlformats.org/presentationml/2006/main">
+  <p:cSld>
+    <p:spTree>
+      <p:nvGrpSpPr>
         <p:cNvPr id="1" name=""/>
         <p:cNvGrpSpPr/>
         <p:nvPr/>
@@ -9473,8 +12131,8 @@
             </a:fontRef>
           </p:style>
         </p:cxnSp>
-        <mc:AlternateContent xmlns:mc="http://schemas.openxmlformats.org/markup-compatibility/2006">
-          <mc:Choice xmlns:a14="http://schemas.microsoft.com/office/drawing/2010/main" Requires="a14">
+        <mc:AlternateContent xmlns:mc="http://schemas.openxmlformats.org/markup-compatibility/2006" xmlns:a14="http://schemas.microsoft.com/office/drawing/2010/main">
+          <mc:Choice Requires="a14">
             <p:sp>
               <p:nvSpPr>
                 <p:cNvPr id="17" name="TextBox 16">
@@ -9527,7 +12185,7 @@
               </p:txBody>
             </p:sp>
           </mc:Choice>
-          <mc:Fallback>
+          <mc:Fallback xmlns="">
             <p:sp>
               <p:nvSpPr>
                 <p:cNvPr id="17" name="TextBox 16">
@@ -9572,8 +12230,8 @@
             </p:sp>
           </mc:Fallback>
         </mc:AlternateContent>
-        <mc:AlternateContent xmlns:mc="http://schemas.openxmlformats.org/markup-compatibility/2006">
-          <mc:Choice xmlns:a14="http://schemas.microsoft.com/office/drawing/2010/main" Requires="a14">
+        <mc:AlternateContent xmlns:mc="http://schemas.openxmlformats.org/markup-compatibility/2006" xmlns:a14="http://schemas.microsoft.com/office/drawing/2010/main">
+          <mc:Choice Requires="a14">
             <p:sp>
               <p:nvSpPr>
                 <p:cNvPr id="18" name="TextBox 17">
@@ -9651,7 +12309,7 @@
               </p:txBody>
             </p:sp>
           </mc:Choice>
-          <mc:Fallback>
+          <mc:Fallback xmlns="">
             <p:sp>
               <p:nvSpPr>
                 <p:cNvPr id="18" name="TextBox 17">
@@ -9696,8 +12354,8 @@
             </p:sp>
           </mc:Fallback>
         </mc:AlternateContent>
-        <mc:AlternateContent xmlns:mc="http://schemas.openxmlformats.org/markup-compatibility/2006">
-          <mc:Choice xmlns:a14="http://schemas.microsoft.com/office/drawing/2010/main" Requires="a14">
+        <mc:AlternateContent xmlns:mc="http://schemas.openxmlformats.org/markup-compatibility/2006" xmlns:a14="http://schemas.microsoft.com/office/drawing/2010/main">
+          <mc:Choice Requires="a14">
             <p:sp>
               <p:nvSpPr>
                 <p:cNvPr id="19" name="TextBox 18">
@@ -9775,7 +12433,7 @@
               </p:txBody>
             </p:sp>
           </mc:Choice>
-          <mc:Fallback>
+          <mc:Fallback xmlns="">
             <p:sp>
               <p:nvSpPr>
                 <p:cNvPr id="19" name="TextBox 18">
@@ -9820,8 +12478,8 @@
             </p:sp>
           </mc:Fallback>
         </mc:AlternateContent>
-        <mc:AlternateContent xmlns:mc="http://schemas.openxmlformats.org/markup-compatibility/2006">
-          <mc:Choice xmlns:a14="http://schemas.microsoft.com/office/drawing/2010/main" Requires="a14">
+        <mc:AlternateContent xmlns:mc="http://schemas.openxmlformats.org/markup-compatibility/2006" xmlns:a14="http://schemas.microsoft.com/office/drawing/2010/main">
+          <mc:Choice Requires="a14">
             <p:sp>
               <p:nvSpPr>
                 <p:cNvPr id="20" name="TextBox 19">
@@ -9903,7 +12561,7 @@
               </p:txBody>
             </p:sp>
           </mc:Choice>
-          <mc:Fallback>
+          <mc:Fallback xmlns="">
             <p:sp>
               <p:nvSpPr>
                 <p:cNvPr id="20" name="TextBox 19">
@@ -9948,8 +12606,8 @@
             </p:sp>
           </mc:Fallback>
         </mc:AlternateContent>
-        <mc:AlternateContent xmlns:mc="http://schemas.openxmlformats.org/markup-compatibility/2006">
-          <mc:Choice xmlns:a14="http://schemas.microsoft.com/office/drawing/2010/main" Requires="a14">
+        <mc:AlternateContent xmlns:mc="http://schemas.openxmlformats.org/markup-compatibility/2006" xmlns:a14="http://schemas.microsoft.com/office/drawing/2010/main">
+          <mc:Choice Requires="a14">
             <p:sp>
               <p:nvSpPr>
                 <p:cNvPr id="21" name="TextBox 20">
@@ -10003,7 +12661,7 @@
               </p:txBody>
             </p:sp>
           </mc:Choice>
-          <mc:Fallback>
+          <mc:Fallback xmlns="">
             <p:sp>
               <p:nvSpPr>
                 <p:cNvPr id="21" name="TextBox 20">
@@ -10048,8 +12706,8 @@
             </p:sp>
           </mc:Fallback>
         </mc:AlternateContent>
-        <mc:AlternateContent xmlns:mc="http://schemas.openxmlformats.org/markup-compatibility/2006">
-          <mc:Choice xmlns:a14="http://schemas.microsoft.com/office/drawing/2010/main" Requires="a14">
+        <mc:AlternateContent xmlns:mc="http://schemas.openxmlformats.org/markup-compatibility/2006" xmlns:a14="http://schemas.microsoft.com/office/drawing/2010/main">
+          <mc:Choice Requires="a14">
             <p:sp>
               <p:nvSpPr>
                 <p:cNvPr id="22" name="TextBox 21">
@@ -10111,7 +12769,7 @@
               </p:txBody>
             </p:sp>
           </mc:Choice>
-          <mc:Fallback>
+          <mc:Fallback xmlns="">
             <p:sp>
               <p:nvSpPr>
                 <p:cNvPr id="22" name="TextBox 21">
@@ -10156,8 +12814,8 @@
             </p:sp>
           </mc:Fallback>
         </mc:AlternateContent>
-        <mc:AlternateContent xmlns:mc="http://schemas.openxmlformats.org/markup-compatibility/2006">
-          <mc:Choice xmlns:a14="http://schemas.microsoft.com/office/drawing/2010/main" Requires="a14">
+        <mc:AlternateContent xmlns:mc="http://schemas.openxmlformats.org/markup-compatibility/2006" xmlns:a14="http://schemas.microsoft.com/office/drawing/2010/main">
+          <mc:Choice Requires="a14">
             <p:sp>
               <p:nvSpPr>
                 <p:cNvPr id="23" name="TextBox 22">
@@ -10214,7 +12872,7 @@
               </p:txBody>
             </p:sp>
           </mc:Choice>
-          <mc:Fallback>
+          <mc:Fallback xmlns="">
             <p:sp>
               <p:nvSpPr>
                 <p:cNvPr id="23" name="TextBox 22">
@@ -10259,8 +12917,8 @@
             </p:sp>
           </mc:Fallback>
         </mc:AlternateContent>
-        <mc:AlternateContent xmlns:mc="http://schemas.openxmlformats.org/markup-compatibility/2006">
-          <mc:Choice xmlns:a14="http://schemas.microsoft.com/office/drawing/2010/main" Requires="a14">
+        <mc:AlternateContent xmlns:mc="http://schemas.openxmlformats.org/markup-compatibility/2006" xmlns:a14="http://schemas.microsoft.com/office/drawing/2010/main">
+          <mc:Choice Requires="a14">
             <p:sp>
               <p:nvSpPr>
                 <p:cNvPr id="24" name="TextBox 23">
@@ -10338,7 +12996,7 @@
               </p:txBody>
             </p:sp>
           </mc:Choice>
-          <mc:Fallback>
+          <mc:Fallback xmlns="">
             <p:sp>
               <p:nvSpPr>
                 <p:cNvPr id="24" name="TextBox 23">
@@ -10383,8 +13041,8 @@
             </p:sp>
           </mc:Fallback>
         </mc:AlternateContent>
-        <mc:AlternateContent xmlns:mc="http://schemas.openxmlformats.org/markup-compatibility/2006">
-          <mc:Choice xmlns:a14="http://schemas.microsoft.com/office/drawing/2010/main" Requires="a14">
+        <mc:AlternateContent xmlns:mc="http://schemas.openxmlformats.org/markup-compatibility/2006" xmlns:a14="http://schemas.microsoft.com/office/drawing/2010/main">
+          <mc:Choice Requires="a14">
             <p:sp>
               <p:nvSpPr>
                 <p:cNvPr id="25" name="TextBox 24">
@@ -10434,7 +13092,7 @@
               </p:txBody>
             </p:sp>
           </mc:Choice>
-          <mc:Fallback>
+          <mc:Fallback xmlns="">
             <p:sp>
               <p:nvSpPr>
                 <p:cNvPr id="25" name="TextBox 24">
@@ -10479,8 +13137,8 @@
             </p:sp>
           </mc:Fallback>
         </mc:AlternateContent>
-        <mc:AlternateContent xmlns:mc="http://schemas.openxmlformats.org/markup-compatibility/2006">
-          <mc:Choice xmlns:a14="http://schemas.microsoft.com/office/drawing/2010/main" Requires="a14">
+        <mc:AlternateContent xmlns:mc="http://schemas.openxmlformats.org/markup-compatibility/2006" xmlns:a14="http://schemas.microsoft.com/office/drawing/2010/main">
+          <mc:Choice Requires="a14">
             <p:sp>
               <p:nvSpPr>
                 <p:cNvPr id="26" name="TextBox 25">
@@ -10530,7 +13188,7 @@
               </p:txBody>
             </p:sp>
           </mc:Choice>
-          <mc:Fallback>
+          <mc:Fallback xmlns="">
             <p:sp>
               <p:nvSpPr>
                 <p:cNvPr id="26" name="TextBox 25">
@@ -10625,7 +13283,7 @@
 </p:sld>
 </file>
 
-<file path=ppt/slides/slide6.xml><?xml version="1.0" encoding="utf-8"?>
+<file path=ppt/slides/slide8.xml><?xml version="1.0" encoding="utf-8"?>
 <p:sld xmlns:a="http://schemas.openxmlformats.org/drawingml/2006/main" xmlns:r="http://schemas.openxmlformats.org/officeDocument/2006/relationships" xmlns:p="http://schemas.openxmlformats.org/presentationml/2006/main">
   <p:cSld>
     <p:spTree>
@@ -12630,4 +15288,319 @@
     </a:ext>
   </a:extLst>
 </a:theme>
+</file>
+
+<file path=ppt/theme/theme2.xml><?xml version="1.0" encoding="utf-8"?>
+<a:theme xmlns:a="http://schemas.openxmlformats.org/drawingml/2006/main" name="Office Theme">
+  <a:themeElements>
+    <a:clrScheme name="Office">
+      <a:dk1>
+        <a:sysClr val="windowText" lastClr="000000"/>
+      </a:dk1>
+      <a:lt1>
+        <a:sysClr val="window" lastClr="FFFFFF"/>
+      </a:lt1>
+      <a:dk2>
+        <a:srgbClr val="0E2841"/>
+      </a:dk2>
+      <a:lt2>
+        <a:srgbClr val="E8E8E8"/>
+      </a:lt2>
+      <a:accent1>
+        <a:srgbClr val="156082"/>
+      </a:accent1>
+      <a:accent2>
+        <a:srgbClr val="E97132"/>
+      </a:accent2>
+      <a:accent3>
+        <a:srgbClr val="196B24"/>
+      </a:accent3>
+      <a:accent4>
+        <a:srgbClr val="0F9ED5"/>
+      </a:accent4>
+      <a:accent5>
+        <a:srgbClr val="A02B93"/>
+      </a:accent5>
+      <a:accent6>
+        <a:srgbClr val="4EA72E"/>
+      </a:accent6>
+      <a:hlink>
+        <a:srgbClr val="467886"/>
+      </a:hlink>
+      <a:folHlink>
+        <a:srgbClr val="96607D"/>
+      </a:folHlink>
+    </a:clrScheme>
+    <a:fontScheme name="Office">
+      <a:majorFont>
+        <a:latin typeface="Aptos Display" panose="02110004020202020204"/>
+        <a:ea typeface=""/>
+        <a:cs typeface=""/>
+        <a:font script="Jpan" typeface="游ゴシック Light"/>
+        <a:font script="Hang" typeface="맑은 고딕"/>
+        <a:font script="Hans" typeface="等线 Light"/>
+        <a:font script="Hant" typeface="新細明體"/>
+        <a:font script="Arab" typeface="Times New Roman"/>
+        <a:font script="Hebr" typeface="Times New Roman"/>
+        <a:font script="Thai" typeface="Angsana New"/>
+        <a:font script="Ethi" typeface="Nyala"/>
+        <a:font script="Beng" typeface="Vrinda"/>
+        <a:font script="Gujr" typeface="Shruti"/>
+        <a:font script="Khmr" typeface="MoolBoran"/>
+        <a:font script="Knda" typeface="Tunga"/>
+        <a:font script="Guru" typeface="Raavi"/>
+        <a:font script="Cans" typeface="Euphemia"/>
+        <a:font script="Cher" typeface="Plantagenet Cherokee"/>
+        <a:font script="Yiii" typeface="Microsoft Yi Baiti"/>
+        <a:font script="Tibt" typeface="Microsoft Himalaya"/>
+        <a:font script="Thaa" typeface="MV Boli"/>
+        <a:font script="Deva" typeface="Mangal"/>
+        <a:font script="Telu" typeface="Gautami"/>
+        <a:font script="Taml" typeface="Latha"/>
+        <a:font script="Syrc" typeface="Estrangelo Edessa"/>
+        <a:font script="Orya" typeface="Kalinga"/>
+        <a:font script="Mlym" typeface="Kartika"/>
+        <a:font script="Laoo" typeface="DokChampa"/>
+        <a:font script="Sinh" typeface="Iskoola Pota"/>
+        <a:font script="Mong" typeface="Mongolian Baiti"/>
+        <a:font script="Viet" typeface="Times New Roman"/>
+        <a:font script="Uigh" typeface="Microsoft Uighur"/>
+        <a:font script="Geor" typeface="Sylfaen"/>
+        <a:font script="Armn" typeface="Arial"/>
+        <a:font script="Bugi" typeface="Leelawadee UI"/>
+        <a:font script="Bopo" typeface="Microsoft JhengHei"/>
+        <a:font script="Java" typeface="Javanese Text"/>
+        <a:font script="Lisu" typeface="Segoe UI"/>
+        <a:font script="Mymr" typeface="Myanmar Text"/>
+        <a:font script="Nkoo" typeface="Ebrima"/>
+        <a:font script="Olck" typeface="Nirmala UI"/>
+        <a:font script="Osma" typeface="Ebrima"/>
+        <a:font script="Phag" typeface="Phagspa"/>
+        <a:font script="Syrn" typeface="Estrangelo Edessa"/>
+        <a:font script="Syrj" typeface="Estrangelo Edessa"/>
+        <a:font script="Syre" typeface="Estrangelo Edessa"/>
+        <a:font script="Sora" typeface="Nirmala UI"/>
+        <a:font script="Tale" typeface="Microsoft Tai Le"/>
+        <a:font script="Talu" typeface="Microsoft New Tai Lue"/>
+        <a:font script="Tfng" typeface="Ebrima"/>
+      </a:majorFont>
+      <a:minorFont>
+        <a:latin typeface="Aptos" panose="02110004020202020204"/>
+        <a:ea typeface=""/>
+        <a:cs typeface=""/>
+        <a:font script="Jpan" typeface="游ゴシック"/>
+        <a:font script="Hang" typeface="맑은 고딕"/>
+        <a:font script="Hans" typeface="等线"/>
+        <a:font script="Hant" typeface="新細明體"/>
+        <a:font script="Arab" typeface="Arial"/>
+        <a:font script="Hebr" typeface="Arial"/>
+        <a:font script="Thai" typeface="Cordia New"/>
+        <a:font script="Ethi" typeface="Nyala"/>
+        <a:font script="Beng" typeface="Vrinda"/>
+        <a:font script="Gujr" typeface="Shruti"/>
+        <a:font script="Khmr" typeface="DaunPenh"/>
+        <a:font script="Knda" typeface="Tunga"/>
+        <a:font script="Guru" typeface="Raavi"/>
+        <a:font script="Cans" typeface="Euphemia"/>
+        <a:font script="Cher" typeface="Plantagenet Cherokee"/>
+        <a:font script="Yiii" typeface="Microsoft Yi Baiti"/>
+        <a:font script="Tibt" typeface="Microsoft Himalaya"/>
+        <a:font script="Thaa" typeface="MV Boli"/>
+        <a:font script="Deva" typeface="Mangal"/>
+        <a:font script="Telu" typeface="Gautami"/>
+        <a:font script="Taml" typeface="Latha"/>
+        <a:font script="Syrc" typeface="Estrangelo Edessa"/>
+        <a:font script="Orya" typeface="Kalinga"/>
+        <a:font script="Mlym" typeface="Kartika"/>
+        <a:font script="Laoo" typeface="DokChampa"/>
+        <a:font script="Sinh" typeface="Iskoola Pota"/>
+        <a:font script="Mong" typeface="Mongolian Baiti"/>
+        <a:font script="Viet" typeface="Arial"/>
+        <a:font script="Uigh" typeface="Microsoft Uighur"/>
+        <a:font script="Geor" typeface="Sylfaen"/>
+        <a:font script="Armn" typeface="Arial"/>
+        <a:font script="Bugi" typeface="Leelawadee UI"/>
+        <a:font script="Bopo" typeface="Microsoft JhengHei"/>
+        <a:font script="Java" typeface="Javanese Text"/>
+        <a:font script="Lisu" typeface="Segoe UI"/>
+        <a:font script="Mymr" typeface="Myanmar Text"/>
+        <a:font script="Nkoo" typeface="Ebrima"/>
+        <a:font script="Olck" typeface="Nirmala UI"/>
+        <a:font script="Osma" typeface="Ebrima"/>
+        <a:font script="Phag" typeface="Phagspa"/>
+        <a:font script="Syrn" typeface="Estrangelo Edessa"/>
+        <a:font script="Syrj" typeface="Estrangelo Edessa"/>
+        <a:font script="Syre" typeface="Estrangelo Edessa"/>
+        <a:font script="Sora" typeface="Nirmala UI"/>
+        <a:font script="Tale" typeface="Microsoft Tai Le"/>
+        <a:font script="Talu" typeface="Microsoft New Tai Lue"/>
+        <a:font script="Tfng" typeface="Ebrima"/>
+      </a:minorFont>
+    </a:fontScheme>
+    <a:fmtScheme name="Office">
+      <a:fillStyleLst>
+        <a:solidFill>
+          <a:schemeClr val="phClr"/>
+        </a:solidFill>
+        <a:gradFill rotWithShape="1">
+          <a:gsLst>
+            <a:gs pos="0">
+              <a:schemeClr val="phClr">
+                <a:lumMod val="110000"/>
+                <a:satMod val="105000"/>
+                <a:tint val="67000"/>
+              </a:schemeClr>
+            </a:gs>
+            <a:gs pos="50000">
+              <a:schemeClr val="phClr">
+                <a:lumMod val="105000"/>
+                <a:satMod val="103000"/>
+                <a:tint val="73000"/>
+              </a:schemeClr>
+            </a:gs>
+            <a:gs pos="100000">
+              <a:schemeClr val="phClr">
+                <a:lumMod val="105000"/>
+                <a:satMod val="109000"/>
+                <a:tint val="81000"/>
+              </a:schemeClr>
+            </a:gs>
+          </a:gsLst>
+          <a:lin ang="5400000" scaled="0"/>
+        </a:gradFill>
+        <a:gradFill rotWithShape="1">
+          <a:gsLst>
+            <a:gs pos="0">
+              <a:schemeClr val="phClr">
+                <a:satMod val="103000"/>
+                <a:lumMod val="102000"/>
+                <a:tint val="94000"/>
+              </a:schemeClr>
+            </a:gs>
+            <a:gs pos="50000">
+              <a:schemeClr val="phClr">
+                <a:satMod val="110000"/>
+                <a:lumMod val="100000"/>
+                <a:shade val="100000"/>
+              </a:schemeClr>
+            </a:gs>
+            <a:gs pos="100000">
+              <a:schemeClr val="phClr">
+                <a:lumMod val="99000"/>
+                <a:satMod val="120000"/>
+                <a:shade val="78000"/>
+              </a:schemeClr>
+            </a:gs>
+          </a:gsLst>
+          <a:lin ang="5400000" scaled="0"/>
+        </a:gradFill>
+      </a:fillStyleLst>
+      <a:lnStyleLst>
+        <a:ln w="12700" cap="flat" cmpd="sng" algn="ctr">
+          <a:solidFill>
+            <a:schemeClr val="phClr"/>
+          </a:solidFill>
+          <a:prstDash val="solid"/>
+          <a:miter lim="800000"/>
+        </a:ln>
+        <a:ln w="19050" cap="flat" cmpd="sng" algn="ctr">
+          <a:solidFill>
+            <a:schemeClr val="phClr"/>
+          </a:solidFill>
+          <a:prstDash val="solid"/>
+          <a:miter lim="800000"/>
+        </a:ln>
+        <a:ln w="25400" cap="flat" cmpd="sng" algn="ctr">
+          <a:solidFill>
+            <a:schemeClr val="phClr"/>
+          </a:solidFill>
+          <a:prstDash val="solid"/>
+          <a:miter lim="800000"/>
+        </a:ln>
+      </a:lnStyleLst>
+      <a:effectStyleLst>
+        <a:effectStyle>
+          <a:effectLst/>
+        </a:effectStyle>
+        <a:effectStyle>
+          <a:effectLst/>
+        </a:effectStyle>
+        <a:effectStyle>
+          <a:effectLst>
+            <a:outerShdw blurRad="57150" dist="19050" dir="5400000" algn="ctr" rotWithShape="0">
+              <a:srgbClr val="000000">
+                <a:alpha val="63000"/>
+              </a:srgbClr>
+            </a:outerShdw>
+          </a:effectLst>
+        </a:effectStyle>
+      </a:effectStyleLst>
+      <a:bgFillStyleLst>
+        <a:solidFill>
+          <a:schemeClr val="phClr"/>
+        </a:solidFill>
+        <a:solidFill>
+          <a:schemeClr val="phClr">
+            <a:tint val="95000"/>
+            <a:satMod val="170000"/>
+          </a:schemeClr>
+        </a:solidFill>
+        <a:gradFill rotWithShape="1">
+          <a:gsLst>
+            <a:gs pos="0">
+              <a:schemeClr val="phClr">
+                <a:tint val="93000"/>
+                <a:satMod val="150000"/>
+                <a:shade val="98000"/>
+                <a:lumMod val="102000"/>
+              </a:schemeClr>
+            </a:gs>
+            <a:gs pos="50000">
+              <a:schemeClr val="phClr">
+                <a:tint val="98000"/>
+                <a:satMod val="130000"/>
+                <a:shade val="90000"/>
+                <a:lumMod val="103000"/>
+              </a:schemeClr>
+            </a:gs>
+            <a:gs pos="100000">
+              <a:schemeClr val="phClr">
+                <a:shade val="63000"/>
+                <a:satMod val="120000"/>
+              </a:schemeClr>
+            </a:gs>
+          </a:gsLst>
+          <a:lin ang="5400000" scaled="0"/>
+        </a:gradFill>
+      </a:bgFillStyleLst>
+    </a:fmtScheme>
+  </a:themeElements>
+  <a:objectDefaults>
+    <a:lnDef>
+      <a:spPr/>
+      <a:bodyPr/>
+      <a:lstStyle/>
+      <a:style>
+        <a:lnRef idx="2">
+          <a:schemeClr val="accent1"/>
+        </a:lnRef>
+        <a:fillRef idx="0">
+          <a:schemeClr val="accent1"/>
+        </a:fillRef>
+        <a:effectRef idx="1">
+          <a:schemeClr val="accent1"/>
+        </a:effectRef>
+        <a:fontRef idx="minor">
+          <a:schemeClr val="tx1"/>
+        </a:fontRef>
+      </a:style>
+    </a:lnDef>
+  </a:objectDefaults>
+  <a:extraClrSchemeLst/>
+  <a:extLst>
+    <a:ext uri="{05A4C25C-085E-4340-85A3-A5531E510DB2}">
+      <thm15:themeFamily xmlns:thm15="http://schemas.microsoft.com/office/thememl/2012/main" name="Office Theme" id="{2E142A2C-CD16-42D6-873A-C26D2A0506FA}" vid="{1BDDFF52-6CD6-40A5-AB3C-68EB2F1E4D0A}"/>
+    </a:ext>
+  </a:extLst>
+</a:theme>
 </file>